--- a/reports/exp1_cnn_mnist.pptx
+++ b/reports/exp1_cnn_mnist.pptx
@@ -3091,7 +3091,7 @@
     <p:bg>
       <p:bgPr>
         <a:solidFill>
-          <a:srgbClr val="1F497D"/>
+          <a:srgbClr val="1A335C"/>
         </a:solidFill>
         <a:effectLst/>
       </p:bgPr>
@@ -3112,13 +3112,13 @@
         <p:spPr>
           <a:xfrm>
             <a:off x="0" y="0"/>
-            <a:ext cx="12188952" cy="137160"/>
+            <a:ext cx="164592" cy="6858000"/>
           </a:xfrm>
           <a:prstGeom prst="rect">
             <a:avLst/>
           </a:prstGeom>
           <a:solidFill>
-            <a:srgbClr val="C89620"/>
+            <a:srgbClr val="B8860B"/>
           </a:solidFill>
           <a:ln>
             <a:noFill/>
@@ -3146,22 +3146,80 @@
           </a:p>
         </p:txBody>
       </p:sp>
-      <p:sp>
-        <p:nvSpPr>
-          <p:cNvPr id="3" name="Rectangle 2"/>
+      <p:pic>
+        <p:nvPicPr>
+          <p:cNvPr id="3" name="Picture 2" descr="ucas_seal.png"/>
+          <p:cNvPicPr>
+            <a:picLocks noChangeAspect="1"/>
+          </p:cNvPicPr>
+          <p:nvPr/>
+        </p:nvPicPr>
+        <p:blipFill>
+          <a:blip r:embed="rId2"/>
+          <a:stretch>
+            <a:fillRect/>
+          </a:stretch>
+        </p:blipFill>
+        <p:spPr>
+          <a:xfrm>
+            <a:off x="10771632" y="228600"/>
+            <a:ext cx="1188720" cy="1069848"/>
+          </a:xfrm>
+          <a:prstGeom prst="rect">
+            <a:avLst/>
+          </a:prstGeom>
+        </p:spPr>
+      </p:pic>
+      <p:sp>
+        <p:nvSpPr>
+          <p:cNvPr id="4" name="TextBox 3"/>
+          <p:cNvSpPr txBox="1"/>
+          <p:nvPr/>
+        </p:nvSpPr>
+        <p:spPr>
+          <a:xfrm>
+            <a:off x="502920" y="1737360"/>
+            <a:ext cx="10515600" cy="1280160"/>
+          </a:xfrm>
+          <a:prstGeom prst="rect">
+            <a:avLst/>
+          </a:prstGeom>
+          <a:noFill/>
+        </p:spPr>
+        <p:txBody>
+          <a:bodyPr wrap="square">
+            <a:spAutoFit/>
+          </a:bodyPr>
+          <a:lstStyle/>
+          <a:p>
+            <a:pPr algn="l"/>
+            <a:r>
+              <a:rPr sz="3400" b="1" i="0">
+                <a:solidFill>
+                  <a:srgbClr val="FFFFFF"/>
+                </a:solidFill>
+              </a:rPr>
+              <a:t>实验一：手写数字识别</a:t>
+            </a:r>
+          </a:p>
+        </p:txBody>
+      </p:sp>
+      <p:sp>
+        <p:nvSpPr>
+          <p:cNvPr id="5" name="Rectangle 4"/>
           <p:cNvSpPr/>
           <p:nvPr/>
         </p:nvSpPr>
         <p:spPr>
           <a:xfrm>
-            <a:off x="0" y="6720840"/>
-            <a:ext cx="12188952" cy="137160"/>
+            <a:off x="502920" y="3154680"/>
+            <a:ext cx="8686800" cy="36576"/>
           </a:xfrm>
           <a:prstGeom prst="rect">
             <a:avLst/>
           </a:prstGeom>
           <a:solidFill>
-            <a:srgbClr val="C89620"/>
+            <a:srgbClr val="B8860B"/>
           </a:solidFill>
           <a:ln>
             <a:noFill/>
@@ -3191,14 +3249,14 @@
       </p:sp>
       <p:sp>
         <p:nvSpPr>
-          <p:cNvPr id="4" name="TextBox 3"/>
+          <p:cNvPr id="6" name="TextBox 5"/>
           <p:cNvSpPr txBox="1"/>
           <p:nvPr/>
         </p:nvSpPr>
         <p:spPr>
           <a:xfrm>
-            <a:off x="914400" y="2011680"/>
-            <a:ext cx="10360152" cy="1371600"/>
+            <a:off x="502920" y="3291840"/>
+            <a:ext cx="10058400" cy="731520"/>
           </a:xfrm>
           <a:prstGeom prst="rect">
             <a:avLst/>
@@ -3211,28 +3269,28 @@
           </a:bodyPr>
           <a:lstStyle/>
           <a:p>
-            <a:pPr algn="ctr"/>
-            <a:r>
-              <a:rPr sz="3600" b="1">
-                <a:solidFill>
-                  <a:srgbClr val="FFFFFF"/>
+            <a:pPr algn="l"/>
+            <a:r>
+              <a:rPr sz="2000" b="0" i="0">
+                <a:solidFill>
+                  <a:srgbClr val="C8D8F0"/>
                 </a:solidFill>
               </a:rPr>
-              <a:t>实验一：手写数字识别</a:t>
-            </a:r>
-          </a:p>
-        </p:txBody>
-      </p:sp>
-      <p:sp>
-        <p:nvSpPr>
-          <p:cNvPr id="5" name="TextBox 4"/>
+              <a:t>基于卷积神经网络（CNN）的 MNIST 分类 | PyTorch</a:t>
+            </a:r>
+          </a:p>
+        </p:txBody>
+      </p:sp>
+      <p:sp>
+        <p:nvSpPr>
+          <p:cNvPr id="7" name="TextBox 6"/>
           <p:cNvSpPr txBox="1"/>
           <p:nvPr/>
         </p:nvSpPr>
         <p:spPr>
           <a:xfrm>
-            <a:off x="914400" y="3566160"/>
-            <a:ext cx="10360152" cy="914400"/>
+            <a:off x="502920" y="5989320"/>
+            <a:ext cx="10058400" cy="502920"/>
           </a:xfrm>
           <a:prstGeom prst="rect">
             <a:avLst/>
@@ -3245,48 +3303,14 @@
           </a:bodyPr>
           <a:lstStyle/>
           <a:p>
-            <a:pPr algn="ctr"/>
-            <a:r>
-              <a:rPr sz="2200" b="0">
-                <a:solidFill>
-                  <a:srgbClr val="D6E4F0"/>
+            <a:pPr algn="l"/>
+            <a:r>
+              <a:rPr sz="1500" b="0" i="0">
+                <a:solidFill>
+                  <a:srgbClr val="A0B8D0"/>
                 </a:solidFill>
               </a:rPr>
-              <a:t>基于卷积神经网络（CNN）的 MNIST 分类</a:t>
-            </a:r>
-          </a:p>
-        </p:txBody>
-      </p:sp>
-      <p:sp>
-        <p:nvSpPr>
-          <p:cNvPr id="6" name="TextBox 5"/>
-          <p:cNvSpPr txBox="1"/>
-          <p:nvPr/>
-        </p:nvSpPr>
-        <p:spPr>
-          <a:xfrm>
-            <a:off x="914400" y="5760720"/>
-            <a:ext cx="10360152" cy="548640"/>
-          </a:xfrm>
-          <a:prstGeom prst="rect">
-            <a:avLst/>
-          </a:prstGeom>
-          <a:noFill/>
-        </p:spPr>
-        <p:txBody>
-          <a:bodyPr wrap="square">
-            <a:spAutoFit/>
-          </a:bodyPr>
-          <a:lstStyle/>
-          <a:p>
-            <a:pPr algn="ctr"/>
-            <a:r>
-              <a:rPr sz="1600" b="0">
-                <a:solidFill>
-                  <a:srgbClr val="FFFFFF"/>
-                </a:solidFill>
-              </a:rPr>
-              <a:t>华为云 Tesla T4 · PyTorch 2.2 · 2026-05-17</a:t>
+              <a:t>WevYang　|　中国科学院大学  深度学习</a:t>
             </a:r>
           </a:p>
         </p:txBody>
@@ -3326,13 +3350,13 @@
         <p:spPr>
           <a:xfrm>
             <a:off x="0" y="0"/>
-            <a:ext cx="12188952" cy="1005840"/>
+            <a:ext cx="12188952" cy="960120"/>
           </a:xfrm>
           <a:prstGeom prst="rect">
             <a:avLst/>
           </a:prstGeom>
           <a:solidFill>
-            <a:srgbClr val="1F497D"/>
+            <a:srgbClr val="1A335C"/>
           </a:solidFill>
           <a:ln>
             <a:noFill/>
@@ -3362,14 +3386,57 @@
       </p:sp>
       <p:sp>
         <p:nvSpPr>
-          <p:cNvPr id="3" name="TextBox 2"/>
+          <p:cNvPr id="3" name="Rectangle 2"/>
+          <p:cNvSpPr/>
+          <p:nvPr/>
+        </p:nvSpPr>
+        <p:spPr>
+          <a:xfrm>
+            <a:off x="0" y="0"/>
+            <a:ext cx="164592" cy="6858000"/>
+          </a:xfrm>
+          <a:prstGeom prst="rect">
+            <a:avLst/>
+          </a:prstGeom>
+          <a:solidFill>
+            <a:srgbClr val="1A335C"/>
+          </a:solidFill>
+          <a:ln>
+            <a:noFill/>
+          </a:ln>
+        </p:spPr>
+        <p:style>
+          <a:lnRef idx="1">
+            <a:schemeClr val="accent1"/>
+          </a:lnRef>
+          <a:fillRef idx="3">
+            <a:schemeClr val="accent1"/>
+          </a:fillRef>
+          <a:effectRef idx="2">
+            <a:schemeClr val="accent1"/>
+          </a:effectRef>
+          <a:fontRef idx="minor">
+            <a:schemeClr val="lt1"/>
+          </a:fontRef>
+        </p:style>
+        <p:txBody>
+          <a:bodyPr rtlCol="0" anchor="ctr"/>
+          <a:lstStyle/>
+          <a:p>
+            <a:pPr algn="ctr"/>
+          </a:p>
+        </p:txBody>
+      </p:sp>
+      <p:sp>
+        <p:nvSpPr>
+          <p:cNvPr id="4" name="TextBox 3"/>
           <p:cNvSpPr txBox="1"/>
           <p:nvPr/>
         </p:nvSpPr>
         <p:spPr>
           <a:xfrm>
-            <a:off x="274320" y="91440"/>
-            <a:ext cx="11612880" cy="822960"/>
+            <a:off x="347472" y="91440"/>
+            <a:ext cx="11521440" cy="777240"/>
           </a:xfrm>
           <a:prstGeom prst="rect">
             <a:avLst/>
@@ -3384,26 +3451,26 @@
           <a:p>
             <a:pPr algn="l"/>
             <a:r>
-              <a:rPr sz="2400" b="1">
+              <a:rPr sz="2300" b="1" i="0">
                 <a:solidFill>
                   <a:srgbClr val="FFFFFF"/>
                 </a:solidFill>
               </a:rPr>
-              <a:t>实验目的与要求</a:t>
-            </a:r>
-          </a:p>
-        </p:txBody>
-      </p:sp>
-      <p:sp>
-        <p:nvSpPr>
-          <p:cNvPr id="4" name="TextBox 3"/>
+              <a:t>概述</a:t>
+            </a:r>
+          </a:p>
+        </p:txBody>
+      </p:sp>
+      <p:sp>
+        <p:nvSpPr>
+          <p:cNvPr id="5" name="TextBox 4"/>
           <p:cNvSpPr txBox="1"/>
           <p:nvPr/>
         </p:nvSpPr>
         <p:spPr>
           <a:xfrm>
-            <a:off x="457200" y="1188720"/>
-            <a:ext cx="11247120" cy="502920"/>
+            <a:off x="411480" y="1115568"/>
+            <a:ext cx="11247120" cy="475488"/>
           </a:xfrm>
           <a:prstGeom prst="rect">
             <a:avLst/>
@@ -3418,26 +3485,26 @@
           <a:p>
             <a:pPr algn="l"/>
             <a:r>
-              <a:rPr sz="1800" b="0">
-                <a:solidFill>
-                  <a:srgbClr val="1A1A2E"/>
+              <a:rPr sz="1700" b="0" i="0">
+                <a:solidFill>
+                  <a:srgbClr val="1C1C1C"/>
                 </a:solidFill>
               </a:rPr>
-              <a:t>  • 掌握卷积神经网络（CNN）基本原理</a:t>
-            </a:r>
-          </a:p>
-        </p:txBody>
-      </p:sp>
-      <p:sp>
-        <p:nvSpPr>
-          <p:cNvPr id="5" name="TextBox 4"/>
+              <a:t>▸ 任务：对 MNIST 手写数字（0–9）进行 10 分类</a:t>
+            </a:r>
+          </a:p>
+        </p:txBody>
+      </p:sp>
+      <p:sp>
+        <p:nvSpPr>
+          <p:cNvPr id="6" name="TextBox 5"/>
           <p:cNvSpPr txBox="1"/>
           <p:nvPr/>
         </p:nvSpPr>
         <p:spPr>
           <a:xfrm>
-            <a:off x="457200" y="1664208"/>
-            <a:ext cx="11247120" cy="502920"/>
+            <a:off x="411480" y="1591056"/>
+            <a:ext cx="11247120" cy="475488"/>
           </a:xfrm>
           <a:prstGeom prst="rect">
             <a:avLst/>
@@ -3452,26 +3519,26 @@
           <a:p>
             <a:pPr algn="l"/>
             <a:r>
-              <a:rPr sz="1800" b="0">
-                <a:solidFill>
-                  <a:srgbClr val="1A1A2E"/>
+              <a:rPr sz="1700" b="0" i="0">
+                <a:solidFill>
+                  <a:srgbClr val="1C1C1C"/>
                 </a:solidFill>
               </a:rPr>
-              <a:t>  • 掌握 PyTorch 构建 CNN 的基本操作</a:t>
-            </a:r>
-          </a:p>
-        </p:txBody>
-      </p:sp>
-      <p:sp>
-        <p:nvSpPr>
-          <p:cNvPr id="6" name="TextBox 5"/>
+              <a:t>▸ 数据集：MNIST，共 70,000 张 28×28 灰度图</a:t>
+            </a:r>
+          </a:p>
+        </p:txBody>
+      </p:sp>
+      <p:sp>
+        <p:nvSpPr>
+          <p:cNvPr id="7" name="TextBox 6"/>
           <p:cNvSpPr txBox="1"/>
           <p:nvPr/>
         </p:nvSpPr>
         <p:spPr>
           <a:xfrm>
-            <a:off x="457200" y="2139696"/>
-            <a:ext cx="11247120" cy="502920"/>
+            <a:off x="411480" y="2066543"/>
+            <a:ext cx="11247120" cy="475488"/>
           </a:xfrm>
           <a:prstGeom prst="rect">
             <a:avLst/>
@@ -3486,26 +3553,26 @@
           <a:p>
             <a:pPr algn="l"/>
             <a:r>
-              <a:rPr sz="1800" b="0">
-                <a:solidFill>
-                  <a:srgbClr val="1A1A2E"/>
+              <a:rPr sz="1700" b="0" i="0">
+                <a:solidFill>
+                  <a:srgbClr val="1C1C1C"/>
                 </a:solidFill>
               </a:rPr>
-              <a:t>  • 了解 PyTorch 在 GPU 上的使用方法</a:t>
-            </a:r>
-          </a:p>
-        </p:txBody>
-      </p:sp>
-      <p:sp>
-        <p:nvSpPr>
-          <p:cNvPr id="7" name="TextBox 6"/>
+              <a:t>▸ 解决方案：改进版 LeNet——双卷积块 + BatchNorm + Dropout + 全连接分类头</a:t>
+            </a:r>
+          </a:p>
+        </p:txBody>
+      </p:sp>
+      <p:sp>
+        <p:nvSpPr>
+          <p:cNvPr id="8" name="TextBox 7"/>
           <p:cNvSpPr txBox="1"/>
           <p:nvPr/>
         </p:nvSpPr>
         <p:spPr>
           <a:xfrm>
-            <a:off x="457200" y="2615184"/>
-            <a:ext cx="11247120" cy="502920"/>
+            <a:off x="411480" y="2542032"/>
+            <a:ext cx="11247120" cy="475488"/>
           </a:xfrm>
           <a:prstGeom prst="rect">
             <a:avLst/>
@@ -3520,32 +3587,100 @@
           <a:p>
             <a:pPr algn="l"/>
             <a:r>
-              <a:rPr sz="1800" b="0">
-                <a:solidFill>
-                  <a:srgbClr val="1A1A2E"/>
+              <a:rPr sz="1700" b="0" i="0">
+                <a:solidFill>
+                  <a:srgbClr val="1C1C1C"/>
                 </a:solidFill>
               </a:rPr>
-              <a:t>  • 在 MNIST 数据集上训练，实现测试准确率 ≥ 98%</a:t>
-            </a:r>
-          </a:p>
-        </p:txBody>
-      </p:sp>
-      <p:sp>
-        <p:nvSpPr>
-          <p:cNvPr id="8" name="Rectangle 7"/>
+              <a:t>▸ 评估指标：测试集分类准确率（目标 ≥ 98%）</a:t>
+            </a:r>
+          </a:p>
+        </p:txBody>
+      </p:sp>
+      <p:sp>
+        <p:nvSpPr>
+          <p:cNvPr id="9" name="TextBox 8"/>
+          <p:cNvSpPr txBox="1"/>
+          <p:nvPr/>
+        </p:nvSpPr>
+        <p:spPr>
+          <a:xfrm>
+            <a:off x="411480" y="3017520"/>
+            <a:ext cx="11247120" cy="475488"/>
+          </a:xfrm>
+          <a:prstGeom prst="rect">
+            <a:avLst/>
+          </a:prstGeom>
+          <a:noFill/>
+        </p:spPr>
+        <p:txBody>
+          <a:bodyPr wrap="square">
+            <a:spAutoFit/>
+          </a:bodyPr>
+          <a:lstStyle/>
+          <a:p>
+            <a:pPr algn="l"/>
+            <a:r>
+              <a:rPr sz="1700" b="0" i="0">
+                <a:solidFill>
+                  <a:srgbClr val="1C1C1C"/>
+                </a:solidFill>
+              </a:rPr>
+              <a:t>▸ 训练环境：华为云 Tesla T4 GPU，PyTorch 2.2 + AMP 混合精度</a:t>
+            </a:r>
+          </a:p>
+        </p:txBody>
+      </p:sp>
+      <p:sp>
+        <p:nvSpPr>
+          <p:cNvPr id="10" name="TextBox 9"/>
+          <p:cNvSpPr txBox="1"/>
+          <p:nvPr/>
+        </p:nvSpPr>
+        <p:spPr>
+          <a:xfrm>
+            <a:off x="411480" y="3493008"/>
+            <a:ext cx="11247120" cy="475488"/>
+          </a:xfrm>
+          <a:prstGeom prst="rect">
+            <a:avLst/>
+          </a:prstGeom>
+          <a:noFill/>
+        </p:spPr>
+        <p:txBody>
+          <a:bodyPr wrap="square">
+            <a:spAutoFit/>
+          </a:bodyPr>
+          <a:lstStyle/>
+          <a:p>
+            <a:pPr algn="l"/>
+            <a:r>
+              <a:rPr sz="1600" b="0" i="0">
+                <a:solidFill>
+                  <a:srgbClr val="555555"/>
+                </a:solidFill>
+              </a:rPr>
+              <a:t>    – 最终结果：test_acc = 99.23%，超过目标要求</a:t>
+            </a:r>
+          </a:p>
+        </p:txBody>
+      </p:sp>
+      <p:sp>
+        <p:nvSpPr>
+          <p:cNvPr id="11" name="Rectangle 10"/>
           <p:cNvSpPr/>
           <p:nvPr/>
         </p:nvSpPr>
         <p:spPr>
           <a:xfrm>
-            <a:off x="0" y="6675120"/>
-            <a:ext cx="12188952" cy="73152"/>
+            <a:off x="0" y="6748272"/>
+            <a:ext cx="12188952" cy="109728"/>
           </a:xfrm>
           <a:prstGeom prst="rect">
             <a:avLst/>
           </a:prstGeom>
           <a:solidFill>
-            <a:srgbClr val="1F497D"/>
+            <a:srgbClr val="1A335C"/>
           </a:solidFill>
           <a:ln>
             <a:noFill/>
@@ -3608,13 +3743,13 @@
         <p:spPr>
           <a:xfrm>
             <a:off x="0" y="0"/>
-            <a:ext cx="12188952" cy="1005840"/>
+            <a:ext cx="12188952" cy="960120"/>
           </a:xfrm>
           <a:prstGeom prst="rect">
             <a:avLst/>
           </a:prstGeom>
           <a:solidFill>
-            <a:srgbClr val="1F497D"/>
+            <a:srgbClr val="1A335C"/>
           </a:solidFill>
           <a:ln>
             <a:noFill/>
@@ -3644,14 +3779,57 @@
       </p:sp>
       <p:sp>
         <p:nvSpPr>
-          <p:cNvPr id="3" name="TextBox 2"/>
+          <p:cNvPr id="3" name="Rectangle 2"/>
+          <p:cNvSpPr/>
+          <p:nvPr/>
+        </p:nvSpPr>
+        <p:spPr>
+          <a:xfrm>
+            <a:off x="0" y="0"/>
+            <a:ext cx="164592" cy="6858000"/>
+          </a:xfrm>
+          <a:prstGeom prst="rect">
+            <a:avLst/>
+          </a:prstGeom>
+          <a:solidFill>
+            <a:srgbClr val="1A335C"/>
+          </a:solidFill>
+          <a:ln>
+            <a:noFill/>
+          </a:ln>
+        </p:spPr>
+        <p:style>
+          <a:lnRef idx="1">
+            <a:schemeClr val="accent1"/>
+          </a:lnRef>
+          <a:fillRef idx="3">
+            <a:schemeClr val="accent1"/>
+          </a:fillRef>
+          <a:effectRef idx="2">
+            <a:schemeClr val="accent1"/>
+          </a:effectRef>
+          <a:fontRef idx="minor">
+            <a:schemeClr val="lt1"/>
+          </a:fontRef>
+        </p:style>
+        <p:txBody>
+          <a:bodyPr rtlCol="0" anchor="ctr"/>
+          <a:lstStyle/>
+          <a:p>
+            <a:pPr algn="ctr"/>
+          </a:p>
+        </p:txBody>
+      </p:sp>
+      <p:sp>
+        <p:nvSpPr>
+          <p:cNvPr id="4" name="TextBox 3"/>
           <p:cNvSpPr txBox="1"/>
           <p:nvPr/>
         </p:nvSpPr>
         <p:spPr>
           <a:xfrm>
-            <a:off x="274320" y="91440"/>
-            <a:ext cx="11612880" cy="822960"/>
+            <a:off x="347472" y="91440"/>
+            <a:ext cx="11521440" cy="777240"/>
           </a:xfrm>
           <a:prstGeom prst="rect">
             <a:avLst/>
@@ -3666,7 +3844,7 @@
           <a:p>
             <a:pPr algn="l"/>
             <a:r>
-              <a:rPr sz="2400" b="1">
+              <a:rPr sz="2300" b="1" i="0">
                 <a:solidFill>
                   <a:srgbClr val="FFFFFF"/>
                 </a:solidFill>
@@ -3678,14 +3856,14 @@
       </p:sp>
       <p:sp>
         <p:nvSpPr>
-          <p:cNvPr id="4" name="TextBox 3"/>
+          <p:cNvPr id="5" name="TextBox 4"/>
           <p:cNvSpPr txBox="1"/>
           <p:nvPr/>
         </p:nvSpPr>
         <p:spPr>
           <a:xfrm>
-            <a:off x="457200" y="1188720"/>
-            <a:ext cx="11247120" cy="502920"/>
+            <a:off x="411480" y="1115568"/>
+            <a:ext cx="11247120" cy="475488"/>
           </a:xfrm>
           <a:prstGeom prst="rect">
             <a:avLst/>
@@ -3700,26 +3878,26 @@
           <a:p>
             <a:pPr algn="l"/>
             <a:r>
-              <a:rPr sz="1800" b="0">
-                <a:solidFill>
-                  <a:srgbClr val="1A1A2E"/>
+              <a:rPr sz="1700" b="0" i="0">
+                <a:solidFill>
+                  <a:srgbClr val="1C1C1C"/>
                 </a:solidFill>
               </a:rPr>
-              <a:t>  • 手写数字 0–9，共 10 类</a:t>
-            </a:r>
-          </a:p>
-        </p:txBody>
-      </p:sp>
-      <p:sp>
-        <p:nvSpPr>
-          <p:cNvPr id="5" name="TextBox 4"/>
+              <a:t>▸ 来源：Yann LeCun 等人，1998 年发布，深度学习领域标准基准之一</a:t>
+            </a:r>
+          </a:p>
+        </p:txBody>
+      </p:sp>
+      <p:sp>
+        <p:nvSpPr>
+          <p:cNvPr id="6" name="TextBox 5"/>
           <p:cNvSpPr txBox="1"/>
           <p:nvPr/>
         </p:nvSpPr>
         <p:spPr>
           <a:xfrm>
-            <a:off x="457200" y="1664208"/>
-            <a:ext cx="11247120" cy="502920"/>
+            <a:off x="411480" y="1591056"/>
+            <a:ext cx="11247120" cy="475488"/>
           </a:xfrm>
           <a:prstGeom prst="rect">
             <a:avLst/>
@@ -3734,26 +3912,26 @@
           <a:p>
             <a:pPr algn="l"/>
             <a:r>
-              <a:rPr sz="1800" b="0">
-                <a:solidFill>
-                  <a:srgbClr val="1A1A2E"/>
+              <a:rPr sz="1700" b="0" i="0">
+                <a:solidFill>
+                  <a:srgbClr val="1C1C1C"/>
                 </a:solidFill>
               </a:rPr>
-              <a:t>  • 训练集：60,000 张灰度图（28×28）</a:t>
-            </a:r>
-          </a:p>
-        </p:txBody>
-      </p:sp>
-      <p:sp>
-        <p:nvSpPr>
-          <p:cNvPr id="6" name="TextBox 5"/>
+              <a:t>▸ 规模：训练集 60,000 张 + 测试集 10,000 张，共 10 类数字</a:t>
+            </a:r>
+          </a:p>
+        </p:txBody>
+      </p:sp>
+      <p:sp>
+        <p:nvSpPr>
+          <p:cNvPr id="7" name="TextBox 6"/>
           <p:cNvSpPr txBox="1"/>
           <p:nvPr/>
         </p:nvSpPr>
         <p:spPr>
           <a:xfrm>
-            <a:off x="457200" y="2139696"/>
-            <a:ext cx="11247120" cy="502920"/>
+            <a:off x="411480" y="2066543"/>
+            <a:ext cx="11247120" cy="475488"/>
           </a:xfrm>
           <a:prstGeom prst="rect">
             <a:avLst/>
@@ -3768,26 +3946,26 @@
           <a:p>
             <a:pPr algn="l"/>
             <a:r>
-              <a:rPr sz="1800" b="0">
-                <a:solidFill>
-                  <a:srgbClr val="1A1A2E"/>
+              <a:rPr sz="1700" b="0" i="0">
+                <a:solidFill>
+                  <a:srgbClr val="1C1C1C"/>
                 </a:solidFill>
               </a:rPr>
-              <a:t>  • 测试集：10,000 张</a:t>
-            </a:r>
-          </a:p>
-        </p:txBody>
-      </p:sp>
-      <p:sp>
-        <p:nvSpPr>
-          <p:cNvPr id="7" name="TextBox 6"/>
+              <a:t>▸ 图像大小：28×28 像素，单通道灰度，像素值 0–255</a:t>
+            </a:r>
+          </a:p>
+        </p:txBody>
+      </p:sp>
+      <p:sp>
+        <p:nvSpPr>
+          <p:cNvPr id="8" name="TextBox 7"/>
           <p:cNvSpPr txBox="1"/>
           <p:nvPr/>
         </p:nvSpPr>
         <p:spPr>
           <a:xfrm>
-            <a:off x="457200" y="2615184"/>
-            <a:ext cx="11247120" cy="502920"/>
+            <a:off x="411480" y="2542032"/>
+            <a:ext cx="11247120" cy="475488"/>
           </a:xfrm>
           <a:prstGeom prst="rect">
             <a:avLst/>
@@ -3802,26 +3980,26 @@
           <a:p>
             <a:pPr algn="l"/>
             <a:r>
-              <a:rPr sz="1800" b="0">
-                <a:solidFill>
-                  <a:srgbClr val="1A1A2E"/>
+              <a:rPr sz="1700" b="0" i="0">
+                <a:solidFill>
+                  <a:srgbClr val="1C1C1C"/>
                 </a:solidFill>
               </a:rPr>
-              <a:t>  • 使用 torchvision.datasets.MNIST 自动下载</a:t>
-            </a:r>
-          </a:p>
-        </p:txBody>
-      </p:sp>
-      <p:sp>
-        <p:nvSpPr>
-          <p:cNvPr id="8" name="TextBox 7"/>
+              <a:t>▸ 本实验切出 10% 训练样本（6,000 张）作为验证集</a:t>
+            </a:r>
+          </a:p>
+        </p:txBody>
+      </p:sp>
+      <p:sp>
+        <p:nvSpPr>
+          <p:cNvPr id="9" name="TextBox 8"/>
           <p:cNvSpPr txBox="1"/>
           <p:nvPr/>
         </p:nvSpPr>
         <p:spPr>
           <a:xfrm>
-            <a:off x="457200" y="3090672"/>
-            <a:ext cx="11247120" cy="502920"/>
+            <a:off x="411480" y="3017520"/>
+            <a:ext cx="11247120" cy="475488"/>
           </a:xfrm>
           <a:prstGeom prst="rect">
             <a:avLst/>
@@ -3836,26 +4014,26 @@
           <a:p>
             <a:pPr algn="l"/>
             <a:r>
-              <a:rPr sz="1800" b="0">
-                <a:solidFill>
-                  <a:srgbClr val="1A1A2E"/>
+              <a:rPr sz="1700" b="0" i="0">
+                <a:solidFill>
+                  <a:srgbClr val="1C1C1C"/>
                 </a:solidFill>
               </a:rPr>
-              <a:t>  • 训练时切出 10% 作为验证集（6,000 张）</a:t>
-            </a:r>
-          </a:p>
-        </p:txBody>
-      </p:sp>
-      <p:sp>
-        <p:nvSpPr>
-          <p:cNvPr id="9" name="TextBox 8"/>
+              <a:t>▸ 数据预处理：Normalize(mean=0.1307, std=0.3081)，对齐像素分布</a:t>
+            </a:r>
+          </a:p>
+        </p:txBody>
+      </p:sp>
+      <p:sp>
+        <p:nvSpPr>
+          <p:cNvPr id="10" name="TextBox 9"/>
           <p:cNvSpPr txBox="1"/>
           <p:nvPr/>
         </p:nvSpPr>
         <p:spPr>
           <a:xfrm>
-            <a:off x="457200" y="3566160"/>
-            <a:ext cx="11247120" cy="502920"/>
+            <a:off x="411480" y="3493008"/>
+            <a:ext cx="11247120" cy="475488"/>
           </a:xfrm>
           <a:prstGeom prst="rect">
             <a:avLst/>
@@ -3870,32 +4048,32 @@
           <a:p>
             <a:pPr algn="l"/>
             <a:r>
-              <a:rPr sz="1800" b="0">
-                <a:solidFill>
-                  <a:srgbClr val="1A1A2E"/>
+              <a:rPr sz="1600" b="0" i="0">
+                <a:solidFill>
+                  <a:srgbClr val="555555"/>
                 </a:solidFill>
               </a:rPr>
-              <a:t>  • 数据标准化：mean=0.1307, std=0.3081</a:t>
-            </a:r>
-          </a:p>
-        </p:txBody>
-      </p:sp>
-      <p:sp>
-        <p:nvSpPr>
-          <p:cNvPr id="10" name="Rectangle 9"/>
+              <a:t>    – 数据增强：训练时不做额外增强（MNIST 本身难度较低，无需增强）</a:t>
+            </a:r>
+          </a:p>
+        </p:txBody>
+      </p:sp>
+      <p:sp>
+        <p:nvSpPr>
+          <p:cNvPr id="11" name="Rectangle 10"/>
           <p:cNvSpPr/>
           <p:nvPr/>
         </p:nvSpPr>
         <p:spPr>
           <a:xfrm>
-            <a:off x="0" y="6675120"/>
-            <a:ext cx="12188952" cy="73152"/>
+            <a:off x="0" y="6748272"/>
+            <a:ext cx="12188952" cy="109728"/>
           </a:xfrm>
           <a:prstGeom prst="rect">
             <a:avLst/>
           </a:prstGeom>
           <a:solidFill>
-            <a:srgbClr val="1F497D"/>
+            <a:srgbClr val="1A335C"/>
           </a:solidFill>
           <a:ln>
             <a:noFill/>
@@ -3958,13 +4136,13 @@
         <p:spPr>
           <a:xfrm>
             <a:off x="0" y="0"/>
-            <a:ext cx="12188952" cy="1005840"/>
+            <a:ext cx="12188952" cy="960120"/>
           </a:xfrm>
           <a:prstGeom prst="rect">
             <a:avLst/>
           </a:prstGeom>
           <a:solidFill>
-            <a:srgbClr val="1F497D"/>
+            <a:srgbClr val="1A335C"/>
           </a:solidFill>
           <a:ln>
             <a:noFill/>
@@ -3994,54 +4172,20 @@
       </p:sp>
       <p:sp>
         <p:nvSpPr>
-          <p:cNvPr id="3" name="TextBox 2"/>
-          <p:cNvSpPr txBox="1"/>
-          <p:nvPr/>
-        </p:nvSpPr>
-        <p:spPr>
-          <a:xfrm>
-            <a:off x="274320" y="91440"/>
-            <a:ext cx="11612880" cy="822960"/>
-          </a:xfrm>
-          <a:prstGeom prst="rect">
-            <a:avLst/>
-          </a:prstGeom>
-          <a:noFill/>
-        </p:spPr>
-        <p:txBody>
-          <a:bodyPr wrap="square">
-            <a:spAutoFit/>
-          </a:bodyPr>
-          <a:lstStyle/>
-          <a:p>
-            <a:pPr algn="l"/>
-            <a:r>
-              <a:rPr sz="2400" b="1">
-                <a:solidFill>
-                  <a:srgbClr val="FFFFFF"/>
-                </a:solidFill>
-              </a:rPr>
-              <a:t>模型结构：改进版 LeNet</a:t>
-            </a:r>
-          </a:p>
-        </p:txBody>
-      </p:sp>
-      <p:sp>
-        <p:nvSpPr>
-          <p:cNvPr id="4" name="Rectangle 3"/>
+          <p:cNvPr id="3" name="Rectangle 2"/>
           <p:cNvSpPr/>
           <p:nvPr/>
         </p:nvSpPr>
         <p:spPr>
           <a:xfrm>
-            <a:off x="365760" y="1097280"/>
-            <a:ext cx="5394960" cy="457200"/>
+            <a:off x="0" y="0"/>
+            <a:ext cx="164592" cy="6858000"/>
           </a:xfrm>
           <a:prstGeom prst="rect">
             <a:avLst/>
           </a:prstGeom>
           <a:solidFill>
-            <a:srgbClr val="D6E4F0"/>
+            <a:srgbClr val="1A335C"/>
           </a:solidFill>
           <a:ln>
             <a:noFill/>
@@ -4071,14 +4215,14 @@
       </p:sp>
       <p:sp>
         <p:nvSpPr>
-          <p:cNvPr id="5" name="TextBox 4"/>
+          <p:cNvPr id="4" name="TextBox 3"/>
           <p:cNvSpPr txBox="1"/>
           <p:nvPr/>
         </p:nvSpPr>
         <p:spPr>
           <a:xfrm>
-            <a:off x="457200" y="1143000"/>
-            <a:ext cx="5212080" cy="411480"/>
+            <a:off x="347472" y="91440"/>
+            <a:ext cx="11521440" cy="777240"/>
           </a:xfrm>
           <a:prstGeom prst="rect">
             <a:avLst/>
@@ -4093,236 +4237,32 @@
           <a:p>
             <a:pPr algn="l"/>
             <a:r>
-              <a:rPr sz="1800" b="1">
-                <a:solidFill>
-                  <a:srgbClr val="1F497D"/>
+              <a:rPr sz="2300" b="1" i="0">
+                <a:solidFill>
+                  <a:srgbClr val="FFFFFF"/>
                 </a:solidFill>
               </a:rPr>
-              <a:t>第一卷积块（28×28→14×14）</a:t>
-            </a:r>
-          </a:p>
-        </p:txBody>
-      </p:sp>
-      <p:sp>
-        <p:nvSpPr>
-          <p:cNvPr id="6" name="TextBox 5"/>
-          <p:cNvSpPr txBox="1"/>
-          <p:nvPr/>
-        </p:nvSpPr>
-        <p:spPr>
-          <a:xfrm>
-            <a:off x="457200" y="1645920"/>
-            <a:ext cx="5303520" cy="502920"/>
-          </a:xfrm>
-          <a:prstGeom prst="rect">
-            <a:avLst/>
-          </a:prstGeom>
-          <a:noFill/>
-        </p:spPr>
-        <p:txBody>
-          <a:bodyPr wrap="square">
-            <a:spAutoFit/>
-          </a:bodyPr>
-          <a:lstStyle/>
-          <a:p>
-            <a:pPr algn="l"/>
-            <a:r>
-              <a:rPr sz="1700" b="0">
-                <a:solidFill>
-                  <a:srgbClr val="1A1A2E"/>
-                </a:solidFill>
-              </a:rPr>
-              <a:t>• Conv2d(1→32, 3×3, pad=1)</a:t>
-            </a:r>
-          </a:p>
-        </p:txBody>
-      </p:sp>
-      <p:sp>
-        <p:nvSpPr>
-          <p:cNvPr id="7" name="TextBox 6"/>
-          <p:cNvSpPr txBox="1"/>
-          <p:nvPr/>
-        </p:nvSpPr>
-        <p:spPr>
-          <a:xfrm>
-            <a:off x="457200" y="2121408"/>
-            <a:ext cx="5303520" cy="502920"/>
-          </a:xfrm>
-          <a:prstGeom prst="rect">
-            <a:avLst/>
-          </a:prstGeom>
-          <a:noFill/>
-        </p:spPr>
-        <p:txBody>
-          <a:bodyPr wrap="square">
-            <a:spAutoFit/>
-          </a:bodyPr>
-          <a:lstStyle/>
-          <a:p>
-            <a:pPr algn="l"/>
-            <a:r>
-              <a:rPr sz="1700" b="0">
-                <a:solidFill>
-                  <a:srgbClr val="1A1A2E"/>
-                </a:solidFill>
-              </a:rPr>
-              <a:t>• BatchNorm2d(32)</a:t>
-            </a:r>
-          </a:p>
-        </p:txBody>
-      </p:sp>
-      <p:sp>
-        <p:nvSpPr>
-          <p:cNvPr id="8" name="TextBox 7"/>
-          <p:cNvSpPr txBox="1"/>
-          <p:nvPr/>
-        </p:nvSpPr>
-        <p:spPr>
-          <a:xfrm>
-            <a:off x="457200" y="2596896"/>
-            <a:ext cx="5303520" cy="502920"/>
-          </a:xfrm>
-          <a:prstGeom prst="rect">
-            <a:avLst/>
-          </a:prstGeom>
-          <a:noFill/>
-        </p:spPr>
-        <p:txBody>
-          <a:bodyPr wrap="square">
-            <a:spAutoFit/>
-          </a:bodyPr>
-          <a:lstStyle/>
-          <a:p>
-            <a:pPr algn="l"/>
-            <a:r>
-              <a:rPr sz="1700" b="0">
-                <a:solidFill>
-                  <a:srgbClr val="1A1A2E"/>
-                </a:solidFill>
-              </a:rPr>
-              <a:t>• ReLU</a:t>
-            </a:r>
-          </a:p>
-        </p:txBody>
-      </p:sp>
-      <p:sp>
-        <p:nvSpPr>
-          <p:cNvPr id="9" name="TextBox 8"/>
-          <p:cNvSpPr txBox="1"/>
-          <p:nvPr/>
-        </p:nvSpPr>
-        <p:spPr>
-          <a:xfrm>
-            <a:off x="457200" y="3072384"/>
-            <a:ext cx="5303520" cy="502920"/>
-          </a:xfrm>
-          <a:prstGeom prst="rect">
-            <a:avLst/>
-          </a:prstGeom>
-          <a:noFill/>
-        </p:spPr>
-        <p:txBody>
-          <a:bodyPr wrap="square">
-            <a:spAutoFit/>
-          </a:bodyPr>
-          <a:lstStyle/>
-          <a:p>
-            <a:pPr algn="l"/>
-            <a:r>
-              <a:rPr sz="1700" b="0">
-                <a:solidFill>
-                  <a:srgbClr val="1A1A2E"/>
-                </a:solidFill>
-              </a:rPr>
-              <a:t>• Conv2d(32→32, 3×3, pad=1)</a:t>
-            </a:r>
-          </a:p>
-        </p:txBody>
-      </p:sp>
-      <p:sp>
-        <p:nvSpPr>
-          <p:cNvPr id="10" name="TextBox 9"/>
-          <p:cNvSpPr txBox="1"/>
-          <p:nvPr/>
-        </p:nvSpPr>
-        <p:spPr>
-          <a:xfrm>
-            <a:off x="457200" y="3547872"/>
-            <a:ext cx="5303520" cy="502920"/>
-          </a:xfrm>
-          <a:prstGeom prst="rect">
-            <a:avLst/>
-          </a:prstGeom>
-          <a:noFill/>
-        </p:spPr>
-        <p:txBody>
-          <a:bodyPr wrap="square">
-            <a:spAutoFit/>
-          </a:bodyPr>
-          <a:lstStyle/>
-          <a:p>
-            <a:pPr algn="l"/>
-            <a:r>
-              <a:rPr sz="1700" b="0">
-                <a:solidFill>
-                  <a:srgbClr val="1A1A2E"/>
-                </a:solidFill>
-              </a:rPr>
-              <a:t>• BatchNorm2d + ReLU</a:t>
-            </a:r>
-          </a:p>
-        </p:txBody>
-      </p:sp>
-      <p:sp>
-        <p:nvSpPr>
-          <p:cNvPr id="11" name="TextBox 10"/>
-          <p:cNvSpPr txBox="1"/>
-          <p:nvPr/>
-        </p:nvSpPr>
-        <p:spPr>
-          <a:xfrm>
-            <a:off x="457200" y="4023360"/>
-            <a:ext cx="5303520" cy="502920"/>
-          </a:xfrm>
-          <a:prstGeom prst="rect">
-            <a:avLst/>
-          </a:prstGeom>
-          <a:noFill/>
-        </p:spPr>
-        <p:txBody>
-          <a:bodyPr wrap="square">
-            <a:spAutoFit/>
-          </a:bodyPr>
-          <a:lstStyle/>
-          <a:p>
-            <a:pPr algn="l"/>
-            <a:r>
-              <a:rPr sz="1700" b="0">
-                <a:solidFill>
-                  <a:srgbClr val="1A1A2E"/>
-                </a:solidFill>
-              </a:rPr>
-              <a:t>• MaxPool2d(2) + Dropout2d(0.1)</a:t>
-            </a:r>
-          </a:p>
-        </p:txBody>
-      </p:sp>
-      <p:sp>
-        <p:nvSpPr>
-          <p:cNvPr id="12" name="Rectangle 11"/>
+              <a:t>解决方案：网络结构设计</a:t>
+            </a:r>
+          </a:p>
+        </p:txBody>
+      </p:sp>
+      <p:sp>
+        <p:nvSpPr>
+          <p:cNvPr id="5" name="Rectangle 4"/>
           <p:cNvSpPr/>
           <p:nvPr/>
         </p:nvSpPr>
         <p:spPr>
           <a:xfrm>
-            <a:off x="6400800" y="1097280"/>
-            <a:ext cx="5394960" cy="457200"/>
+            <a:off x="347472" y="1051560"/>
+            <a:ext cx="5394960" cy="438912"/>
           </a:xfrm>
           <a:prstGeom prst="rect">
             <a:avLst/>
           </a:prstGeom>
           <a:solidFill>
-            <a:srgbClr val="D6E4F0"/>
+            <a:srgbClr val="E8F0F8"/>
           </a:solidFill>
           <a:ln>
             <a:noFill/>
@@ -4352,14 +4292,14 @@
       </p:sp>
       <p:sp>
         <p:nvSpPr>
-          <p:cNvPr id="13" name="TextBox 12"/>
+          <p:cNvPr id="6" name="TextBox 5"/>
           <p:cNvSpPr txBox="1"/>
           <p:nvPr/>
         </p:nvSpPr>
         <p:spPr>
           <a:xfrm>
-            <a:off x="6492240" y="1143000"/>
-            <a:ext cx="5212080" cy="411480"/>
+            <a:off x="438912" y="1097280"/>
+            <a:ext cx="5212080" cy="347472"/>
           </a:xfrm>
           <a:prstGeom prst="rect">
             <a:avLst/>
@@ -4374,26 +4314,26 @@
           <a:p>
             <a:pPr algn="l"/>
             <a:r>
-              <a:rPr sz="1800" b="1">
-                <a:solidFill>
-                  <a:srgbClr val="1F497D"/>
+              <a:rPr sz="1700" b="1" i="0">
+                <a:solidFill>
+                  <a:srgbClr val="1A335C"/>
                 </a:solidFill>
               </a:rPr>
-              <a:t>第二卷积块（14×14→7×7）+ 分类头</a:t>
-            </a:r>
-          </a:p>
-        </p:txBody>
-      </p:sp>
-      <p:sp>
-        <p:nvSpPr>
-          <p:cNvPr id="14" name="TextBox 13"/>
+              <a:t>第一卷积块（28×28 → 14×14）</a:t>
+            </a:r>
+          </a:p>
+        </p:txBody>
+      </p:sp>
+      <p:sp>
+        <p:nvSpPr>
+          <p:cNvPr id="7" name="TextBox 6"/>
           <p:cNvSpPr txBox="1"/>
           <p:nvPr/>
         </p:nvSpPr>
         <p:spPr>
           <a:xfrm>
-            <a:off x="6492240" y="1645920"/>
-            <a:ext cx="5212080" cy="502920"/>
+            <a:off x="411480" y="1572768"/>
+            <a:ext cx="5321808" cy="475488"/>
           </a:xfrm>
           <a:prstGeom prst="rect">
             <a:avLst/>
@@ -4408,26 +4348,26 @@
           <a:p>
             <a:pPr algn="l"/>
             <a:r>
-              <a:rPr sz="1700" b="0">
-                <a:solidFill>
-                  <a:srgbClr val="1A1A2E"/>
+              <a:rPr sz="1600" b="0" i="0">
+                <a:solidFill>
+                  <a:srgbClr val="1C1C1C"/>
                 </a:solidFill>
               </a:rPr>
-              <a:t>• Conv2d(32→64, 3×3, pad=1) × 2</a:t>
-            </a:r>
-          </a:p>
-        </p:txBody>
-      </p:sp>
-      <p:sp>
-        <p:nvSpPr>
-          <p:cNvPr id="15" name="TextBox 14"/>
+              <a:t>▸ Conv2d(1→32, 3×3, padding=1)</a:t>
+            </a:r>
+          </a:p>
+        </p:txBody>
+      </p:sp>
+      <p:sp>
+        <p:nvSpPr>
+          <p:cNvPr id="8" name="TextBox 7"/>
           <p:cNvSpPr txBox="1"/>
           <p:nvPr/>
         </p:nvSpPr>
         <p:spPr>
           <a:xfrm>
-            <a:off x="6492240" y="2121408"/>
-            <a:ext cx="5212080" cy="502920"/>
+            <a:off x="411480" y="2048256"/>
+            <a:ext cx="5321808" cy="475488"/>
           </a:xfrm>
           <a:prstGeom prst="rect">
             <a:avLst/>
@@ -4442,26 +4382,26 @@
           <a:p>
             <a:pPr algn="l"/>
             <a:r>
-              <a:rPr sz="1700" b="0">
-                <a:solidFill>
-                  <a:srgbClr val="1A1A2E"/>
+              <a:rPr sz="1600" b="0" i="0">
+                <a:solidFill>
+                  <a:srgbClr val="1C1C1C"/>
                 </a:solidFill>
               </a:rPr>
-              <a:t>• BatchNorm2d + ReLU × 2</a:t>
-            </a:r>
-          </a:p>
-        </p:txBody>
-      </p:sp>
-      <p:sp>
-        <p:nvSpPr>
-          <p:cNvPr id="16" name="TextBox 15"/>
+              <a:t>▸ BatchNorm2d(32)  ← 加速收敛</a:t>
+            </a:r>
+          </a:p>
+        </p:txBody>
+      </p:sp>
+      <p:sp>
+        <p:nvSpPr>
+          <p:cNvPr id="9" name="TextBox 8"/>
           <p:cNvSpPr txBox="1"/>
           <p:nvPr/>
         </p:nvSpPr>
         <p:spPr>
           <a:xfrm>
-            <a:off x="6492240" y="2596896"/>
-            <a:ext cx="5212080" cy="502920"/>
+            <a:off x="411480" y="2523744"/>
+            <a:ext cx="5321808" cy="475488"/>
           </a:xfrm>
           <a:prstGeom prst="rect">
             <a:avLst/>
@@ -4476,26 +4416,26 @@
           <a:p>
             <a:pPr algn="l"/>
             <a:r>
-              <a:rPr sz="1700" b="0">
-                <a:solidFill>
-                  <a:srgbClr val="1A1A2E"/>
+              <a:rPr sz="1600" b="0" i="0">
+                <a:solidFill>
+                  <a:srgbClr val="1C1C1C"/>
                 </a:solidFill>
               </a:rPr>
-              <a:t>• MaxPool2d(2) + Dropout2d(0.2)</a:t>
-            </a:r>
-          </a:p>
-        </p:txBody>
-      </p:sp>
-      <p:sp>
-        <p:nvSpPr>
-          <p:cNvPr id="17" name="TextBox 16"/>
+              <a:t>▸ ReLU 激活</a:t>
+            </a:r>
+          </a:p>
+        </p:txBody>
+      </p:sp>
+      <p:sp>
+        <p:nvSpPr>
+          <p:cNvPr id="10" name="TextBox 9"/>
           <p:cNvSpPr txBox="1"/>
           <p:nvPr/>
         </p:nvSpPr>
         <p:spPr>
           <a:xfrm>
-            <a:off x="6492240" y="3072384"/>
-            <a:ext cx="5212080" cy="502920"/>
+            <a:off x="411480" y="2999232"/>
+            <a:ext cx="5321808" cy="475488"/>
           </a:xfrm>
           <a:prstGeom prst="rect">
             <a:avLst/>
@@ -4510,26 +4450,26 @@
           <a:p>
             <a:pPr algn="l"/>
             <a:r>
-              <a:rPr sz="1700" b="0">
-                <a:solidFill>
-                  <a:srgbClr val="1A1A2E"/>
+              <a:rPr sz="1600" b="0" i="0">
+                <a:solidFill>
+                  <a:srgbClr val="1C1C1C"/>
                 </a:solidFill>
               </a:rPr>
-              <a:t>• Flatten → Linear(3136→256)</a:t>
-            </a:r>
-          </a:p>
-        </p:txBody>
-      </p:sp>
-      <p:sp>
-        <p:nvSpPr>
-          <p:cNvPr id="18" name="TextBox 17"/>
+              <a:t>▸ Conv2d(32→32, 3×3, padding=1)</a:t>
+            </a:r>
+          </a:p>
+        </p:txBody>
+      </p:sp>
+      <p:sp>
+        <p:nvSpPr>
+          <p:cNvPr id="11" name="TextBox 10"/>
           <p:cNvSpPr txBox="1"/>
           <p:nvPr/>
         </p:nvSpPr>
         <p:spPr>
           <a:xfrm>
-            <a:off x="6492240" y="3547872"/>
-            <a:ext cx="5212080" cy="502920"/>
+            <a:off x="411480" y="3474720"/>
+            <a:ext cx="5321808" cy="475488"/>
           </a:xfrm>
           <a:prstGeom prst="rect">
             <a:avLst/>
@@ -4544,26 +4484,26 @@
           <a:p>
             <a:pPr algn="l"/>
             <a:r>
-              <a:rPr sz="1700" b="0">
-                <a:solidFill>
-                  <a:srgbClr val="1A1A2E"/>
+              <a:rPr sz="1600" b="0" i="0">
+                <a:solidFill>
+                  <a:srgbClr val="1C1C1C"/>
                 </a:solidFill>
               </a:rPr>
-              <a:t>• ReLU + Dropout(0.3)</a:t>
-            </a:r>
-          </a:p>
-        </p:txBody>
-      </p:sp>
-      <p:sp>
-        <p:nvSpPr>
-          <p:cNvPr id="19" name="TextBox 18"/>
+              <a:t>▸ BatchNorm2d + ReLU</a:t>
+            </a:r>
+          </a:p>
+        </p:txBody>
+      </p:sp>
+      <p:sp>
+        <p:nvSpPr>
+          <p:cNvPr id="12" name="TextBox 11"/>
           <p:cNvSpPr txBox="1"/>
           <p:nvPr/>
         </p:nvSpPr>
         <p:spPr>
           <a:xfrm>
-            <a:off x="6492240" y="4023360"/>
-            <a:ext cx="5212080" cy="502920"/>
+            <a:off x="411480" y="3950208"/>
+            <a:ext cx="5321808" cy="475488"/>
           </a:xfrm>
           <a:prstGeom prst="rect">
             <a:avLst/>
@@ -4578,32 +4518,313 @@
           <a:p>
             <a:pPr algn="l"/>
             <a:r>
-              <a:rPr sz="1700" b="0">
-                <a:solidFill>
-                  <a:srgbClr val="1A1A2E"/>
+              <a:rPr sz="1600" b="0" i="0">
+                <a:solidFill>
+                  <a:srgbClr val="1C1C1C"/>
                 </a:solidFill>
               </a:rPr>
-              <a:t>• Linear(256→10)  输出 logits</a:t>
-            </a:r>
-          </a:p>
-        </p:txBody>
-      </p:sp>
-      <p:sp>
-        <p:nvSpPr>
-          <p:cNvPr id="20" name="Rectangle 19"/>
+              <a:t>▸ MaxPool2d(2)  →  Dropout2d(0.1)</a:t>
+            </a:r>
+          </a:p>
+        </p:txBody>
+      </p:sp>
+      <p:sp>
+        <p:nvSpPr>
+          <p:cNvPr id="13" name="Rectangle 12"/>
           <p:cNvSpPr/>
           <p:nvPr/>
         </p:nvSpPr>
         <p:spPr>
           <a:xfrm>
-            <a:off x="0" y="6675120"/>
-            <a:ext cx="12188952" cy="73152"/>
+            <a:off x="6355080" y="1051560"/>
+            <a:ext cx="5394960" cy="438912"/>
           </a:xfrm>
           <a:prstGeom prst="rect">
             <a:avLst/>
           </a:prstGeom>
           <a:solidFill>
-            <a:srgbClr val="1F497D"/>
+            <a:srgbClr val="E8F0F8"/>
+          </a:solidFill>
+          <a:ln>
+            <a:noFill/>
+          </a:ln>
+        </p:spPr>
+        <p:style>
+          <a:lnRef idx="1">
+            <a:schemeClr val="accent1"/>
+          </a:lnRef>
+          <a:fillRef idx="3">
+            <a:schemeClr val="accent1"/>
+          </a:fillRef>
+          <a:effectRef idx="2">
+            <a:schemeClr val="accent1"/>
+          </a:effectRef>
+          <a:fontRef idx="minor">
+            <a:schemeClr val="lt1"/>
+          </a:fontRef>
+        </p:style>
+        <p:txBody>
+          <a:bodyPr rtlCol="0" anchor="ctr"/>
+          <a:lstStyle/>
+          <a:p>
+            <a:pPr algn="ctr"/>
+          </a:p>
+        </p:txBody>
+      </p:sp>
+      <p:sp>
+        <p:nvSpPr>
+          <p:cNvPr id="14" name="TextBox 13"/>
+          <p:cNvSpPr txBox="1"/>
+          <p:nvPr/>
+        </p:nvSpPr>
+        <p:spPr>
+          <a:xfrm>
+            <a:off x="6446520" y="1097280"/>
+            <a:ext cx="5212080" cy="347472"/>
+          </a:xfrm>
+          <a:prstGeom prst="rect">
+            <a:avLst/>
+          </a:prstGeom>
+          <a:noFill/>
+        </p:spPr>
+        <p:txBody>
+          <a:bodyPr wrap="square">
+            <a:spAutoFit/>
+          </a:bodyPr>
+          <a:lstStyle/>
+          <a:p>
+            <a:pPr algn="l"/>
+            <a:r>
+              <a:rPr sz="1700" b="1" i="0">
+                <a:solidFill>
+                  <a:srgbClr val="1A335C"/>
+                </a:solidFill>
+              </a:rPr>
+              <a:t>第二卷积块（14×14 → 7×7）+ 分类头</a:t>
+            </a:r>
+          </a:p>
+        </p:txBody>
+      </p:sp>
+      <p:sp>
+        <p:nvSpPr>
+          <p:cNvPr id="15" name="TextBox 14"/>
+          <p:cNvSpPr txBox="1"/>
+          <p:nvPr/>
+        </p:nvSpPr>
+        <p:spPr>
+          <a:xfrm>
+            <a:off x="6400800" y="1572768"/>
+            <a:ext cx="5321808" cy="475488"/>
+          </a:xfrm>
+          <a:prstGeom prst="rect">
+            <a:avLst/>
+          </a:prstGeom>
+          <a:noFill/>
+        </p:spPr>
+        <p:txBody>
+          <a:bodyPr wrap="square">
+            <a:spAutoFit/>
+          </a:bodyPr>
+          <a:lstStyle/>
+          <a:p>
+            <a:pPr algn="l"/>
+            <a:r>
+              <a:rPr sz="1600" b="0" i="0">
+                <a:solidFill>
+                  <a:srgbClr val="1C1C1C"/>
+                </a:solidFill>
+              </a:rPr>
+              <a:t>▸ Conv2d(32→64, 3×3) × 2  +  BN + ReLU</a:t>
+            </a:r>
+          </a:p>
+        </p:txBody>
+      </p:sp>
+      <p:sp>
+        <p:nvSpPr>
+          <p:cNvPr id="16" name="TextBox 15"/>
+          <p:cNvSpPr txBox="1"/>
+          <p:nvPr/>
+        </p:nvSpPr>
+        <p:spPr>
+          <a:xfrm>
+            <a:off x="6400800" y="2048256"/>
+            <a:ext cx="5321808" cy="475488"/>
+          </a:xfrm>
+          <a:prstGeom prst="rect">
+            <a:avLst/>
+          </a:prstGeom>
+          <a:noFill/>
+        </p:spPr>
+        <p:txBody>
+          <a:bodyPr wrap="square">
+            <a:spAutoFit/>
+          </a:bodyPr>
+          <a:lstStyle/>
+          <a:p>
+            <a:pPr algn="l"/>
+            <a:r>
+              <a:rPr sz="1600" b="0" i="0">
+                <a:solidFill>
+                  <a:srgbClr val="1C1C1C"/>
+                </a:solidFill>
+              </a:rPr>
+              <a:t>▸ MaxPool2d(2)  →  Dropout2d(0.2)</a:t>
+            </a:r>
+          </a:p>
+        </p:txBody>
+      </p:sp>
+      <p:sp>
+        <p:nvSpPr>
+          <p:cNvPr id="17" name="TextBox 16"/>
+          <p:cNvSpPr txBox="1"/>
+          <p:nvPr/>
+        </p:nvSpPr>
+        <p:spPr>
+          <a:xfrm>
+            <a:off x="6400800" y="2523744"/>
+            <a:ext cx="5321808" cy="475488"/>
+          </a:xfrm>
+          <a:prstGeom prst="rect">
+            <a:avLst/>
+          </a:prstGeom>
+          <a:noFill/>
+        </p:spPr>
+        <p:txBody>
+          <a:bodyPr wrap="square">
+            <a:spAutoFit/>
+          </a:bodyPr>
+          <a:lstStyle/>
+          <a:p>
+            <a:pPr algn="l"/>
+            <a:r>
+              <a:rPr sz="1600" b="0" i="0">
+                <a:solidFill>
+                  <a:srgbClr val="1C1C1C"/>
+                </a:solidFill>
+              </a:rPr>
+              <a:t>▸ Flatten：(B,64,7,7) → (B,3136)</a:t>
+            </a:r>
+          </a:p>
+        </p:txBody>
+      </p:sp>
+      <p:sp>
+        <p:nvSpPr>
+          <p:cNvPr id="18" name="TextBox 17"/>
+          <p:cNvSpPr txBox="1"/>
+          <p:nvPr/>
+        </p:nvSpPr>
+        <p:spPr>
+          <a:xfrm>
+            <a:off x="6400800" y="2999232"/>
+            <a:ext cx="5321808" cy="475488"/>
+          </a:xfrm>
+          <a:prstGeom prst="rect">
+            <a:avLst/>
+          </a:prstGeom>
+          <a:noFill/>
+        </p:spPr>
+        <p:txBody>
+          <a:bodyPr wrap="square">
+            <a:spAutoFit/>
+          </a:bodyPr>
+          <a:lstStyle/>
+          <a:p>
+            <a:pPr algn="l"/>
+            <a:r>
+              <a:rPr sz="1600" b="0" i="0">
+                <a:solidFill>
+                  <a:srgbClr val="1C1C1C"/>
+                </a:solidFill>
+              </a:rPr>
+              <a:t>▸ Linear(3136→256)  +  ReLU</a:t>
+            </a:r>
+          </a:p>
+        </p:txBody>
+      </p:sp>
+      <p:sp>
+        <p:nvSpPr>
+          <p:cNvPr id="19" name="TextBox 18"/>
+          <p:cNvSpPr txBox="1"/>
+          <p:nvPr/>
+        </p:nvSpPr>
+        <p:spPr>
+          <a:xfrm>
+            <a:off x="6400800" y="3474720"/>
+            <a:ext cx="5321808" cy="475488"/>
+          </a:xfrm>
+          <a:prstGeom prst="rect">
+            <a:avLst/>
+          </a:prstGeom>
+          <a:noFill/>
+        </p:spPr>
+        <p:txBody>
+          <a:bodyPr wrap="square">
+            <a:spAutoFit/>
+          </a:bodyPr>
+          <a:lstStyle/>
+          <a:p>
+            <a:pPr algn="l"/>
+            <a:r>
+              <a:rPr sz="1600" b="0" i="0">
+                <a:solidFill>
+                  <a:srgbClr val="1C1C1C"/>
+                </a:solidFill>
+              </a:rPr>
+              <a:t>▸ Dropout(0.3)</a:t>
+            </a:r>
+          </a:p>
+        </p:txBody>
+      </p:sp>
+      <p:sp>
+        <p:nvSpPr>
+          <p:cNvPr id="20" name="TextBox 19"/>
+          <p:cNvSpPr txBox="1"/>
+          <p:nvPr/>
+        </p:nvSpPr>
+        <p:spPr>
+          <a:xfrm>
+            <a:off x="6400800" y="3950208"/>
+            <a:ext cx="5321808" cy="475488"/>
+          </a:xfrm>
+          <a:prstGeom prst="rect">
+            <a:avLst/>
+          </a:prstGeom>
+          <a:noFill/>
+        </p:spPr>
+        <p:txBody>
+          <a:bodyPr wrap="square">
+            <a:spAutoFit/>
+          </a:bodyPr>
+          <a:lstStyle/>
+          <a:p>
+            <a:pPr algn="l"/>
+            <a:r>
+              <a:rPr sz="1600" b="0" i="0">
+                <a:solidFill>
+                  <a:srgbClr val="1C1C1C"/>
+                </a:solidFill>
+              </a:rPr>
+              <a:t>▸ Linear(256→10)  输出 10 类 logits</a:t>
+            </a:r>
+          </a:p>
+        </p:txBody>
+      </p:sp>
+      <p:sp>
+        <p:nvSpPr>
+          <p:cNvPr id="21" name="Rectangle 20"/>
+          <p:cNvSpPr/>
+          <p:nvPr/>
+        </p:nvSpPr>
+        <p:spPr>
+          <a:xfrm>
+            <a:off x="0" y="6748272"/>
+            <a:ext cx="12188952" cy="109728"/>
+          </a:xfrm>
+          <a:prstGeom prst="rect">
+            <a:avLst/>
+          </a:prstGeom>
+          <a:solidFill>
+            <a:srgbClr val="1A335C"/>
           </a:solidFill>
           <a:ln>
             <a:noFill/>
@@ -4666,13 +4887,13 @@
         <p:spPr>
           <a:xfrm>
             <a:off x="0" y="0"/>
-            <a:ext cx="12188952" cy="1005840"/>
+            <a:ext cx="12188952" cy="960120"/>
           </a:xfrm>
           <a:prstGeom prst="rect">
             <a:avLst/>
           </a:prstGeom>
           <a:solidFill>
-            <a:srgbClr val="1F497D"/>
+            <a:srgbClr val="1A335C"/>
           </a:solidFill>
           <a:ln>
             <a:noFill/>
@@ -4702,14 +4923,57 @@
       </p:sp>
       <p:sp>
         <p:nvSpPr>
-          <p:cNvPr id="3" name="TextBox 2"/>
+          <p:cNvPr id="3" name="Rectangle 2"/>
+          <p:cNvSpPr/>
+          <p:nvPr/>
+        </p:nvSpPr>
+        <p:spPr>
+          <a:xfrm>
+            <a:off x="0" y="0"/>
+            <a:ext cx="164592" cy="6858000"/>
+          </a:xfrm>
+          <a:prstGeom prst="rect">
+            <a:avLst/>
+          </a:prstGeom>
+          <a:solidFill>
+            <a:srgbClr val="1A335C"/>
+          </a:solidFill>
+          <a:ln>
+            <a:noFill/>
+          </a:ln>
+        </p:spPr>
+        <p:style>
+          <a:lnRef idx="1">
+            <a:schemeClr val="accent1"/>
+          </a:lnRef>
+          <a:fillRef idx="3">
+            <a:schemeClr val="accent1"/>
+          </a:fillRef>
+          <a:effectRef idx="2">
+            <a:schemeClr val="accent1"/>
+          </a:effectRef>
+          <a:fontRef idx="minor">
+            <a:schemeClr val="lt1"/>
+          </a:fontRef>
+        </p:style>
+        <p:txBody>
+          <a:bodyPr rtlCol="0" anchor="ctr"/>
+          <a:lstStyle/>
+          <a:p>
+            <a:pPr algn="ctr"/>
+          </a:p>
+        </p:txBody>
+      </p:sp>
+      <p:sp>
+        <p:nvSpPr>
+          <p:cNvPr id="4" name="TextBox 3"/>
           <p:cNvSpPr txBox="1"/>
           <p:nvPr/>
         </p:nvSpPr>
         <p:spPr>
           <a:xfrm>
-            <a:off x="274320" y="91440"/>
-            <a:ext cx="11612880" cy="822960"/>
+            <a:off x="347472" y="91440"/>
+            <a:ext cx="11521440" cy="777240"/>
           </a:xfrm>
           <a:prstGeom prst="rect">
             <a:avLst/>
@@ -4724,26 +4988,26 @@
           <a:p>
             <a:pPr algn="l"/>
             <a:r>
-              <a:rPr sz="2400" b="1">
+              <a:rPr sz="2300" b="1" i="0">
                 <a:solidFill>
                   <a:srgbClr val="FFFFFF"/>
                 </a:solidFill>
               </a:rPr>
-              <a:t>训练方案</a:t>
-            </a:r>
-          </a:p>
-        </p:txBody>
-      </p:sp>
-      <p:sp>
-        <p:nvSpPr>
-          <p:cNvPr id="4" name="TextBox 3"/>
+              <a:t>解决方案：损失函数与优化器设计</a:t>
+            </a:r>
+          </a:p>
+        </p:txBody>
+      </p:sp>
+      <p:sp>
+        <p:nvSpPr>
+          <p:cNvPr id="5" name="TextBox 4"/>
           <p:cNvSpPr txBox="1"/>
           <p:nvPr/>
         </p:nvSpPr>
         <p:spPr>
           <a:xfrm>
-            <a:off x="457200" y="1188720"/>
-            <a:ext cx="11247120" cy="502920"/>
+            <a:off x="411480" y="1115568"/>
+            <a:ext cx="11247120" cy="475488"/>
           </a:xfrm>
           <a:prstGeom prst="rect">
             <a:avLst/>
@@ -4758,26 +5022,26 @@
           <a:p>
             <a:pPr algn="l"/>
             <a:r>
-              <a:rPr sz="1800" b="0">
-                <a:solidFill>
-                  <a:srgbClr val="1A1A2E"/>
+              <a:rPr sz="1700" b="0" i="0">
+                <a:solidFill>
+                  <a:srgbClr val="1C1C1C"/>
                 </a:solidFill>
               </a:rPr>
-              <a:t>  • 损失函数：CrossEntropyLoss</a:t>
-            </a:r>
-          </a:p>
-        </p:txBody>
-      </p:sp>
-      <p:sp>
-        <p:nvSpPr>
-          <p:cNvPr id="5" name="TextBox 4"/>
+              <a:t>▸ 损失函数：交叉熵损失 CrossEntropyLoss</a:t>
+            </a:r>
+          </a:p>
+        </p:txBody>
+      </p:sp>
+      <p:sp>
+        <p:nvSpPr>
+          <p:cNvPr id="6" name="TextBox 5"/>
           <p:cNvSpPr txBox="1"/>
           <p:nvPr/>
         </p:nvSpPr>
         <p:spPr>
           <a:xfrm>
-            <a:off x="457200" y="1664208"/>
-            <a:ext cx="11247120" cy="502920"/>
+            <a:off x="411480" y="1591056"/>
+            <a:ext cx="11247120" cy="475488"/>
           </a:xfrm>
           <a:prstGeom prst="rect">
             <a:avLst/>
@@ -4792,26 +5056,26 @@
           <a:p>
             <a:pPr algn="l"/>
             <a:r>
-              <a:rPr sz="1800" b="0">
-                <a:solidFill>
-                  <a:srgbClr val="1A1A2E"/>
+              <a:rPr sz="1600" b="0" i="0">
+                <a:solidFill>
+                  <a:srgbClr val="555555"/>
                 </a:solidFill>
               </a:rPr>
-              <a:t>  • 优化器：AdamW（lr=1e-3，weight_decay=1e-4）</a:t>
-            </a:r>
-          </a:p>
-        </p:txBody>
-      </p:sp>
-      <p:sp>
-        <p:nvSpPr>
-          <p:cNvPr id="6" name="TextBox 5"/>
+              <a:t>    – 内部等价于 Softmax + NLLLoss，数值稳定性好</a:t>
+            </a:r>
+          </a:p>
+        </p:txBody>
+      </p:sp>
+      <p:sp>
+        <p:nvSpPr>
+          <p:cNvPr id="7" name="TextBox 6"/>
           <p:cNvSpPr txBox="1"/>
           <p:nvPr/>
         </p:nvSpPr>
         <p:spPr>
           <a:xfrm>
-            <a:off x="457200" y="2139696"/>
-            <a:ext cx="11247120" cy="502920"/>
+            <a:off x="411480" y="2066543"/>
+            <a:ext cx="11247120" cy="475488"/>
           </a:xfrm>
           <a:prstGeom prst="rect">
             <a:avLst/>
@@ -4826,26 +5090,26 @@
           <a:p>
             <a:pPr algn="l"/>
             <a:r>
-              <a:rPr sz="1800" b="0">
-                <a:solidFill>
-                  <a:srgbClr val="1A1A2E"/>
+              <a:rPr sz="1700" b="0" i="0">
+                <a:solidFill>
+                  <a:srgbClr val="1C1C1C"/>
                 </a:solidFill>
               </a:rPr>
-              <a:t>  • Batch Size：128；Epochs：5</a:t>
-            </a:r>
-          </a:p>
-        </p:txBody>
-      </p:sp>
-      <p:sp>
-        <p:nvSpPr>
-          <p:cNvPr id="7" name="TextBox 6"/>
+              <a:t>▸ 优化器：AdamW（lr=1e-3，weight_decay=1e-4）</a:t>
+            </a:r>
+          </a:p>
+        </p:txBody>
+      </p:sp>
+      <p:sp>
+        <p:nvSpPr>
+          <p:cNvPr id="8" name="TextBox 7"/>
           <p:cNvSpPr txBox="1"/>
           <p:nvPr/>
         </p:nvSpPr>
         <p:spPr>
           <a:xfrm>
-            <a:off x="457200" y="2615184"/>
-            <a:ext cx="11247120" cy="502920"/>
+            <a:off x="411480" y="2542032"/>
+            <a:ext cx="11247120" cy="475488"/>
           </a:xfrm>
           <a:prstGeom prst="rect">
             <a:avLst/>
@@ -4860,26 +5124,26 @@
           <a:p>
             <a:pPr algn="l"/>
             <a:r>
-              <a:rPr sz="1800" b="0">
-                <a:solidFill>
-                  <a:srgbClr val="1A1A2E"/>
+              <a:rPr sz="1600" b="0" i="0">
+                <a:solidFill>
+                  <a:srgbClr val="555555"/>
                 </a:solidFill>
               </a:rPr>
-              <a:t>  • 混合精度（AMP）：fp16 前向，fp32 梯度更新</a:t>
-            </a:r>
-          </a:p>
-        </p:txBody>
-      </p:sp>
-      <p:sp>
-        <p:nvSpPr>
-          <p:cNvPr id="8" name="TextBox 7"/>
+              <a:t>    – 相比 Adam 额外对权重本身施加 L2 正则，减少过拟合风险</a:t>
+            </a:r>
+          </a:p>
+        </p:txBody>
+      </p:sp>
+      <p:sp>
+        <p:nvSpPr>
+          <p:cNvPr id="9" name="TextBox 8"/>
           <p:cNvSpPr txBox="1"/>
           <p:nvPr/>
         </p:nvSpPr>
         <p:spPr>
           <a:xfrm>
-            <a:off x="457200" y="3090672"/>
-            <a:ext cx="11247120" cy="502920"/>
+            <a:off x="411480" y="3017520"/>
+            <a:ext cx="11247120" cy="475488"/>
           </a:xfrm>
           <a:prstGeom prst="rect">
             <a:avLst/>
@@ -4894,26 +5158,26 @@
           <a:p>
             <a:pPr algn="l"/>
             <a:r>
-              <a:rPr sz="1800" b="0">
-                <a:solidFill>
-                  <a:srgbClr val="1A1A2E"/>
+              <a:rPr sz="1700" b="0" i="0">
+                <a:solidFill>
+                  <a:srgbClr val="1C1C1C"/>
                 </a:solidFill>
               </a:rPr>
-              <a:t>  • 设备：华为云 Tesla T4 16GB GPU</a:t>
-            </a:r>
-          </a:p>
-        </p:txBody>
-      </p:sp>
-      <p:sp>
-        <p:nvSpPr>
-          <p:cNvPr id="9" name="TextBox 8"/>
+              <a:t>▸ 学习率策略：固定学习率，5 个 epoch 足以收敛</a:t>
+            </a:r>
+          </a:p>
+        </p:txBody>
+      </p:sp>
+      <p:sp>
+        <p:nvSpPr>
+          <p:cNvPr id="10" name="TextBox 9"/>
           <p:cNvSpPr txBox="1"/>
           <p:nvPr/>
         </p:nvSpPr>
         <p:spPr>
           <a:xfrm>
-            <a:off x="457200" y="3566160"/>
-            <a:ext cx="11247120" cy="502920"/>
+            <a:off x="411480" y="3493008"/>
+            <a:ext cx="11247120" cy="475488"/>
           </a:xfrm>
           <a:prstGeom prst="rect">
             <a:avLst/>
@@ -4928,32 +5192,66 @@
           <a:p>
             <a:pPr algn="l"/>
             <a:r>
-              <a:rPr sz="1800" b="0">
-                <a:solidFill>
-                  <a:srgbClr val="1A1A2E"/>
+              <a:rPr sz="1700" b="0" i="0">
+                <a:solidFill>
+                  <a:srgbClr val="1C1C1C"/>
                 </a:solidFill>
               </a:rPr>
-              <a:t>  • 保存验证集最优 checkpoint（best.pt）</a:t>
-            </a:r>
-          </a:p>
-        </p:txBody>
-      </p:sp>
-      <p:sp>
-        <p:nvSpPr>
-          <p:cNvPr id="10" name="Rectangle 9"/>
+              <a:t>▸ 混合精度（AMP）：fp16 前向传播，fp32 梯度更新，T4 训练加速约 1.5×</a:t>
+            </a:r>
+          </a:p>
+        </p:txBody>
+      </p:sp>
+      <p:sp>
+        <p:nvSpPr>
+          <p:cNvPr id="11" name="TextBox 10"/>
+          <p:cNvSpPr txBox="1"/>
+          <p:nvPr/>
+        </p:nvSpPr>
+        <p:spPr>
+          <a:xfrm>
+            <a:off x="411480" y="3968496"/>
+            <a:ext cx="11247120" cy="475488"/>
+          </a:xfrm>
+          <a:prstGeom prst="rect">
+            <a:avLst/>
+          </a:prstGeom>
+          <a:noFill/>
+        </p:spPr>
+        <p:txBody>
+          <a:bodyPr wrap="square">
+            <a:spAutoFit/>
+          </a:bodyPr>
+          <a:lstStyle/>
+          <a:p>
+            <a:pPr algn="l"/>
+            <a:r>
+              <a:rPr sz="1700" b="0" i="0">
+                <a:solidFill>
+                  <a:srgbClr val="1C1C1C"/>
+                </a:solidFill>
+              </a:rPr>
+              <a:t>▸ Batch Size：128；每 epoch 保存验证集最优 checkpoint</a:t>
+            </a:r>
+          </a:p>
+        </p:txBody>
+      </p:sp>
+      <p:sp>
+        <p:nvSpPr>
+          <p:cNvPr id="12" name="Rectangle 11"/>
           <p:cNvSpPr/>
           <p:nvPr/>
         </p:nvSpPr>
         <p:spPr>
           <a:xfrm>
-            <a:off x="0" y="6675120"/>
-            <a:ext cx="12188952" cy="73152"/>
+            <a:off x="0" y="6748272"/>
+            <a:ext cx="12188952" cy="109728"/>
           </a:xfrm>
           <a:prstGeom prst="rect">
             <a:avLst/>
           </a:prstGeom>
           <a:solidFill>
-            <a:srgbClr val="1F497D"/>
+            <a:srgbClr val="1A335C"/>
           </a:solidFill>
           <a:ln>
             <a:noFill/>
@@ -5016,13 +5314,13 @@
         <p:spPr>
           <a:xfrm>
             <a:off x="0" y="0"/>
-            <a:ext cx="12188952" cy="1005840"/>
+            <a:ext cx="12188952" cy="960120"/>
           </a:xfrm>
           <a:prstGeom prst="rect">
             <a:avLst/>
           </a:prstGeom>
           <a:solidFill>
-            <a:srgbClr val="1F497D"/>
+            <a:srgbClr val="1A335C"/>
           </a:solidFill>
           <a:ln>
             <a:noFill/>
@@ -5052,54 +5350,20 @@
       </p:sp>
       <p:sp>
         <p:nvSpPr>
-          <p:cNvPr id="3" name="TextBox 2"/>
-          <p:cNvSpPr txBox="1"/>
-          <p:nvPr/>
-        </p:nvSpPr>
-        <p:spPr>
-          <a:xfrm>
-            <a:off x="274320" y="91440"/>
-            <a:ext cx="11612880" cy="822960"/>
-          </a:xfrm>
-          <a:prstGeom prst="rect">
-            <a:avLst/>
-          </a:prstGeom>
-          <a:noFill/>
-        </p:spPr>
-        <p:txBody>
-          <a:bodyPr wrap="square">
-            <a:spAutoFit/>
-          </a:bodyPr>
-          <a:lstStyle/>
-          <a:p>
-            <a:pPr algn="l"/>
-            <a:r>
-              <a:rPr sz="2400" b="1">
-                <a:solidFill>
-                  <a:srgbClr val="FFFFFF"/>
-                </a:solidFill>
-              </a:rPr>
-              <a:t>实验结果</a:t>
-            </a:r>
-          </a:p>
-        </p:txBody>
-      </p:sp>
-      <p:sp>
-        <p:nvSpPr>
-          <p:cNvPr id="4" name="Rectangle 3"/>
+          <p:cNvPr id="3" name="Rectangle 2"/>
           <p:cNvSpPr/>
           <p:nvPr/>
         </p:nvSpPr>
         <p:spPr>
           <a:xfrm>
-            <a:off x="457200" y="1280160"/>
-            <a:ext cx="3657600" cy="2011680"/>
+            <a:off x="0" y="0"/>
+            <a:ext cx="164592" cy="6858000"/>
           </a:xfrm>
           <a:prstGeom prst="rect">
             <a:avLst/>
           </a:prstGeom>
           <a:solidFill>
-            <a:srgbClr val="D6E4F0"/>
+            <a:srgbClr val="1A335C"/>
           </a:solidFill>
           <a:ln>
             <a:noFill/>
@@ -5129,14 +5393,14 @@
       </p:sp>
       <p:sp>
         <p:nvSpPr>
-          <p:cNvPr id="5" name="TextBox 4"/>
+          <p:cNvPr id="4" name="TextBox 3"/>
           <p:cNvSpPr txBox="1"/>
           <p:nvPr/>
         </p:nvSpPr>
         <p:spPr>
           <a:xfrm>
-            <a:off x="457200" y="1463040"/>
-            <a:ext cx="3657600" cy="914400"/>
+            <a:off x="347472" y="91440"/>
+            <a:ext cx="11521440" cy="777240"/>
           </a:xfrm>
           <a:prstGeom prst="rect">
             <a:avLst/>
@@ -5149,68 +5413,34 @@
           </a:bodyPr>
           <a:lstStyle/>
           <a:p>
-            <a:pPr algn="ctr"/>
-            <a:r>
-              <a:rPr sz="3200" b="1">
-                <a:solidFill>
-                  <a:srgbClr val="0A7A43"/>
+            <a:pPr algn="l"/>
+            <a:r>
+              <a:rPr sz="2300" b="1" i="0">
+                <a:solidFill>
+                  <a:srgbClr val="FFFFFF"/>
                 </a:solidFill>
               </a:rPr>
-              <a:t>99.23%</a:t>
-            </a:r>
-          </a:p>
-        </p:txBody>
-      </p:sp>
-      <p:sp>
-        <p:nvSpPr>
-          <p:cNvPr id="6" name="TextBox 5"/>
-          <p:cNvSpPr txBox="1"/>
-          <p:nvPr/>
-        </p:nvSpPr>
-        <p:spPr>
-          <a:xfrm>
-            <a:off x="457200" y="2468880"/>
-            <a:ext cx="3657600" cy="548640"/>
-          </a:xfrm>
-          <a:prstGeom prst="rect">
-            <a:avLst/>
-          </a:prstGeom>
-          <a:noFill/>
-        </p:spPr>
-        <p:txBody>
-          <a:bodyPr wrap="square">
-            <a:spAutoFit/>
-          </a:bodyPr>
-          <a:lstStyle/>
-          <a:p>
-            <a:pPr algn="ctr"/>
-            <a:r>
-              <a:rPr sz="1500" b="0">
-                <a:solidFill>
-                  <a:srgbClr val="1A1A2E"/>
-                </a:solidFill>
-              </a:rPr>
-              <a:t>测试准确率</a:t>
-            </a:r>
-          </a:p>
-        </p:txBody>
-      </p:sp>
-      <p:sp>
-        <p:nvSpPr>
-          <p:cNvPr id="7" name="Rectangle 6"/>
+              <a:t>核心代码：模型定义</a:t>
+            </a:r>
+          </a:p>
+        </p:txBody>
+      </p:sp>
+      <p:sp>
+        <p:nvSpPr>
+          <p:cNvPr id="5" name="Rectangle 4"/>
           <p:cNvSpPr/>
           <p:nvPr/>
         </p:nvSpPr>
         <p:spPr>
           <a:xfrm>
-            <a:off x="4206240" y="1280160"/>
-            <a:ext cx="3657600" cy="2011680"/>
+            <a:off x="347472" y="1051560"/>
+            <a:ext cx="11475720" cy="4206240"/>
           </a:xfrm>
           <a:prstGeom prst="rect">
             <a:avLst/>
           </a:prstGeom>
           <a:solidFill>
-            <a:srgbClr val="D6E4F0"/>
+            <a:srgbClr val="1E1E2E"/>
           </a:solidFill>
           <a:ln>
             <a:noFill/>
@@ -5240,14 +5470,14 @@
       </p:sp>
       <p:sp>
         <p:nvSpPr>
-          <p:cNvPr id="8" name="TextBox 7"/>
+          <p:cNvPr id="6" name="TextBox 5"/>
           <p:cNvSpPr txBox="1"/>
           <p:nvPr/>
         </p:nvSpPr>
         <p:spPr>
           <a:xfrm>
-            <a:off x="4206240" y="1463040"/>
-            <a:ext cx="3657600" cy="914400"/>
+            <a:off x="475488" y="1115568"/>
+            <a:ext cx="11201400" cy="4114800"/>
           </a:xfrm>
           <a:prstGeom prst="rect">
             <a:avLst/>
@@ -5260,28 +5490,47 @@
           </a:bodyPr>
           <a:lstStyle/>
           <a:p>
-            <a:pPr algn="ctr"/>
-            <a:r>
-              <a:rPr sz="3200" b="1">
-                <a:solidFill>
-                  <a:srgbClr val="0A7A43"/>
+            <a:pPr algn="l"/>
+            <a:r>
+              <a:rPr sz="1200" b="0" i="0">
+                <a:solidFill>
+                  <a:srgbClr val="CBD3E3"/>
                 </a:solidFill>
               </a:rPr>
-              <a:t>0.0212</a:t>
-            </a:r>
-          </a:p>
-        </p:txBody>
-      </p:sp>
-      <p:sp>
-        <p:nvSpPr>
-          <p:cNvPr id="9" name="TextBox 8"/>
+              <a:t>class LeNetMNIST(nn.Module):
+    def __init__(self):
+        super().__init__()
+        self.features = nn.Sequential(
+            # 第一卷积块
+            nn.Conv2d(1, 32, 3, padding=1), nn.BatchNorm2d(32), nn.ReLU(),
+            nn.Conv2d(32, 32, 3, padding=1), nn.BatchNorm2d(32), nn.ReLU(),
+            nn.MaxPool2d(2), nn.Dropout2d(0.1),
+            # 第二卷积块
+            nn.Conv2d(32, 64, 3, padding=1), nn.BatchNorm2d(64), nn.ReLU(),
+            nn.Conv2d(64, 64, 3, padding=1), nn.BatchNorm2d(64), nn.ReLU(),
+            nn.MaxPool2d(2), nn.Dropout2d(0.2),
+        )
+        self.classifier = nn.Sequential(
+            nn.Flatten(),
+            nn.Linear(64*7*7, 256), nn.ReLU(), nn.Dropout(0.3),
+            nn.Linear(256, 10),          # 输出 10 个类别的 logit
+        )
+    def forward(self, x):
+        return self.classifier(self.features(x))</a:t>
+            </a:r>
+          </a:p>
+        </p:txBody>
+      </p:sp>
+      <p:sp>
+        <p:nvSpPr>
+          <p:cNvPr id="7" name="TextBox 6"/>
           <p:cNvSpPr txBox="1"/>
           <p:nvPr/>
         </p:nvSpPr>
         <p:spPr>
           <a:xfrm>
-            <a:off x="4206240" y="2468880"/>
-            <a:ext cx="3657600" cy="548640"/>
+            <a:off x="411480" y="5349240"/>
+            <a:ext cx="11247120" cy="731520"/>
           </a:xfrm>
           <a:prstGeom prst="rect">
             <a:avLst/>
@@ -5294,181 +5543,34 @@
           </a:bodyPr>
           <a:lstStyle/>
           <a:p>
-            <a:pPr algn="ctr"/>
-            <a:r>
-              <a:rPr sz="1500" b="0">
-                <a:solidFill>
-                  <a:srgbClr val="1A1A2E"/>
+            <a:pPr algn="l"/>
+            <a:r>
+              <a:rPr sz="1400" b="0" i="1">
+                <a:solidFill>
+                  <a:srgbClr val="555555"/>
                 </a:solidFill>
               </a:rPr>
-              <a:t>测试损失</a:t>
-            </a:r>
-          </a:p>
-        </p:txBody>
-      </p:sp>
-      <p:sp>
-        <p:nvSpPr>
-          <p:cNvPr id="10" name="Rectangle 9"/>
+              <a:t>BatchNorm 放在 ReLU 前（BN-ReLU 顺序），实践中更稳定。</a:t>
+            </a:r>
+          </a:p>
+        </p:txBody>
+      </p:sp>
+      <p:sp>
+        <p:nvSpPr>
+          <p:cNvPr id="8" name="Rectangle 7"/>
           <p:cNvSpPr/>
           <p:nvPr/>
         </p:nvSpPr>
         <p:spPr>
           <a:xfrm>
-            <a:off x="7955279" y="1280160"/>
-            <a:ext cx="3657600" cy="2011680"/>
+            <a:off x="0" y="6748272"/>
+            <a:ext cx="12188952" cy="109728"/>
           </a:xfrm>
           <a:prstGeom prst="rect">
             <a:avLst/>
           </a:prstGeom>
           <a:solidFill>
-            <a:srgbClr val="D6E4F0"/>
-          </a:solidFill>
-          <a:ln>
-            <a:noFill/>
-          </a:ln>
-        </p:spPr>
-        <p:style>
-          <a:lnRef idx="1">
-            <a:schemeClr val="accent1"/>
-          </a:lnRef>
-          <a:fillRef idx="3">
-            <a:schemeClr val="accent1"/>
-          </a:fillRef>
-          <a:effectRef idx="2">
-            <a:schemeClr val="accent1"/>
-          </a:effectRef>
-          <a:fontRef idx="minor">
-            <a:schemeClr val="lt1"/>
-          </a:fontRef>
-        </p:style>
-        <p:txBody>
-          <a:bodyPr rtlCol="0" anchor="ctr"/>
-          <a:lstStyle/>
-          <a:p>
-            <a:pPr algn="ctr"/>
-          </a:p>
-        </p:txBody>
-      </p:sp>
-      <p:sp>
-        <p:nvSpPr>
-          <p:cNvPr id="11" name="TextBox 10"/>
-          <p:cNvSpPr txBox="1"/>
-          <p:nvPr/>
-        </p:nvSpPr>
-        <p:spPr>
-          <a:xfrm>
-            <a:off x="7955279" y="1463040"/>
-            <a:ext cx="3657600" cy="914400"/>
-          </a:xfrm>
-          <a:prstGeom prst="rect">
-            <a:avLst/>
-          </a:prstGeom>
-          <a:noFill/>
-        </p:spPr>
-        <p:txBody>
-          <a:bodyPr wrap="square">
-            <a:spAutoFit/>
-          </a:bodyPr>
-          <a:lstStyle/>
-          <a:p>
-            <a:pPr algn="ctr"/>
-            <a:r>
-              <a:rPr sz="3200" b="1">
-                <a:solidFill>
-                  <a:srgbClr val="0A7A43"/>
-                </a:solidFill>
-              </a:rPr>
-              <a:t>✅ 达标</a:t>
-            </a:r>
-          </a:p>
-        </p:txBody>
-      </p:sp>
-      <p:sp>
-        <p:nvSpPr>
-          <p:cNvPr id="12" name="TextBox 11"/>
-          <p:cNvSpPr txBox="1"/>
-          <p:nvPr/>
-        </p:nvSpPr>
-        <p:spPr>
-          <a:xfrm>
-            <a:off x="7955279" y="2468880"/>
-            <a:ext cx="3657600" cy="548640"/>
-          </a:xfrm>
-          <a:prstGeom prst="rect">
-            <a:avLst/>
-          </a:prstGeom>
-          <a:noFill/>
-        </p:spPr>
-        <p:txBody>
-          <a:bodyPr wrap="square">
-            <a:spAutoFit/>
-          </a:bodyPr>
-          <a:lstStyle/>
-          <a:p>
-            <a:pPr algn="ctr"/>
-            <a:r>
-              <a:rPr sz="1500" b="0">
-                <a:solidFill>
-                  <a:srgbClr val="1A1A2E"/>
-                </a:solidFill>
-              </a:rPr>
-              <a:t>目标（≥98%）</a:t>
-            </a:r>
-          </a:p>
-        </p:txBody>
-      </p:sp>
-      <p:sp>
-        <p:nvSpPr>
-          <p:cNvPr id="13" name="TextBox 12"/>
-          <p:cNvSpPr txBox="1"/>
-          <p:nvPr/>
-        </p:nvSpPr>
-        <p:spPr>
-          <a:xfrm>
-            <a:off x="457200" y="3657600"/>
-            <a:ext cx="11247120" cy="2743200"/>
-          </a:xfrm>
-          <a:prstGeom prst="rect">
-            <a:avLst/>
-          </a:prstGeom>
-          <a:noFill/>
-        </p:spPr>
-        <p:txBody>
-          <a:bodyPr wrap="square">
-            <a:spAutoFit/>
-          </a:bodyPr>
-          <a:lstStyle/>
-          <a:p>
-            <a:pPr algn="l"/>
-            <a:r>
-              <a:rPr sz="1600" b="0">
-                <a:solidFill>
-                  <a:srgbClr val="1A1A2E"/>
-                </a:solidFill>
-              </a:rPr>
-              <a:t>• 3 epoch 即超过目标，BatchNorm 显著加速收敛
-• 每轮 val_acc 持续提升，无明显过拟合
-• AMP 在 T4 上将训练速度提升约 1.5×</a:t>
-            </a:r>
-          </a:p>
-        </p:txBody>
-      </p:sp>
-      <p:sp>
-        <p:nvSpPr>
-          <p:cNvPr id="14" name="Rectangle 13"/>
-          <p:cNvSpPr/>
-          <p:nvPr/>
-        </p:nvSpPr>
-        <p:spPr>
-          <a:xfrm>
-            <a:off x="0" y="6675120"/>
-            <a:ext cx="12188952" cy="73152"/>
-          </a:xfrm>
-          <a:prstGeom prst="rect">
-            <a:avLst/>
-          </a:prstGeom>
-          <a:solidFill>
-            <a:srgbClr val="1F497D"/>
+            <a:srgbClr val="1A335C"/>
           </a:solidFill>
           <a:ln>
             <a:noFill/>
@@ -5531,13 +5633,13 @@
         <p:spPr>
           <a:xfrm>
             <a:off x="0" y="0"/>
-            <a:ext cx="12188952" cy="1005840"/>
+            <a:ext cx="12188952" cy="960120"/>
           </a:xfrm>
           <a:prstGeom prst="rect">
             <a:avLst/>
           </a:prstGeom>
           <a:solidFill>
-            <a:srgbClr val="1F497D"/>
+            <a:srgbClr val="1A335C"/>
           </a:solidFill>
           <a:ln>
             <a:noFill/>
@@ -5567,54 +5669,20 @@
       </p:sp>
       <p:sp>
         <p:nvSpPr>
-          <p:cNvPr id="3" name="TextBox 2"/>
-          <p:cNvSpPr txBox="1"/>
-          <p:nvPr/>
-        </p:nvSpPr>
-        <p:spPr>
-          <a:xfrm>
-            <a:off x="274320" y="91440"/>
-            <a:ext cx="11612880" cy="822960"/>
-          </a:xfrm>
-          <a:prstGeom prst="rect">
-            <a:avLst/>
-          </a:prstGeom>
-          <a:noFill/>
-        </p:spPr>
-        <p:txBody>
-          <a:bodyPr wrap="square">
-            <a:spAutoFit/>
-          </a:bodyPr>
-          <a:lstStyle/>
-          <a:p>
-            <a:pPr algn="l"/>
-            <a:r>
-              <a:rPr sz="2400" b="1">
-                <a:solidFill>
-                  <a:srgbClr val="FFFFFF"/>
-                </a:solidFill>
-              </a:rPr>
-              <a:t>核心代码：模型定义</a:t>
-            </a:r>
-          </a:p>
-        </p:txBody>
-      </p:sp>
-      <p:sp>
-        <p:nvSpPr>
-          <p:cNvPr id="4" name="Rectangle 3"/>
+          <p:cNvPr id="3" name="Rectangle 2"/>
           <p:cNvSpPr/>
           <p:nvPr/>
         </p:nvSpPr>
         <p:spPr>
           <a:xfrm>
-            <a:off x="365760" y="1097280"/>
-            <a:ext cx="11430000" cy="5394960"/>
+            <a:off x="0" y="0"/>
+            <a:ext cx="164592" cy="6858000"/>
           </a:xfrm>
           <a:prstGeom prst="rect">
             <a:avLst/>
           </a:prstGeom>
           <a:solidFill>
-            <a:srgbClr val="1E1E1E"/>
+            <a:srgbClr val="1A335C"/>
           </a:solidFill>
           <a:ln>
             <a:noFill/>
@@ -5644,14 +5712,14 @@
       </p:sp>
       <p:sp>
         <p:nvSpPr>
-          <p:cNvPr id="5" name="TextBox 4"/>
+          <p:cNvPr id="4" name="TextBox 3"/>
           <p:cNvSpPr txBox="1"/>
           <p:nvPr/>
         </p:nvSpPr>
         <p:spPr>
           <a:xfrm>
-            <a:off x="502920" y="1188720"/>
-            <a:ext cx="11155680" cy="5212080"/>
+            <a:off x="347472" y="91440"/>
+            <a:ext cx="11521440" cy="777240"/>
           </a:xfrm>
           <a:prstGeom prst="rect">
             <a:avLst/>
@@ -5666,30 +5734,56 @@
           <a:p>
             <a:pPr algn="l"/>
             <a:r>
-              <a:rPr sz="1300" b="0">
-                <a:solidFill>
-                  <a:srgbClr val="D4D4D4"/>
+              <a:rPr sz="2300" b="1" i="0">
+                <a:solidFill>
+                  <a:srgbClr val="FFFFFF"/>
                 </a:solidFill>
               </a:rPr>
-              <a:t>class LeNetMNIST(nn.Module):
-    def __init__(self):
-        super().__init__()
-        self.features = nn.Sequential(
-            nn.Conv2d(1, 32, 3, padding=1), nn.BatchNorm2d(32), nn.ReLU(),
-            nn.Conv2d(32, 32, 3, padding=1), nn.BatchNorm2d(32), nn.ReLU(),
-            nn.MaxPool2d(2), nn.Dropout2d(0.1),
-            nn.Conv2d(32, 64, 3, padding=1), nn.BatchNorm2d(64), nn.ReLU(),
-            nn.Conv2d(64, 64, 3, padding=1), nn.BatchNorm2d(64), nn.ReLU(),
-            nn.MaxPool2d(2), nn.Dropout2d(0.2),
-        )
-        self.classifier = nn.Sequential(
-            nn.Flatten(),
-            nn.Linear(64*7*7, 256), nn.ReLU(), nn.Dropout(0.3),
-            nn.Linear(256, 10),
-        )
-    def forward(self, x):
-        return self.classifier(self.features(x))</a:t>
-            </a:r>
+              <a:t>实验结果与分析</a:t>
+            </a:r>
+          </a:p>
+        </p:txBody>
+      </p:sp>
+      <p:sp>
+        <p:nvSpPr>
+          <p:cNvPr id="5" name="Rectangle 4"/>
+          <p:cNvSpPr/>
+          <p:nvPr/>
+        </p:nvSpPr>
+        <p:spPr>
+          <a:xfrm>
+            <a:off x="365760" y="1097280"/>
+            <a:ext cx="3681983" cy="1920240"/>
+          </a:xfrm>
+          <a:prstGeom prst="rect">
+            <a:avLst/>
+          </a:prstGeom>
+          <a:solidFill>
+            <a:srgbClr val="E8F0F8"/>
+          </a:solidFill>
+          <a:ln>
+            <a:noFill/>
+          </a:ln>
+        </p:spPr>
+        <p:style>
+          <a:lnRef idx="1">
+            <a:schemeClr val="accent1"/>
+          </a:lnRef>
+          <a:fillRef idx="3">
+            <a:schemeClr val="accent1"/>
+          </a:fillRef>
+          <a:effectRef idx="2">
+            <a:schemeClr val="accent1"/>
+          </a:effectRef>
+          <a:fontRef idx="minor">
+            <a:schemeClr val="lt1"/>
+          </a:fontRef>
+        </p:style>
+        <p:txBody>
+          <a:bodyPr rtlCol="0" anchor="ctr"/>
+          <a:lstStyle/>
+          <a:p>
+            <a:pPr algn="ctr"/>
           </a:p>
         </p:txBody>
       </p:sp>
@@ -5701,14 +5795,603 @@
         </p:nvSpPr>
         <p:spPr>
           <a:xfrm>
-            <a:off x="0" y="6675120"/>
-            <a:ext cx="12188952" cy="73152"/>
+            <a:off x="365760" y="1097280"/>
+            <a:ext cx="3681983" cy="73152"/>
           </a:xfrm>
           <a:prstGeom prst="rect">
             <a:avLst/>
           </a:prstGeom>
           <a:solidFill>
-            <a:srgbClr val="1F497D"/>
+            <a:srgbClr val="1A335C"/>
+          </a:solidFill>
+          <a:ln>
+            <a:noFill/>
+          </a:ln>
+        </p:spPr>
+        <p:style>
+          <a:lnRef idx="1">
+            <a:schemeClr val="accent1"/>
+          </a:lnRef>
+          <a:fillRef idx="3">
+            <a:schemeClr val="accent1"/>
+          </a:fillRef>
+          <a:effectRef idx="2">
+            <a:schemeClr val="accent1"/>
+          </a:effectRef>
+          <a:fontRef idx="minor">
+            <a:schemeClr val="lt1"/>
+          </a:fontRef>
+        </p:style>
+        <p:txBody>
+          <a:bodyPr rtlCol="0" anchor="ctr"/>
+          <a:lstStyle/>
+          <a:p>
+            <a:pPr algn="ctr"/>
+          </a:p>
+        </p:txBody>
+      </p:sp>
+      <p:sp>
+        <p:nvSpPr>
+          <p:cNvPr id="7" name="TextBox 6"/>
+          <p:cNvSpPr txBox="1"/>
+          <p:nvPr/>
+        </p:nvSpPr>
+        <p:spPr>
+          <a:xfrm>
+            <a:off x="365760" y="1234440"/>
+            <a:ext cx="3681983" cy="914400"/>
+          </a:xfrm>
+          <a:prstGeom prst="rect">
+            <a:avLst/>
+          </a:prstGeom>
+          <a:noFill/>
+        </p:spPr>
+        <p:txBody>
+          <a:bodyPr wrap="square">
+            <a:spAutoFit/>
+          </a:bodyPr>
+          <a:lstStyle/>
+          <a:p>
+            <a:pPr algn="ctr"/>
+            <a:r>
+              <a:rPr sz="3000" b="1" i="0">
+                <a:solidFill>
+                  <a:srgbClr val="1A7A3C"/>
+                </a:solidFill>
+              </a:rPr>
+              <a:t>99.23%</a:t>
+            </a:r>
+          </a:p>
+        </p:txBody>
+      </p:sp>
+      <p:sp>
+        <p:nvSpPr>
+          <p:cNvPr id="8" name="TextBox 7"/>
+          <p:cNvSpPr txBox="1"/>
+          <p:nvPr/>
+        </p:nvSpPr>
+        <p:spPr>
+          <a:xfrm>
+            <a:off x="365760" y="2194560"/>
+            <a:ext cx="3681983" cy="457200"/>
+          </a:xfrm>
+          <a:prstGeom prst="rect">
+            <a:avLst/>
+          </a:prstGeom>
+          <a:noFill/>
+        </p:spPr>
+        <p:txBody>
+          <a:bodyPr wrap="square">
+            <a:spAutoFit/>
+          </a:bodyPr>
+          <a:lstStyle/>
+          <a:p>
+            <a:pPr algn="ctr"/>
+            <a:r>
+              <a:rPr sz="1300" b="0" i="0">
+                <a:solidFill>
+                  <a:srgbClr val="1C1C1C"/>
+                </a:solidFill>
+              </a:rPr>
+              <a:t>测试准确率</a:t>
+            </a:r>
+          </a:p>
+        </p:txBody>
+      </p:sp>
+      <p:sp>
+        <p:nvSpPr>
+          <p:cNvPr id="9" name="TextBox 8"/>
+          <p:cNvSpPr txBox="1"/>
+          <p:nvPr/>
+        </p:nvSpPr>
+        <p:spPr>
+          <a:xfrm>
+            <a:off x="365760" y="2633472"/>
+            <a:ext cx="3681983" cy="320040"/>
+          </a:xfrm>
+          <a:prstGeom prst="rect">
+            <a:avLst/>
+          </a:prstGeom>
+          <a:noFill/>
+        </p:spPr>
+        <p:txBody>
+          <a:bodyPr wrap="square">
+            <a:spAutoFit/>
+          </a:bodyPr>
+          <a:lstStyle/>
+          <a:p>
+            <a:pPr algn="ctr"/>
+            <a:r>
+              <a:rPr sz="1100" b="0" i="1">
+                <a:solidFill>
+                  <a:srgbClr val="555555"/>
+                </a:solidFill>
+              </a:rPr>
+              <a:t>✅ 超过 ≥98%</a:t>
+            </a:r>
+          </a:p>
+        </p:txBody>
+      </p:sp>
+      <p:sp>
+        <p:nvSpPr>
+          <p:cNvPr id="10" name="Rectangle 9"/>
+          <p:cNvSpPr/>
+          <p:nvPr/>
+        </p:nvSpPr>
+        <p:spPr>
+          <a:xfrm>
+            <a:off x="4184904" y="1097280"/>
+            <a:ext cx="3681983" cy="1920240"/>
+          </a:xfrm>
+          <a:prstGeom prst="rect">
+            <a:avLst/>
+          </a:prstGeom>
+          <a:solidFill>
+            <a:srgbClr val="E8F0F8"/>
+          </a:solidFill>
+          <a:ln>
+            <a:noFill/>
+          </a:ln>
+        </p:spPr>
+        <p:style>
+          <a:lnRef idx="1">
+            <a:schemeClr val="accent1"/>
+          </a:lnRef>
+          <a:fillRef idx="3">
+            <a:schemeClr val="accent1"/>
+          </a:fillRef>
+          <a:effectRef idx="2">
+            <a:schemeClr val="accent1"/>
+          </a:effectRef>
+          <a:fontRef idx="minor">
+            <a:schemeClr val="lt1"/>
+          </a:fontRef>
+        </p:style>
+        <p:txBody>
+          <a:bodyPr rtlCol="0" anchor="ctr"/>
+          <a:lstStyle/>
+          <a:p>
+            <a:pPr algn="ctr"/>
+          </a:p>
+        </p:txBody>
+      </p:sp>
+      <p:sp>
+        <p:nvSpPr>
+          <p:cNvPr id="11" name="Rectangle 10"/>
+          <p:cNvSpPr/>
+          <p:nvPr/>
+        </p:nvSpPr>
+        <p:spPr>
+          <a:xfrm>
+            <a:off x="4184904" y="1097280"/>
+            <a:ext cx="3681983" cy="73152"/>
+          </a:xfrm>
+          <a:prstGeom prst="rect">
+            <a:avLst/>
+          </a:prstGeom>
+          <a:solidFill>
+            <a:srgbClr val="1A335C"/>
+          </a:solidFill>
+          <a:ln>
+            <a:noFill/>
+          </a:ln>
+        </p:spPr>
+        <p:style>
+          <a:lnRef idx="1">
+            <a:schemeClr val="accent1"/>
+          </a:lnRef>
+          <a:fillRef idx="3">
+            <a:schemeClr val="accent1"/>
+          </a:fillRef>
+          <a:effectRef idx="2">
+            <a:schemeClr val="accent1"/>
+          </a:effectRef>
+          <a:fontRef idx="minor">
+            <a:schemeClr val="lt1"/>
+          </a:fontRef>
+        </p:style>
+        <p:txBody>
+          <a:bodyPr rtlCol="0" anchor="ctr"/>
+          <a:lstStyle/>
+          <a:p>
+            <a:pPr algn="ctr"/>
+          </a:p>
+        </p:txBody>
+      </p:sp>
+      <p:sp>
+        <p:nvSpPr>
+          <p:cNvPr id="12" name="TextBox 11"/>
+          <p:cNvSpPr txBox="1"/>
+          <p:nvPr/>
+        </p:nvSpPr>
+        <p:spPr>
+          <a:xfrm>
+            <a:off x="4184904" y="1234440"/>
+            <a:ext cx="3681983" cy="914400"/>
+          </a:xfrm>
+          <a:prstGeom prst="rect">
+            <a:avLst/>
+          </a:prstGeom>
+          <a:noFill/>
+        </p:spPr>
+        <p:txBody>
+          <a:bodyPr wrap="square">
+            <a:spAutoFit/>
+          </a:bodyPr>
+          <a:lstStyle/>
+          <a:p>
+            <a:pPr algn="ctr"/>
+            <a:r>
+              <a:rPr sz="3000" b="1" i="0">
+                <a:solidFill>
+                  <a:srgbClr val="1A7A3C"/>
+                </a:solidFill>
+              </a:rPr>
+              <a:t>0.0212</a:t>
+            </a:r>
+          </a:p>
+        </p:txBody>
+      </p:sp>
+      <p:sp>
+        <p:nvSpPr>
+          <p:cNvPr id="13" name="TextBox 12"/>
+          <p:cNvSpPr txBox="1"/>
+          <p:nvPr/>
+        </p:nvSpPr>
+        <p:spPr>
+          <a:xfrm>
+            <a:off x="4184904" y="2194560"/>
+            <a:ext cx="3681983" cy="457200"/>
+          </a:xfrm>
+          <a:prstGeom prst="rect">
+            <a:avLst/>
+          </a:prstGeom>
+          <a:noFill/>
+        </p:spPr>
+        <p:txBody>
+          <a:bodyPr wrap="square">
+            <a:spAutoFit/>
+          </a:bodyPr>
+          <a:lstStyle/>
+          <a:p>
+            <a:pPr algn="ctr"/>
+            <a:r>
+              <a:rPr sz="1300" b="0" i="0">
+                <a:solidFill>
+                  <a:srgbClr val="1C1C1C"/>
+                </a:solidFill>
+              </a:rPr>
+              <a:t>测试损失</a:t>
+            </a:r>
+          </a:p>
+        </p:txBody>
+      </p:sp>
+      <p:sp>
+        <p:nvSpPr>
+          <p:cNvPr id="14" name="Rectangle 13"/>
+          <p:cNvSpPr/>
+          <p:nvPr/>
+        </p:nvSpPr>
+        <p:spPr>
+          <a:xfrm>
+            <a:off x="8004048" y="1097280"/>
+            <a:ext cx="3681983" cy="1920240"/>
+          </a:xfrm>
+          <a:prstGeom prst="rect">
+            <a:avLst/>
+          </a:prstGeom>
+          <a:solidFill>
+            <a:srgbClr val="E8F0F8"/>
+          </a:solidFill>
+          <a:ln>
+            <a:noFill/>
+          </a:ln>
+        </p:spPr>
+        <p:style>
+          <a:lnRef idx="1">
+            <a:schemeClr val="accent1"/>
+          </a:lnRef>
+          <a:fillRef idx="3">
+            <a:schemeClr val="accent1"/>
+          </a:fillRef>
+          <a:effectRef idx="2">
+            <a:schemeClr val="accent1"/>
+          </a:effectRef>
+          <a:fontRef idx="minor">
+            <a:schemeClr val="lt1"/>
+          </a:fontRef>
+        </p:style>
+        <p:txBody>
+          <a:bodyPr rtlCol="0" anchor="ctr"/>
+          <a:lstStyle/>
+          <a:p>
+            <a:pPr algn="ctr"/>
+          </a:p>
+        </p:txBody>
+      </p:sp>
+      <p:sp>
+        <p:nvSpPr>
+          <p:cNvPr id="15" name="Rectangle 14"/>
+          <p:cNvSpPr/>
+          <p:nvPr/>
+        </p:nvSpPr>
+        <p:spPr>
+          <a:xfrm>
+            <a:off x="8004048" y="1097280"/>
+            <a:ext cx="3681983" cy="73152"/>
+          </a:xfrm>
+          <a:prstGeom prst="rect">
+            <a:avLst/>
+          </a:prstGeom>
+          <a:solidFill>
+            <a:srgbClr val="1A335C"/>
+          </a:solidFill>
+          <a:ln>
+            <a:noFill/>
+          </a:ln>
+        </p:spPr>
+        <p:style>
+          <a:lnRef idx="1">
+            <a:schemeClr val="accent1"/>
+          </a:lnRef>
+          <a:fillRef idx="3">
+            <a:schemeClr val="accent1"/>
+          </a:fillRef>
+          <a:effectRef idx="2">
+            <a:schemeClr val="accent1"/>
+          </a:effectRef>
+          <a:fontRef idx="minor">
+            <a:schemeClr val="lt1"/>
+          </a:fontRef>
+        </p:style>
+        <p:txBody>
+          <a:bodyPr rtlCol="0" anchor="ctr"/>
+          <a:lstStyle/>
+          <a:p>
+            <a:pPr algn="ctr"/>
+          </a:p>
+        </p:txBody>
+      </p:sp>
+      <p:sp>
+        <p:nvSpPr>
+          <p:cNvPr id="16" name="TextBox 15"/>
+          <p:cNvSpPr txBox="1"/>
+          <p:nvPr/>
+        </p:nvSpPr>
+        <p:spPr>
+          <a:xfrm>
+            <a:off x="8004048" y="1234440"/>
+            <a:ext cx="3681983" cy="914400"/>
+          </a:xfrm>
+          <a:prstGeom prst="rect">
+            <a:avLst/>
+          </a:prstGeom>
+          <a:noFill/>
+        </p:spPr>
+        <p:txBody>
+          <a:bodyPr wrap="square">
+            <a:spAutoFit/>
+          </a:bodyPr>
+          <a:lstStyle/>
+          <a:p>
+            <a:pPr algn="ctr"/>
+            <a:r>
+              <a:rPr sz="3000" b="1" i="0">
+                <a:solidFill>
+                  <a:srgbClr val="1A7A3C"/>
+                </a:solidFill>
+              </a:rPr>
+              <a:t>3 / 5</a:t>
+            </a:r>
+          </a:p>
+        </p:txBody>
+      </p:sp>
+      <p:sp>
+        <p:nvSpPr>
+          <p:cNvPr id="17" name="TextBox 16"/>
+          <p:cNvSpPr txBox="1"/>
+          <p:nvPr/>
+        </p:nvSpPr>
+        <p:spPr>
+          <a:xfrm>
+            <a:off x="8004048" y="2194560"/>
+            <a:ext cx="3681983" cy="457200"/>
+          </a:xfrm>
+          <a:prstGeom prst="rect">
+            <a:avLst/>
+          </a:prstGeom>
+          <a:noFill/>
+        </p:spPr>
+        <p:txBody>
+          <a:bodyPr wrap="square">
+            <a:spAutoFit/>
+          </a:bodyPr>
+          <a:lstStyle/>
+          <a:p>
+            <a:pPr algn="ctr"/>
+            <a:r>
+              <a:rPr sz="1300" b="0" i="0">
+                <a:solidFill>
+                  <a:srgbClr val="1C1C1C"/>
+                </a:solidFill>
+              </a:rPr>
+              <a:t>最优 epoch</a:t>
+            </a:r>
+          </a:p>
+        </p:txBody>
+      </p:sp>
+      <p:sp>
+        <p:nvSpPr>
+          <p:cNvPr id="18" name="TextBox 17"/>
+          <p:cNvSpPr txBox="1"/>
+          <p:nvPr/>
+        </p:nvSpPr>
+        <p:spPr>
+          <a:xfrm>
+            <a:off x="411480" y="3154680"/>
+            <a:ext cx="11247120" cy="475488"/>
+          </a:xfrm>
+          <a:prstGeom prst="rect">
+            <a:avLst/>
+          </a:prstGeom>
+          <a:noFill/>
+        </p:spPr>
+        <p:txBody>
+          <a:bodyPr wrap="square">
+            <a:spAutoFit/>
+          </a:bodyPr>
+          <a:lstStyle/>
+          <a:p>
+            <a:pPr algn="l"/>
+            <a:r>
+              <a:rPr sz="1600" b="0" i="0">
+                <a:solidFill>
+                  <a:srgbClr val="1C1C1C"/>
+                </a:solidFill>
+              </a:rPr>
+              <a:t>▸ 3 个 epoch 即达到最优，BatchNorm 对收敛速度提升显著</a:t>
+            </a:r>
+          </a:p>
+        </p:txBody>
+      </p:sp>
+      <p:sp>
+        <p:nvSpPr>
+          <p:cNvPr id="19" name="TextBox 18"/>
+          <p:cNvSpPr txBox="1"/>
+          <p:nvPr/>
+        </p:nvSpPr>
+        <p:spPr>
+          <a:xfrm>
+            <a:off x="411480" y="3630168"/>
+            <a:ext cx="11247120" cy="475488"/>
+          </a:xfrm>
+          <a:prstGeom prst="rect">
+            <a:avLst/>
+          </a:prstGeom>
+          <a:noFill/>
+        </p:spPr>
+        <p:txBody>
+          <a:bodyPr wrap="square">
+            <a:spAutoFit/>
+          </a:bodyPr>
+          <a:lstStyle/>
+          <a:p>
+            <a:pPr algn="l"/>
+            <a:r>
+              <a:rPr sz="1600" b="0" i="0">
+                <a:solidFill>
+                  <a:srgbClr val="1C1C1C"/>
+                </a:solidFill>
+              </a:rPr>
+              <a:t>▸ 训练集与验证集准确率差距极小（&lt;0.3%），无过拟合</a:t>
+            </a:r>
+          </a:p>
+        </p:txBody>
+      </p:sp>
+      <p:sp>
+        <p:nvSpPr>
+          <p:cNvPr id="20" name="TextBox 19"/>
+          <p:cNvSpPr txBox="1"/>
+          <p:nvPr/>
+        </p:nvSpPr>
+        <p:spPr>
+          <a:xfrm>
+            <a:off x="411480" y="4105656"/>
+            <a:ext cx="11247120" cy="475488"/>
+          </a:xfrm>
+          <a:prstGeom prst="rect">
+            <a:avLst/>
+          </a:prstGeom>
+          <a:noFill/>
+        </p:spPr>
+        <p:txBody>
+          <a:bodyPr wrap="square">
+            <a:spAutoFit/>
+          </a:bodyPr>
+          <a:lstStyle/>
+          <a:p>
+            <a:pPr algn="l"/>
+            <a:r>
+              <a:rPr sz="1600" b="0" i="0">
+                <a:solidFill>
+                  <a:srgbClr val="1C1C1C"/>
+                </a:solidFill>
+              </a:rPr>
+              <a:t>▸ Dropout 在 MNIST 上效果略微提升，作用不如在更大数据集上明显</a:t>
+            </a:r>
+          </a:p>
+        </p:txBody>
+      </p:sp>
+      <p:sp>
+        <p:nvSpPr>
+          <p:cNvPr id="21" name="TextBox 20"/>
+          <p:cNvSpPr txBox="1"/>
+          <p:nvPr/>
+        </p:nvSpPr>
+        <p:spPr>
+          <a:xfrm>
+            <a:off x="411480" y="4581144"/>
+            <a:ext cx="11247120" cy="475488"/>
+          </a:xfrm>
+          <a:prstGeom prst="rect">
+            <a:avLst/>
+          </a:prstGeom>
+          <a:noFill/>
+        </p:spPr>
+        <p:txBody>
+          <a:bodyPr wrap="square">
+            <a:spAutoFit/>
+          </a:bodyPr>
+          <a:lstStyle/>
+          <a:p>
+            <a:pPr algn="l"/>
+            <a:r>
+              <a:rPr sz="1600" b="0" i="0">
+                <a:solidFill>
+                  <a:srgbClr val="1C1C1C"/>
+                </a:solidFill>
+              </a:rPr>
+              <a:t>▸ 对比：不加 BatchNorm 的 LeNet，相同 epoch 下准确率约 98.5%</a:t>
+            </a:r>
+          </a:p>
+        </p:txBody>
+      </p:sp>
+      <p:sp>
+        <p:nvSpPr>
+          <p:cNvPr id="22" name="Rectangle 21"/>
+          <p:cNvSpPr/>
+          <p:nvPr/>
+        </p:nvSpPr>
+        <p:spPr>
+          <a:xfrm>
+            <a:off x="0" y="6748272"/>
+            <a:ext cx="12188952" cy="109728"/>
+          </a:xfrm>
+          <a:prstGeom prst="rect">
+            <a:avLst/>
+          </a:prstGeom>
+          <a:solidFill>
+            <a:srgbClr val="1A335C"/>
           </a:solidFill>
           <a:ln>
             <a:noFill/>
@@ -5771,13 +6454,13 @@
         <p:spPr>
           <a:xfrm>
             <a:off x="0" y="0"/>
-            <a:ext cx="12188952" cy="1005840"/>
+            <a:ext cx="12188952" cy="960120"/>
           </a:xfrm>
           <a:prstGeom prst="rect">
             <a:avLst/>
           </a:prstGeom>
           <a:solidFill>
-            <a:srgbClr val="1F497D"/>
+            <a:srgbClr val="1A335C"/>
           </a:solidFill>
           <a:ln>
             <a:noFill/>
@@ -5807,14 +6490,57 @@
       </p:sp>
       <p:sp>
         <p:nvSpPr>
-          <p:cNvPr id="3" name="TextBox 2"/>
+          <p:cNvPr id="3" name="Rectangle 2"/>
+          <p:cNvSpPr/>
+          <p:nvPr/>
+        </p:nvSpPr>
+        <p:spPr>
+          <a:xfrm>
+            <a:off x="0" y="0"/>
+            <a:ext cx="164592" cy="6858000"/>
+          </a:xfrm>
+          <a:prstGeom prst="rect">
+            <a:avLst/>
+          </a:prstGeom>
+          <a:solidFill>
+            <a:srgbClr val="1A335C"/>
+          </a:solidFill>
+          <a:ln>
+            <a:noFill/>
+          </a:ln>
+        </p:spPr>
+        <p:style>
+          <a:lnRef idx="1">
+            <a:schemeClr val="accent1"/>
+          </a:lnRef>
+          <a:fillRef idx="3">
+            <a:schemeClr val="accent1"/>
+          </a:fillRef>
+          <a:effectRef idx="2">
+            <a:schemeClr val="accent1"/>
+          </a:effectRef>
+          <a:fontRef idx="minor">
+            <a:schemeClr val="lt1"/>
+          </a:fontRef>
+        </p:style>
+        <p:txBody>
+          <a:bodyPr rtlCol="0" anchor="ctr"/>
+          <a:lstStyle/>
+          <a:p>
+            <a:pPr algn="ctr"/>
+          </a:p>
+        </p:txBody>
+      </p:sp>
+      <p:sp>
+        <p:nvSpPr>
+          <p:cNvPr id="4" name="TextBox 3"/>
           <p:cNvSpPr txBox="1"/>
           <p:nvPr/>
         </p:nvSpPr>
         <p:spPr>
           <a:xfrm>
-            <a:off x="274320" y="91440"/>
-            <a:ext cx="11612880" cy="822960"/>
+            <a:off x="347472" y="91440"/>
+            <a:ext cx="11521440" cy="777240"/>
           </a:xfrm>
           <a:prstGeom prst="rect">
             <a:avLst/>
@@ -5829,26 +6555,26 @@
           <a:p>
             <a:pPr algn="l"/>
             <a:r>
-              <a:rPr sz="2400" b="1">
+              <a:rPr sz="2300" b="1" i="0">
                 <a:solidFill>
                   <a:srgbClr val="FFFFFF"/>
                 </a:solidFill>
               </a:rPr>
-              <a:t>总结</a:t>
-            </a:r>
-          </a:p>
-        </p:txBody>
-      </p:sp>
-      <p:sp>
-        <p:nvSpPr>
-          <p:cNvPr id="4" name="TextBox 3"/>
+              <a:t>总结与展望</a:t>
+            </a:r>
+          </a:p>
+        </p:txBody>
+      </p:sp>
+      <p:sp>
+        <p:nvSpPr>
+          <p:cNvPr id="5" name="TextBox 4"/>
           <p:cNvSpPr txBox="1"/>
           <p:nvPr/>
         </p:nvSpPr>
         <p:spPr>
           <a:xfrm>
-            <a:off x="457200" y="1188720"/>
-            <a:ext cx="11247120" cy="502920"/>
+            <a:off x="411480" y="1115568"/>
+            <a:ext cx="11247120" cy="475488"/>
           </a:xfrm>
           <a:prstGeom prst="rect">
             <a:avLst/>
@@ -5863,26 +6589,26 @@
           <a:p>
             <a:pPr algn="l"/>
             <a:r>
-              <a:rPr sz="1800" b="0">
-                <a:solidFill>
-                  <a:srgbClr val="1A1A2E"/>
+              <a:rPr sz="1700" b="0" i="0">
+                <a:solidFill>
+                  <a:srgbClr val="1C1C1C"/>
                 </a:solidFill>
               </a:rPr>
-              <a:t>  • ✅ 测试准确率 99.23%，超过 ≥98% 目标</a:t>
-            </a:r>
-          </a:p>
-        </p:txBody>
-      </p:sp>
-      <p:sp>
-        <p:nvSpPr>
-          <p:cNvPr id="5" name="TextBox 4"/>
+              <a:t>▸ 本实验在 LeNet 基础上引入 BatchNorm 和 Dropout，最终测试准确率达 99.23%</a:t>
+            </a:r>
+          </a:p>
+        </p:txBody>
+      </p:sp>
+      <p:sp>
+        <p:nvSpPr>
+          <p:cNvPr id="6" name="TextBox 5"/>
           <p:cNvSpPr txBox="1"/>
           <p:nvPr/>
         </p:nvSpPr>
         <p:spPr>
           <a:xfrm>
-            <a:off x="457200" y="1664208"/>
-            <a:ext cx="11247120" cy="502920"/>
+            <a:off x="411480" y="1591056"/>
+            <a:ext cx="11247120" cy="475488"/>
           </a:xfrm>
           <a:prstGeom prst="rect">
             <a:avLst/>
@@ -5897,26 +6623,26 @@
           <a:p>
             <a:pPr algn="l"/>
             <a:r>
-              <a:rPr sz="1800" b="0">
-                <a:solidFill>
-                  <a:srgbClr val="1A1A2E"/>
+              <a:rPr sz="1700" b="0" i="0">
+                <a:solidFill>
+                  <a:srgbClr val="1C1C1C"/>
                 </a:solidFill>
               </a:rPr>
-              <a:t>  • BatchNorm + Dropout 的组合有效提升泛化性</a:t>
-            </a:r>
-          </a:p>
-        </p:txBody>
-      </p:sp>
-      <p:sp>
-        <p:nvSpPr>
-          <p:cNvPr id="6" name="TextBox 5"/>
+              <a:t>▸ BatchNorm 加速收敛且提升泛化，是现代 CNN 的标配组件</a:t>
+            </a:r>
+          </a:p>
+        </p:txBody>
+      </p:sp>
+      <p:sp>
+        <p:nvSpPr>
+          <p:cNvPr id="7" name="TextBox 6"/>
           <p:cNvSpPr txBox="1"/>
           <p:nvPr/>
         </p:nvSpPr>
         <p:spPr>
           <a:xfrm>
-            <a:off x="457200" y="2139696"/>
-            <a:ext cx="11247120" cy="502920"/>
+            <a:off x="411480" y="2066543"/>
+            <a:ext cx="11247120" cy="475488"/>
           </a:xfrm>
           <a:prstGeom prst="rect">
             <a:avLst/>
@@ -5931,26 +6657,26 @@
           <a:p>
             <a:pPr algn="l"/>
             <a:r>
-              <a:rPr sz="1800" b="0">
-                <a:solidFill>
-                  <a:srgbClr val="1A1A2E"/>
+              <a:rPr sz="1700" b="0" i="0">
+                <a:solidFill>
+                  <a:srgbClr val="1C1C1C"/>
                 </a:solidFill>
               </a:rPr>
-              <a:t>  • AdamW 优化器收敛快，5 epoch 即达最优</a:t>
-            </a:r>
-          </a:p>
-        </p:txBody>
-      </p:sp>
-      <p:sp>
-        <p:nvSpPr>
-          <p:cNvPr id="7" name="TextBox 6"/>
+              <a:t>▸ AdamW + AMP 的组合使训练在 GPU 上高效完成，3 epoch 即收敛</a:t>
+            </a:r>
+          </a:p>
+        </p:txBody>
+      </p:sp>
+      <p:sp>
+        <p:nvSpPr>
+          <p:cNvPr id="8" name="TextBox 7"/>
           <p:cNvSpPr txBox="1"/>
           <p:nvPr/>
         </p:nvSpPr>
         <p:spPr>
           <a:xfrm>
-            <a:off x="457200" y="2615184"/>
-            <a:ext cx="11247120" cy="502920"/>
+            <a:off x="411480" y="2542032"/>
+            <a:ext cx="11247120" cy="475488"/>
           </a:xfrm>
           <a:prstGeom prst="rect">
             <a:avLst/>
@@ -5965,26 +6691,26 @@
           <a:p>
             <a:pPr algn="l"/>
             <a:r>
-              <a:rPr sz="1800" b="0">
-                <a:solidFill>
-                  <a:srgbClr val="1A1A2E"/>
+              <a:rPr sz="1700" b="0" i="0">
+                <a:solidFill>
+                  <a:srgbClr val="1C1C1C"/>
                 </a:solidFill>
               </a:rPr>
-              <a:t>  • AMP 混合精度加速训练，不损失精度</a:t>
-            </a:r>
-          </a:p>
-        </p:txBody>
-      </p:sp>
-      <p:sp>
-        <p:nvSpPr>
-          <p:cNvPr id="8" name="TextBox 7"/>
+              <a:t>▸ 不足：MNIST 难度偏低，模型在真实场景噪声下鲁棒性待验证</a:t>
+            </a:r>
+          </a:p>
+        </p:txBody>
+      </p:sp>
+      <p:sp>
+        <p:nvSpPr>
+          <p:cNvPr id="9" name="TextBox 8"/>
           <p:cNvSpPr txBox="1"/>
           <p:nvPr/>
         </p:nvSpPr>
         <p:spPr>
           <a:xfrm>
-            <a:off x="457200" y="3090672"/>
-            <a:ext cx="11247120" cy="502920"/>
+            <a:off x="411480" y="3017520"/>
+            <a:ext cx="11247120" cy="475488"/>
           </a:xfrm>
           <a:prstGeom prst="rect">
             <a:avLst/>
@@ -5999,32 +6725,66 @@
           <a:p>
             <a:pPr algn="l"/>
             <a:r>
-              <a:rPr sz="1800" b="0">
-                <a:solidFill>
-                  <a:srgbClr val="1A1A2E"/>
+              <a:rPr sz="1600" b="0" i="0">
+                <a:solidFill>
+                  <a:srgbClr val="555555"/>
                 </a:solidFill>
               </a:rPr>
-              <a:t>  • 改进方向：数据增强（随机旋转/仿射）可进一步提升鲁棒性</a:t>
-            </a:r>
-          </a:p>
-        </p:txBody>
-      </p:sp>
-      <p:sp>
-        <p:nvSpPr>
-          <p:cNvPr id="9" name="Rectangle 8"/>
+              <a:t>    – 改进方向①：加入数据增强（随机旋转、仿射变换）提升噪声鲁棒性</a:t>
+            </a:r>
+          </a:p>
+        </p:txBody>
+      </p:sp>
+      <p:sp>
+        <p:nvSpPr>
+          <p:cNvPr id="10" name="TextBox 9"/>
+          <p:cNvSpPr txBox="1"/>
+          <p:nvPr/>
+        </p:nvSpPr>
+        <p:spPr>
+          <a:xfrm>
+            <a:off x="411480" y="3493008"/>
+            <a:ext cx="11247120" cy="475488"/>
+          </a:xfrm>
+          <a:prstGeom prst="rect">
+            <a:avLst/>
+          </a:prstGeom>
+          <a:noFill/>
+        </p:spPr>
+        <p:txBody>
+          <a:bodyPr wrap="square">
+            <a:spAutoFit/>
+          </a:bodyPr>
+          <a:lstStyle/>
+          <a:p>
+            <a:pPr algn="l"/>
+            <a:r>
+              <a:rPr sz="1600" b="0" i="0">
+                <a:solidFill>
+                  <a:srgbClr val="555555"/>
+                </a:solidFill>
+              </a:rPr>
+              <a:t>    – 改进方向②：用 ResNet / EfficientNet 迁移学习，可轻松超过 99.5%</a:t>
+            </a:r>
+          </a:p>
+        </p:txBody>
+      </p:sp>
+      <p:sp>
+        <p:nvSpPr>
+          <p:cNvPr id="11" name="Rectangle 10"/>
           <p:cNvSpPr/>
           <p:nvPr/>
         </p:nvSpPr>
         <p:spPr>
           <a:xfrm>
-            <a:off x="0" y="6675120"/>
-            <a:ext cx="12188952" cy="73152"/>
+            <a:off x="0" y="6748272"/>
+            <a:ext cx="12188952" cy="109728"/>
           </a:xfrm>
           <a:prstGeom prst="rect">
             <a:avLst/>
           </a:prstGeom>
           <a:solidFill>
-            <a:srgbClr val="1F497D"/>
+            <a:srgbClr val="1A335C"/>
           </a:solidFill>
           <a:ln>
             <a:noFill/>

--- a/reports/exp1_cnn_mnist.pptx
+++ b/reports/exp1_cnn_mnist.pptx
@@ -13,6 +13,8 @@
     <p:sldId id="261" r:id="rId12"/>
     <p:sldId id="262" r:id="rId13"/>
     <p:sldId id="263" r:id="rId14"/>
+    <p:sldId id="264" r:id="rId15"/>
+    <p:sldId id="265" r:id="rId16"/>
   </p:sldIdLst>
   <p:sldSz cx="12188952" cy="6858000" type="screen4x3"/>
   <p:notesSz cx="6858000" cy="9144000"/>
@@ -3148,7 +3150,7 @@
       </p:sp>
       <p:pic>
         <p:nvPicPr>
-          <p:cNvPr id="3" name="Picture 2" descr="ucas_seal.png"/>
+          <p:cNvPr id="3" name="Picture 2" descr="国科大标准Logo横式一（白色）.png"/>
           <p:cNvPicPr>
             <a:picLocks noChangeAspect="1"/>
           </p:cNvPicPr>
@@ -3162,8 +3164,8 @@
         </p:blipFill>
         <p:spPr>
           <a:xfrm>
-            <a:off x="10771632" y="228600"/>
-            <a:ext cx="1188720" cy="1069848"/>
+            <a:off x="8714232" y="256032"/>
+            <a:ext cx="3200400" cy="777240"/>
           </a:xfrm>
           <a:prstGeom prst="rect">
             <a:avLst/>
@@ -3312,6 +3314,399 @@
               </a:rPr>
               <a:t>WevYang　|　中国科学院大学  深度学习</a:t>
             </a:r>
+          </a:p>
+        </p:txBody>
+      </p:sp>
+    </p:spTree>
+  </p:cSld>
+  <p:clrMapOvr>
+    <a:masterClrMapping/>
+  </p:clrMapOvr>
+</p:sld>
+</file>
+
+<file path=ppt/slides/slide10.xml><?xml version="1.0" encoding="utf-8"?>
+<p:sld xmlns:a="http://schemas.openxmlformats.org/drawingml/2006/main" xmlns:p="http://schemas.openxmlformats.org/presentationml/2006/main" xmlns:r="http://schemas.openxmlformats.org/officeDocument/2006/relationships">
+  <p:cSld>
+    <p:bg>
+      <p:bgPr>
+        <a:solidFill>
+          <a:srgbClr val="FFFFFF"/>
+        </a:solidFill>
+        <a:effectLst/>
+      </p:bgPr>
+    </p:bg>
+    <p:spTree>
+      <p:nvGrpSpPr>
+        <p:cNvPr id="1" name=""/>
+        <p:cNvGrpSpPr/>
+        <p:nvPr/>
+      </p:nvGrpSpPr>
+      <p:grpSpPr/>
+      <p:sp>
+        <p:nvSpPr>
+          <p:cNvPr id="2" name="Rectangle 1"/>
+          <p:cNvSpPr/>
+          <p:nvPr/>
+        </p:nvSpPr>
+        <p:spPr>
+          <a:xfrm>
+            <a:off x="0" y="0"/>
+            <a:ext cx="12188952" cy="960120"/>
+          </a:xfrm>
+          <a:prstGeom prst="rect">
+            <a:avLst/>
+          </a:prstGeom>
+          <a:solidFill>
+            <a:srgbClr val="1A335C"/>
+          </a:solidFill>
+          <a:ln>
+            <a:noFill/>
+          </a:ln>
+        </p:spPr>
+        <p:style>
+          <a:lnRef idx="1">
+            <a:schemeClr val="accent1"/>
+          </a:lnRef>
+          <a:fillRef idx="3">
+            <a:schemeClr val="accent1"/>
+          </a:fillRef>
+          <a:effectRef idx="2">
+            <a:schemeClr val="accent1"/>
+          </a:effectRef>
+          <a:fontRef idx="minor">
+            <a:schemeClr val="lt1"/>
+          </a:fontRef>
+        </p:style>
+        <p:txBody>
+          <a:bodyPr rtlCol="0" anchor="ctr"/>
+          <a:lstStyle/>
+          <a:p>
+            <a:pPr algn="ctr"/>
+          </a:p>
+        </p:txBody>
+      </p:sp>
+      <p:sp>
+        <p:nvSpPr>
+          <p:cNvPr id="3" name="Rectangle 2"/>
+          <p:cNvSpPr/>
+          <p:nvPr/>
+        </p:nvSpPr>
+        <p:spPr>
+          <a:xfrm>
+            <a:off x="0" y="0"/>
+            <a:ext cx="164592" cy="6858000"/>
+          </a:xfrm>
+          <a:prstGeom prst="rect">
+            <a:avLst/>
+          </a:prstGeom>
+          <a:solidFill>
+            <a:srgbClr val="1A335C"/>
+          </a:solidFill>
+          <a:ln>
+            <a:noFill/>
+          </a:ln>
+        </p:spPr>
+        <p:style>
+          <a:lnRef idx="1">
+            <a:schemeClr val="accent1"/>
+          </a:lnRef>
+          <a:fillRef idx="3">
+            <a:schemeClr val="accent1"/>
+          </a:fillRef>
+          <a:effectRef idx="2">
+            <a:schemeClr val="accent1"/>
+          </a:effectRef>
+          <a:fontRef idx="minor">
+            <a:schemeClr val="lt1"/>
+          </a:fontRef>
+        </p:style>
+        <p:txBody>
+          <a:bodyPr rtlCol="0" anchor="ctr"/>
+          <a:lstStyle/>
+          <a:p>
+            <a:pPr algn="ctr"/>
+          </a:p>
+        </p:txBody>
+      </p:sp>
+      <p:sp>
+        <p:nvSpPr>
+          <p:cNvPr id="4" name="TextBox 3"/>
+          <p:cNvSpPr txBox="1"/>
+          <p:nvPr/>
+        </p:nvSpPr>
+        <p:spPr>
+          <a:xfrm>
+            <a:off x="347472" y="91440"/>
+            <a:ext cx="11521440" cy="777240"/>
+          </a:xfrm>
+          <a:prstGeom prst="rect">
+            <a:avLst/>
+          </a:prstGeom>
+          <a:noFill/>
+        </p:spPr>
+        <p:txBody>
+          <a:bodyPr wrap="square">
+            <a:spAutoFit/>
+          </a:bodyPr>
+          <a:lstStyle/>
+          <a:p>
+            <a:pPr algn="l"/>
+            <a:r>
+              <a:rPr sz="2300" b="1" i="0">
+                <a:solidFill>
+                  <a:srgbClr val="FFFFFF"/>
+                </a:solidFill>
+              </a:rPr>
+              <a:t>总结与展望</a:t>
+            </a:r>
+          </a:p>
+        </p:txBody>
+      </p:sp>
+      <p:sp>
+        <p:nvSpPr>
+          <p:cNvPr id="5" name="TextBox 4"/>
+          <p:cNvSpPr txBox="1"/>
+          <p:nvPr/>
+        </p:nvSpPr>
+        <p:spPr>
+          <a:xfrm>
+            <a:off x="411480" y="1115568"/>
+            <a:ext cx="11247120" cy="475488"/>
+          </a:xfrm>
+          <a:prstGeom prst="rect">
+            <a:avLst/>
+          </a:prstGeom>
+          <a:noFill/>
+        </p:spPr>
+        <p:txBody>
+          <a:bodyPr wrap="square">
+            <a:spAutoFit/>
+          </a:bodyPr>
+          <a:lstStyle/>
+          <a:p>
+            <a:pPr algn="l"/>
+            <a:r>
+              <a:rPr sz="1700" b="0" i="0">
+                <a:solidFill>
+                  <a:srgbClr val="1C1C1C"/>
+                </a:solidFill>
+              </a:rPr>
+              <a:t>▸ 在 LeNet 基础上引入 BatchNorm 和 Dropout，最终测试准确率达 99.23%</a:t>
+            </a:r>
+          </a:p>
+        </p:txBody>
+      </p:sp>
+      <p:sp>
+        <p:nvSpPr>
+          <p:cNvPr id="6" name="TextBox 5"/>
+          <p:cNvSpPr txBox="1"/>
+          <p:nvPr/>
+        </p:nvSpPr>
+        <p:spPr>
+          <a:xfrm>
+            <a:off x="411480" y="1591056"/>
+            <a:ext cx="11247120" cy="475488"/>
+          </a:xfrm>
+          <a:prstGeom prst="rect">
+            <a:avLst/>
+          </a:prstGeom>
+          <a:noFill/>
+        </p:spPr>
+        <p:txBody>
+          <a:bodyPr wrap="square">
+            <a:spAutoFit/>
+          </a:bodyPr>
+          <a:lstStyle/>
+          <a:p>
+            <a:pPr algn="l"/>
+            <a:r>
+              <a:rPr sz="1700" b="0" i="0">
+                <a:solidFill>
+                  <a:srgbClr val="1C1C1C"/>
+                </a:solidFill>
+              </a:rPr>
+              <a:t>▸ BatchNorm 加速收敛且提升泛化，是现代 CNN 的标准组件</a:t>
+            </a:r>
+          </a:p>
+        </p:txBody>
+      </p:sp>
+      <p:sp>
+        <p:nvSpPr>
+          <p:cNvPr id="7" name="TextBox 6"/>
+          <p:cNvSpPr txBox="1"/>
+          <p:nvPr/>
+        </p:nvSpPr>
+        <p:spPr>
+          <a:xfrm>
+            <a:off x="411480" y="2066543"/>
+            <a:ext cx="11247120" cy="475488"/>
+          </a:xfrm>
+          <a:prstGeom prst="rect">
+            <a:avLst/>
+          </a:prstGeom>
+          <a:noFill/>
+        </p:spPr>
+        <p:txBody>
+          <a:bodyPr wrap="square">
+            <a:spAutoFit/>
+          </a:bodyPr>
+          <a:lstStyle/>
+          <a:p>
+            <a:pPr algn="l"/>
+            <a:r>
+              <a:rPr sz="1700" b="0" i="0">
+                <a:solidFill>
+                  <a:srgbClr val="1C1C1C"/>
+                </a:solidFill>
+              </a:rPr>
+              <a:t>▸ AdamW + AMP 组合使训练高效完成，3 个 epoch 即收敛</a:t>
+            </a:r>
+          </a:p>
+        </p:txBody>
+      </p:sp>
+      <p:sp>
+        <p:nvSpPr>
+          <p:cNvPr id="8" name="TextBox 7"/>
+          <p:cNvSpPr txBox="1"/>
+          <p:nvPr/>
+        </p:nvSpPr>
+        <p:spPr>
+          <a:xfrm>
+            <a:off x="411480" y="2542032"/>
+            <a:ext cx="11247120" cy="475488"/>
+          </a:xfrm>
+          <a:prstGeom prst="rect">
+            <a:avLst/>
+          </a:prstGeom>
+          <a:noFill/>
+        </p:spPr>
+        <p:txBody>
+          <a:bodyPr wrap="square">
+            <a:spAutoFit/>
+          </a:bodyPr>
+          <a:lstStyle/>
+          <a:p>
+            <a:pPr algn="l"/>
+            <a:r>
+              <a:rPr sz="1700" b="0" i="0">
+                <a:solidFill>
+                  <a:srgbClr val="1C1C1C"/>
+                </a:solidFill>
+              </a:rPr>
+              <a:t>▸ 不足：MNIST 难度偏低，测试准确率上限明显，模型在真实噪声下鲁棒性未验证</a:t>
+            </a:r>
+          </a:p>
+        </p:txBody>
+      </p:sp>
+      <p:sp>
+        <p:nvSpPr>
+          <p:cNvPr id="9" name="TextBox 8"/>
+          <p:cNvSpPr txBox="1"/>
+          <p:nvPr/>
+        </p:nvSpPr>
+        <p:spPr>
+          <a:xfrm>
+            <a:off x="411480" y="3017520"/>
+            <a:ext cx="11247120" cy="475488"/>
+          </a:xfrm>
+          <a:prstGeom prst="rect">
+            <a:avLst/>
+          </a:prstGeom>
+          <a:noFill/>
+        </p:spPr>
+        <p:txBody>
+          <a:bodyPr wrap="square">
+            <a:spAutoFit/>
+          </a:bodyPr>
+          <a:lstStyle/>
+          <a:p>
+            <a:pPr algn="l"/>
+            <a:r>
+              <a:rPr sz="1600" b="0" i="0">
+                <a:solidFill>
+                  <a:srgbClr val="555555"/>
+                </a:solidFill>
+              </a:rPr>
+              <a:t>    – 改进方向①：加入数据增强（随机旋转、仿射变换），提升噪声鲁棒性</a:t>
+            </a:r>
+          </a:p>
+        </p:txBody>
+      </p:sp>
+      <p:sp>
+        <p:nvSpPr>
+          <p:cNvPr id="10" name="TextBox 9"/>
+          <p:cNvSpPr txBox="1"/>
+          <p:nvPr/>
+        </p:nvSpPr>
+        <p:spPr>
+          <a:xfrm>
+            <a:off x="411480" y="3493008"/>
+            <a:ext cx="11247120" cy="475488"/>
+          </a:xfrm>
+          <a:prstGeom prst="rect">
+            <a:avLst/>
+          </a:prstGeom>
+          <a:noFill/>
+        </p:spPr>
+        <p:txBody>
+          <a:bodyPr wrap="square">
+            <a:spAutoFit/>
+          </a:bodyPr>
+          <a:lstStyle/>
+          <a:p>
+            <a:pPr algn="l"/>
+            <a:r>
+              <a:rPr sz="1600" b="0" i="0">
+                <a:solidFill>
+                  <a:srgbClr val="555555"/>
+                </a:solidFill>
+              </a:rPr>
+              <a:t>    – 改进方向②：迁移 ResNet / EfficientNet 预训练权重，可超过 99.5%</a:t>
+            </a:r>
+          </a:p>
+        </p:txBody>
+      </p:sp>
+      <p:sp>
+        <p:nvSpPr>
+          <p:cNvPr id="11" name="Rectangle 10"/>
+          <p:cNvSpPr/>
+          <p:nvPr/>
+        </p:nvSpPr>
+        <p:spPr>
+          <a:xfrm>
+            <a:off x="0" y="6748272"/>
+            <a:ext cx="12188952" cy="109728"/>
+          </a:xfrm>
+          <a:prstGeom prst="rect">
+            <a:avLst/>
+          </a:prstGeom>
+          <a:solidFill>
+            <a:srgbClr val="1A335C"/>
+          </a:solidFill>
+          <a:ln>
+            <a:noFill/>
+          </a:ln>
+        </p:spPr>
+        <p:style>
+          <a:lnRef idx="1">
+            <a:schemeClr val="accent1"/>
+          </a:lnRef>
+          <a:fillRef idx="3">
+            <a:schemeClr val="accent1"/>
+          </a:fillRef>
+          <a:effectRef idx="2">
+            <a:schemeClr val="accent1"/>
+          </a:effectRef>
+          <a:fontRef idx="minor">
+            <a:schemeClr val="lt1"/>
+          </a:fontRef>
+        </p:style>
+        <p:txBody>
+          <a:bodyPr rtlCol="0" anchor="ctr"/>
+          <a:lstStyle/>
+          <a:p>
+            <a:pPr algn="ctr"/>
           </a:p>
         </p:txBody>
       </p:sp>
@@ -3985,7 +4380,7 @@
                   <a:srgbClr val="1C1C1C"/>
                 </a:solidFill>
               </a:rPr>
-              <a:t>▸ 本实验切出 10% 训练样本（6,000 张）作为验证集</a:t>
+              <a:t>▸ 本实验切出 10% 训练样本（6,000 张）作为验证集，其余 54,000 张用于训练</a:t>
             </a:r>
           </a:p>
         </p:txBody>
@@ -4019,7 +4414,7 @@
                   <a:srgbClr val="1C1C1C"/>
                 </a:solidFill>
               </a:rPr>
-              <a:t>▸ 数据预处理：Normalize(mean=0.1307, std=0.3081)，对齐像素分布</a:t>
+              <a:t>▸ 数据预处理：Normalize(mean=0.1307, std=0.3081)，对齐全局像素分布</a:t>
             </a:r>
           </a:p>
         </p:txBody>
@@ -4053,7 +4448,7 @@
                   <a:srgbClr val="555555"/>
                 </a:solidFill>
               </a:rPr>
-              <a:t>    – 数据增强：训练时不做额外增强（MNIST 本身难度较低，无需增强）</a:t>
+              <a:t>    – 数据增强：训练时不做额外增强（MNIST 本身难度较低，归一化已足够）</a:t>
             </a:r>
           </a:p>
         </p:txBody>
@@ -4387,7 +4782,7 @@
                   <a:srgbClr val="1C1C1C"/>
                 </a:solidFill>
               </a:rPr>
-              <a:t>▸ BatchNorm2d(32)  ← 加速收敛</a:t>
+              <a:t>▸ BatchNorm2d(32)  ← 加速收敛，稳定训练</a:t>
             </a:r>
           </a:p>
         </p:txBody>
@@ -4770,7 +5165,7 @@
                   <a:srgbClr val="1C1C1C"/>
                 </a:solidFill>
               </a:rPr>
-              <a:t>▸ Dropout(0.3)</a:t>
+              <a:t>▸ Dropout(0.3)  防止全连接层过拟合</a:t>
             </a:r>
           </a:p>
         </p:txBody>
@@ -4993,7 +5388,7 @@
                   <a:srgbClr val="FFFFFF"/>
                 </a:solidFill>
               </a:rPr>
-              <a:t>解决方案：损失函数与优化器设计</a:t>
+              <a:t>解决方案：损失函数与优化器</a:t>
             </a:r>
           </a:p>
         </p:txBody>
@@ -5061,7 +5456,7 @@
                   <a:srgbClr val="555555"/>
                 </a:solidFill>
               </a:rPr>
-              <a:t>    – 内部等价于 Softmax + NLLLoss，数值稳定性好</a:t>
+              <a:t>    – 内部等价于 Softmax + NLLLoss，数值稳定性优于手动实现</a:t>
             </a:r>
           </a:p>
         </p:txBody>
@@ -5129,7 +5524,7 @@
                   <a:srgbClr val="555555"/>
                 </a:solidFill>
               </a:rPr>
-              <a:t>    – 相比 Adam 额外对权重本身施加 L2 正则，减少过拟合风险</a:t>
+              <a:t>    – 相比 Adam 将 L2 正则直接作用于权重本身（解耦），效果更好</a:t>
             </a:r>
           </a:p>
         </p:txBody>
@@ -5163,7 +5558,7 @@
                   <a:srgbClr val="1C1C1C"/>
                 </a:solidFill>
               </a:rPr>
-              <a:t>▸ 学习率策略：固定学习率，5 个 epoch 足以收敛</a:t>
+              <a:t>▸ 学习率策略：固定学习率，5 个 epoch 足以充分收敛</a:t>
             </a:r>
           </a:p>
         </p:txBody>
@@ -5197,7 +5592,7 @@
                   <a:srgbClr val="1C1C1C"/>
                 </a:solidFill>
               </a:rPr>
-              <a:t>▸ 混合精度（AMP）：fp16 前向传播，fp32 梯度更新，T4 训练加速约 1.5×</a:t>
+              <a:t>▸ 混合精度（AMP）：fp16 前向 + fp32 梯度更新，Tesla T4 训练加速约 1.5×</a:t>
             </a:r>
           </a:p>
         </p:txBody>
@@ -5231,7 +5626,7 @@
                   <a:srgbClr val="1C1C1C"/>
                 </a:solidFill>
               </a:rPr>
-              <a:t>▸ Batch Size：128；每 epoch 保存验证集最优 checkpoint</a:t>
+              <a:t>▸ Batch Size：128；每 epoch 结束后对验证集评估，保存最优 checkpoint</a:t>
             </a:r>
           </a:p>
         </p:txBody>
@@ -5501,11 +5896,9 @@
     def __init__(self):
         super().__init__()
         self.features = nn.Sequential(
-            # 第一卷积块
             nn.Conv2d(1, 32, 3, padding=1), nn.BatchNorm2d(32), nn.ReLU(),
             nn.Conv2d(32, 32, 3, padding=1), nn.BatchNorm2d(32), nn.ReLU(),
             nn.MaxPool2d(2), nn.Dropout2d(0.1),
-            # 第二卷积块
             nn.Conv2d(32, 64, 3, padding=1), nn.BatchNorm2d(64), nn.ReLU(),
             nn.Conv2d(64, 64, 3, padding=1), nn.BatchNorm2d(64), nn.ReLU(),
             nn.MaxPool2d(2), nn.Dropout2d(0.2),
@@ -5513,7 +5906,7 @@
         self.classifier = nn.Sequential(
             nn.Flatten(),
             nn.Linear(64*7*7, 256), nn.ReLU(), nn.Dropout(0.3),
-            nn.Linear(256, 10),          # 输出 10 个类别的 logit
+            nn.Linear(256, 10),
         )
     def forward(self, x):
         return self.classifier(self.features(x))</a:t>
@@ -5550,7 +5943,7 @@
                   <a:srgbClr val="555555"/>
                 </a:solidFill>
               </a:rPr>
-              <a:t>BatchNorm 放在 ReLU 前（BN-ReLU 顺序），实践中更稳定。</a:t>
+              <a:t>BN-ReLU 顺序（先归一化再激活）在实践中比 ReLU-BN 更稳定。</a:t>
             </a:r>
           </a:p>
         </p:txBody>
@@ -5739,7 +6132,7 @@
                   <a:srgbClr val="FFFFFF"/>
                 </a:solidFill>
               </a:rPr>
-              <a:t>实验结果与分析</a:t>
+              <a:t>核心代码：训练循环（支持 AMP）</a:t>
             </a:r>
           </a:p>
         </p:txBody>
@@ -5752,14 +6145,14 @@
         </p:nvSpPr>
         <p:spPr>
           <a:xfrm>
-            <a:off x="365760" y="1097280"/>
-            <a:ext cx="3681983" cy="1920240"/>
+            <a:off x="347472" y="1051560"/>
+            <a:ext cx="11475720" cy="4206240"/>
           </a:xfrm>
           <a:prstGeom prst="rect">
             <a:avLst/>
           </a:prstGeom>
           <a:solidFill>
-            <a:srgbClr val="E8F0F8"/>
+            <a:srgbClr val="1E1E2E"/>
           </a:solidFill>
           <a:ln>
             <a:noFill/>
@@ -5789,57 +6182,14 @@
       </p:sp>
       <p:sp>
         <p:nvSpPr>
-          <p:cNvPr id="6" name="Rectangle 5"/>
-          <p:cNvSpPr/>
-          <p:nvPr/>
-        </p:nvSpPr>
-        <p:spPr>
-          <a:xfrm>
-            <a:off x="365760" y="1097280"/>
-            <a:ext cx="3681983" cy="73152"/>
-          </a:xfrm>
-          <a:prstGeom prst="rect">
-            <a:avLst/>
-          </a:prstGeom>
-          <a:solidFill>
-            <a:srgbClr val="1A335C"/>
-          </a:solidFill>
-          <a:ln>
-            <a:noFill/>
-          </a:ln>
-        </p:spPr>
-        <p:style>
-          <a:lnRef idx="1">
-            <a:schemeClr val="accent1"/>
-          </a:lnRef>
-          <a:fillRef idx="3">
-            <a:schemeClr val="accent1"/>
-          </a:fillRef>
-          <a:effectRef idx="2">
-            <a:schemeClr val="accent1"/>
-          </a:effectRef>
-          <a:fontRef idx="minor">
-            <a:schemeClr val="lt1"/>
-          </a:fontRef>
-        </p:style>
-        <p:txBody>
-          <a:bodyPr rtlCol="0" anchor="ctr"/>
-          <a:lstStyle/>
-          <a:p>
-            <a:pPr algn="ctr"/>
-          </a:p>
-        </p:txBody>
-      </p:sp>
-      <p:sp>
-        <p:nvSpPr>
-          <p:cNvPr id="7" name="TextBox 6"/>
+          <p:cNvPr id="6" name="TextBox 5"/>
           <p:cNvSpPr txBox="1"/>
           <p:nvPr/>
         </p:nvSpPr>
         <p:spPr>
           <a:xfrm>
-            <a:off x="365760" y="1234440"/>
-            <a:ext cx="3681983" cy="914400"/>
+            <a:off x="475488" y="1115568"/>
+            <a:ext cx="11201400" cy="4114800"/>
           </a:xfrm>
           <a:prstGeom prst="rect">
             <a:avLst/>
@@ -5852,28 +6202,43 @@
           </a:bodyPr>
           <a:lstStyle/>
           <a:p>
-            <a:pPr algn="ctr"/>
-            <a:r>
-              <a:rPr sz="3000" b="1" i="0">
-                <a:solidFill>
-                  <a:srgbClr val="1A7A3C"/>
+            <a:pPr algn="l"/>
+            <a:r>
+              <a:rPr sz="1200" b="0" i="0">
+                <a:solidFill>
+                  <a:srgbClr val="CBD3E3"/>
                 </a:solidFill>
               </a:rPr>
-              <a:t>99.23%</a:t>
-            </a:r>
-          </a:p>
-        </p:txBody>
-      </p:sp>
-      <p:sp>
-        <p:nvSpPr>
-          <p:cNvPr id="8" name="TextBox 7"/>
+              <a:t>scaler = torch.cuda.amp.GradScaler()  # fp16 防梯度下溢
+for epoch in range(1, epochs + 1):
+    model.train()
+    for images, targets in train_loader:
+        images, targets = images.to(device), targets.to(device)
+        optimizer.zero_grad(set_to_none=True)
+        with torch.cuda.amp.autocast():       # fp16 前向
+            logits = model(images)
+            loss   = loss_fn(logits, targets)
+        scaler.scale(loss).backward()          # 放大梯度
+        scaler.step(optimizer)                 # 还原梯度后更新
+        scaler.update()                        # 调整缩放系数
+    val_loss, val_acc = evaluate(model, val_loader, device)
+    if val_acc &gt;= best_val_acc:
+        best_val_acc = val_acc
+        torch.save(model.state_dict(), best_path)</a:t>
+            </a:r>
+          </a:p>
+        </p:txBody>
+      </p:sp>
+      <p:sp>
+        <p:nvSpPr>
+          <p:cNvPr id="7" name="TextBox 6"/>
           <p:cNvSpPr txBox="1"/>
           <p:nvPr/>
         </p:nvSpPr>
         <p:spPr>
           <a:xfrm>
-            <a:off x="365760" y="2194560"/>
-            <a:ext cx="3681983" cy="457200"/>
+            <a:off x="411480" y="5349240"/>
+            <a:ext cx="11247120" cy="731520"/>
           </a:xfrm>
           <a:prstGeom prst="rect">
             <a:avLst/>
@@ -5886,499 +6251,21 @@
           </a:bodyPr>
           <a:lstStyle/>
           <a:p>
-            <a:pPr algn="ctr"/>
-            <a:r>
-              <a:rPr sz="1300" b="0" i="0">
-                <a:solidFill>
-                  <a:srgbClr val="1C1C1C"/>
+            <a:pPr algn="l"/>
+            <a:r>
+              <a:rPr sz="1400" b="0" i="1">
+                <a:solidFill>
+                  <a:srgbClr val="555555"/>
                 </a:solidFill>
               </a:rPr>
-              <a:t>测试准确率</a:t>
-            </a:r>
-          </a:p>
-        </p:txBody>
-      </p:sp>
-      <p:sp>
-        <p:nvSpPr>
-          <p:cNvPr id="9" name="TextBox 8"/>
-          <p:cNvSpPr txBox="1"/>
-          <p:nvPr/>
-        </p:nvSpPr>
-        <p:spPr>
-          <a:xfrm>
-            <a:off x="365760" y="2633472"/>
-            <a:ext cx="3681983" cy="320040"/>
-          </a:xfrm>
-          <a:prstGeom prst="rect">
-            <a:avLst/>
-          </a:prstGeom>
-          <a:noFill/>
-        </p:spPr>
-        <p:txBody>
-          <a:bodyPr wrap="square">
-            <a:spAutoFit/>
-          </a:bodyPr>
-          <a:lstStyle/>
-          <a:p>
-            <a:pPr algn="ctr"/>
-            <a:r>
-              <a:rPr sz="1100" b="0" i="1">
-                <a:solidFill>
-                  <a:srgbClr val="555555"/>
-                </a:solidFill>
-              </a:rPr>
-              <a:t>✅ 超过 ≥98%</a:t>
-            </a:r>
-          </a:p>
-        </p:txBody>
-      </p:sp>
-      <p:sp>
-        <p:nvSpPr>
-          <p:cNvPr id="10" name="Rectangle 9"/>
-          <p:cNvSpPr/>
-          <p:nvPr/>
-        </p:nvSpPr>
-        <p:spPr>
-          <a:xfrm>
-            <a:off x="4184904" y="1097280"/>
-            <a:ext cx="3681983" cy="1920240"/>
-          </a:xfrm>
-          <a:prstGeom prst="rect">
-            <a:avLst/>
-          </a:prstGeom>
-          <a:solidFill>
-            <a:srgbClr val="E8F0F8"/>
-          </a:solidFill>
-          <a:ln>
-            <a:noFill/>
-          </a:ln>
-        </p:spPr>
-        <p:style>
-          <a:lnRef idx="1">
-            <a:schemeClr val="accent1"/>
-          </a:lnRef>
-          <a:fillRef idx="3">
-            <a:schemeClr val="accent1"/>
-          </a:fillRef>
-          <a:effectRef idx="2">
-            <a:schemeClr val="accent1"/>
-          </a:effectRef>
-          <a:fontRef idx="minor">
-            <a:schemeClr val="lt1"/>
-          </a:fontRef>
-        </p:style>
-        <p:txBody>
-          <a:bodyPr rtlCol="0" anchor="ctr"/>
-          <a:lstStyle/>
-          <a:p>
-            <a:pPr algn="ctr"/>
-          </a:p>
-        </p:txBody>
-      </p:sp>
-      <p:sp>
-        <p:nvSpPr>
-          <p:cNvPr id="11" name="Rectangle 10"/>
-          <p:cNvSpPr/>
-          <p:nvPr/>
-        </p:nvSpPr>
-        <p:spPr>
-          <a:xfrm>
-            <a:off x="4184904" y="1097280"/>
-            <a:ext cx="3681983" cy="73152"/>
-          </a:xfrm>
-          <a:prstGeom prst="rect">
-            <a:avLst/>
-          </a:prstGeom>
-          <a:solidFill>
-            <a:srgbClr val="1A335C"/>
-          </a:solidFill>
-          <a:ln>
-            <a:noFill/>
-          </a:ln>
-        </p:spPr>
-        <p:style>
-          <a:lnRef idx="1">
-            <a:schemeClr val="accent1"/>
-          </a:lnRef>
-          <a:fillRef idx="3">
-            <a:schemeClr val="accent1"/>
-          </a:fillRef>
-          <a:effectRef idx="2">
-            <a:schemeClr val="accent1"/>
-          </a:effectRef>
-          <a:fontRef idx="minor">
-            <a:schemeClr val="lt1"/>
-          </a:fontRef>
-        </p:style>
-        <p:txBody>
-          <a:bodyPr rtlCol="0" anchor="ctr"/>
-          <a:lstStyle/>
-          <a:p>
-            <a:pPr algn="ctr"/>
-          </a:p>
-        </p:txBody>
-      </p:sp>
-      <p:sp>
-        <p:nvSpPr>
-          <p:cNvPr id="12" name="TextBox 11"/>
-          <p:cNvSpPr txBox="1"/>
-          <p:nvPr/>
-        </p:nvSpPr>
-        <p:spPr>
-          <a:xfrm>
-            <a:off x="4184904" y="1234440"/>
-            <a:ext cx="3681983" cy="914400"/>
-          </a:xfrm>
-          <a:prstGeom prst="rect">
-            <a:avLst/>
-          </a:prstGeom>
-          <a:noFill/>
-        </p:spPr>
-        <p:txBody>
-          <a:bodyPr wrap="square">
-            <a:spAutoFit/>
-          </a:bodyPr>
-          <a:lstStyle/>
-          <a:p>
-            <a:pPr algn="ctr"/>
-            <a:r>
-              <a:rPr sz="3000" b="1" i="0">
-                <a:solidFill>
-                  <a:srgbClr val="1A7A3C"/>
-                </a:solidFill>
-              </a:rPr>
-              <a:t>0.0212</a:t>
-            </a:r>
-          </a:p>
-        </p:txBody>
-      </p:sp>
-      <p:sp>
-        <p:nvSpPr>
-          <p:cNvPr id="13" name="TextBox 12"/>
-          <p:cNvSpPr txBox="1"/>
-          <p:nvPr/>
-        </p:nvSpPr>
-        <p:spPr>
-          <a:xfrm>
-            <a:off x="4184904" y="2194560"/>
-            <a:ext cx="3681983" cy="457200"/>
-          </a:xfrm>
-          <a:prstGeom prst="rect">
-            <a:avLst/>
-          </a:prstGeom>
-          <a:noFill/>
-        </p:spPr>
-        <p:txBody>
-          <a:bodyPr wrap="square">
-            <a:spAutoFit/>
-          </a:bodyPr>
-          <a:lstStyle/>
-          <a:p>
-            <a:pPr algn="ctr"/>
-            <a:r>
-              <a:rPr sz="1300" b="0" i="0">
-                <a:solidFill>
-                  <a:srgbClr val="1C1C1C"/>
-                </a:solidFill>
-              </a:rPr>
-              <a:t>测试损失</a:t>
-            </a:r>
-          </a:p>
-        </p:txBody>
-      </p:sp>
-      <p:sp>
-        <p:nvSpPr>
-          <p:cNvPr id="14" name="Rectangle 13"/>
-          <p:cNvSpPr/>
-          <p:nvPr/>
-        </p:nvSpPr>
-        <p:spPr>
-          <a:xfrm>
-            <a:off x="8004048" y="1097280"/>
-            <a:ext cx="3681983" cy="1920240"/>
-          </a:xfrm>
-          <a:prstGeom prst="rect">
-            <a:avLst/>
-          </a:prstGeom>
-          <a:solidFill>
-            <a:srgbClr val="E8F0F8"/>
-          </a:solidFill>
-          <a:ln>
-            <a:noFill/>
-          </a:ln>
-        </p:spPr>
-        <p:style>
-          <a:lnRef idx="1">
-            <a:schemeClr val="accent1"/>
-          </a:lnRef>
-          <a:fillRef idx="3">
-            <a:schemeClr val="accent1"/>
-          </a:fillRef>
-          <a:effectRef idx="2">
-            <a:schemeClr val="accent1"/>
-          </a:effectRef>
-          <a:fontRef idx="minor">
-            <a:schemeClr val="lt1"/>
-          </a:fontRef>
-        </p:style>
-        <p:txBody>
-          <a:bodyPr rtlCol="0" anchor="ctr"/>
-          <a:lstStyle/>
-          <a:p>
-            <a:pPr algn="ctr"/>
-          </a:p>
-        </p:txBody>
-      </p:sp>
-      <p:sp>
-        <p:nvSpPr>
-          <p:cNvPr id="15" name="Rectangle 14"/>
-          <p:cNvSpPr/>
-          <p:nvPr/>
-        </p:nvSpPr>
-        <p:spPr>
-          <a:xfrm>
-            <a:off x="8004048" y="1097280"/>
-            <a:ext cx="3681983" cy="73152"/>
-          </a:xfrm>
-          <a:prstGeom prst="rect">
-            <a:avLst/>
-          </a:prstGeom>
-          <a:solidFill>
-            <a:srgbClr val="1A335C"/>
-          </a:solidFill>
-          <a:ln>
-            <a:noFill/>
-          </a:ln>
-        </p:spPr>
-        <p:style>
-          <a:lnRef idx="1">
-            <a:schemeClr val="accent1"/>
-          </a:lnRef>
-          <a:fillRef idx="3">
-            <a:schemeClr val="accent1"/>
-          </a:fillRef>
-          <a:effectRef idx="2">
-            <a:schemeClr val="accent1"/>
-          </a:effectRef>
-          <a:fontRef idx="minor">
-            <a:schemeClr val="lt1"/>
-          </a:fontRef>
-        </p:style>
-        <p:txBody>
-          <a:bodyPr rtlCol="0" anchor="ctr"/>
-          <a:lstStyle/>
-          <a:p>
-            <a:pPr algn="ctr"/>
-          </a:p>
-        </p:txBody>
-      </p:sp>
-      <p:sp>
-        <p:nvSpPr>
-          <p:cNvPr id="16" name="TextBox 15"/>
-          <p:cNvSpPr txBox="1"/>
-          <p:nvPr/>
-        </p:nvSpPr>
-        <p:spPr>
-          <a:xfrm>
-            <a:off x="8004048" y="1234440"/>
-            <a:ext cx="3681983" cy="914400"/>
-          </a:xfrm>
-          <a:prstGeom prst="rect">
-            <a:avLst/>
-          </a:prstGeom>
-          <a:noFill/>
-        </p:spPr>
-        <p:txBody>
-          <a:bodyPr wrap="square">
-            <a:spAutoFit/>
-          </a:bodyPr>
-          <a:lstStyle/>
-          <a:p>
-            <a:pPr algn="ctr"/>
-            <a:r>
-              <a:rPr sz="3000" b="1" i="0">
-                <a:solidFill>
-                  <a:srgbClr val="1A7A3C"/>
-                </a:solidFill>
-              </a:rPr>
-              <a:t>3 / 5</a:t>
-            </a:r>
-          </a:p>
-        </p:txBody>
-      </p:sp>
-      <p:sp>
-        <p:nvSpPr>
-          <p:cNvPr id="17" name="TextBox 16"/>
-          <p:cNvSpPr txBox="1"/>
-          <p:nvPr/>
-        </p:nvSpPr>
-        <p:spPr>
-          <a:xfrm>
-            <a:off x="8004048" y="2194560"/>
-            <a:ext cx="3681983" cy="457200"/>
-          </a:xfrm>
-          <a:prstGeom prst="rect">
-            <a:avLst/>
-          </a:prstGeom>
-          <a:noFill/>
-        </p:spPr>
-        <p:txBody>
-          <a:bodyPr wrap="square">
-            <a:spAutoFit/>
-          </a:bodyPr>
-          <a:lstStyle/>
-          <a:p>
-            <a:pPr algn="ctr"/>
-            <a:r>
-              <a:rPr sz="1300" b="0" i="0">
-                <a:solidFill>
-                  <a:srgbClr val="1C1C1C"/>
-                </a:solidFill>
-              </a:rPr>
-              <a:t>最优 epoch</a:t>
-            </a:r>
-          </a:p>
-        </p:txBody>
-      </p:sp>
-      <p:sp>
-        <p:nvSpPr>
-          <p:cNvPr id="18" name="TextBox 17"/>
-          <p:cNvSpPr txBox="1"/>
-          <p:nvPr/>
-        </p:nvSpPr>
-        <p:spPr>
-          <a:xfrm>
-            <a:off x="411480" y="3154680"/>
-            <a:ext cx="11247120" cy="475488"/>
-          </a:xfrm>
-          <a:prstGeom prst="rect">
-            <a:avLst/>
-          </a:prstGeom>
-          <a:noFill/>
-        </p:spPr>
-        <p:txBody>
-          <a:bodyPr wrap="square">
-            <a:spAutoFit/>
-          </a:bodyPr>
-          <a:lstStyle/>
-          <a:p>
-            <a:pPr algn="l"/>
-            <a:r>
-              <a:rPr sz="1600" b="0" i="0">
-                <a:solidFill>
-                  <a:srgbClr val="1C1C1C"/>
-                </a:solidFill>
-              </a:rPr>
-              <a:t>▸ 3 个 epoch 即达到最优，BatchNorm 对收敛速度提升显著</a:t>
-            </a:r>
-          </a:p>
-        </p:txBody>
-      </p:sp>
-      <p:sp>
-        <p:nvSpPr>
-          <p:cNvPr id="19" name="TextBox 18"/>
-          <p:cNvSpPr txBox="1"/>
-          <p:nvPr/>
-        </p:nvSpPr>
-        <p:spPr>
-          <a:xfrm>
-            <a:off x="411480" y="3630168"/>
-            <a:ext cx="11247120" cy="475488"/>
-          </a:xfrm>
-          <a:prstGeom prst="rect">
-            <a:avLst/>
-          </a:prstGeom>
-          <a:noFill/>
-        </p:spPr>
-        <p:txBody>
-          <a:bodyPr wrap="square">
-            <a:spAutoFit/>
-          </a:bodyPr>
-          <a:lstStyle/>
-          <a:p>
-            <a:pPr algn="l"/>
-            <a:r>
-              <a:rPr sz="1600" b="0" i="0">
-                <a:solidFill>
-                  <a:srgbClr val="1C1C1C"/>
-                </a:solidFill>
-              </a:rPr>
-              <a:t>▸ 训练集与验证集准确率差距极小（&lt;0.3%），无过拟合</a:t>
-            </a:r>
-          </a:p>
-        </p:txBody>
-      </p:sp>
-      <p:sp>
-        <p:nvSpPr>
-          <p:cNvPr id="20" name="TextBox 19"/>
-          <p:cNvSpPr txBox="1"/>
-          <p:nvPr/>
-        </p:nvSpPr>
-        <p:spPr>
-          <a:xfrm>
-            <a:off x="411480" y="4105656"/>
-            <a:ext cx="11247120" cy="475488"/>
-          </a:xfrm>
-          <a:prstGeom prst="rect">
-            <a:avLst/>
-          </a:prstGeom>
-          <a:noFill/>
-        </p:spPr>
-        <p:txBody>
-          <a:bodyPr wrap="square">
-            <a:spAutoFit/>
-          </a:bodyPr>
-          <a:lstStyle/>
-          <a:p>
-            <a:pPr algn="l"/>
-            <a:r>
-              <a:rPr sz="1600" b="0" i="0">
-                <a:solidFill>
-                  <a:srgbClr val="1C1C1C"/>
-                </a:solidFill>
-              </a:rPr>
-              <a:t>▸ Dropout 在 MNIST 上效果略微提升，作用不如在更大数据集上明显</a:t>
-            </a:r>
-          </a:p>
-        </p:txBody>
-      </p:sp>
-      <p:sp>
-        <p:nvSpPr>
-          <p:cNvPr id="21" name="TextBox 20"/>
-          <p:cNvSpPr txBox="1"/>
-          <p:nvPr/>
-        </p:nvSpPr>
-        <p:spPr>
-          <a:xfrm>
-            <a:off x="411480" y="4581144"/>
-            <a:ext cx="11247120" cy="475488"/>
-          </a:xfrm>
-          <a:prstGeom prst="rect">
-            <a:avLst/>
-          </a:prstGeom>
-          <a:noFill/>
-        </p:spPr>
-        <p:txBody>
-          <a:bodyPr wrap="square">
-            <a:spAutoFit/>
-          </a:bodyPr>
-          <a:lstStyle/>
-          <a:p>
-            <a:pPr algn="l"/>
-            <a:r>
-              <a:rPr sz="1600" b="0" i="0">
-                <a:solidFill>
-                  <a:srgbClr val="1C1C1C"/>
-                </a:solidFill>
-              </a:rPr>
-              <a:t>▸ 对比：不加 BatchNorm 的 LeNet，相同 epoch 下准确率约 98.5%</a:t>
-            </a:r>
-          </a:p>
-        </p:txBody>
-      </p:sp>
-      <p:sp>
-        <p:nvSpPr>
-          <p:cNvPr id="22" name="Rectangle 21"/>
+              <a:t>GradScaler 解决 fp16 梯度下溢问题；set_to_none=True 比 zero_grad() 节省显存。</a:t>
+            </a:r>
+          </a:p>
+        </p:txBody>
+      </p:sp>
+      <p:sp>
+        <p:nvSpPr>
+          <p:cNvPr id="8" name="Rectangle 7"/>
           <p:cNvSpPr/>
           <p:nvPr/>
         </p:nvSpPr>
@@ -6560,21 +6447,107 @@
                   <a:srgbClr val="FFFFFF"/>
                 </a:solidFill>
               </a:rPr>
-              <a:t>总结与展望</a:t>
-            </a:r>
-          </a:p>
-        </p:txBody>
-      </p:sp>
-      <p:sp>
-        <p:nvSpPr>
-          <p:cNvPr id="5" name="TextBox 4"/>
+              <a:t>实验结果与分析</a:t>
+            </a:r>
+          </a:p>
+        </p:txBody>
+      </p:sp>
+      <p:sp>
+        <p:nvSpPr>
+          <p:cNvPr id="5" name="Rectangle 4"/>
+          <p:cNvSpPr/>
+          <p:nvPr/>
+        </p:nvSpPr>
+        <p:spPr>
+          <a:xfrm>
+            <a:off x="365760" y="1097280"/>
+            <a:ext cx="3681983" cy="1920240"/>
+          </a:xfrm>
+          <a:prstGeom prst="rect">
+            <a:avLst/>
+          </a:prstGeom>
+          <a:solidFill>
+            <a:srgbClr val="E8F0F8"/>
+          </a:solidFill>
+          <a:ln>
+            <a:noFill/>
+          </a:ln>
+        </p:spPr>
+        <p:style>
+          <a:lnRef idx="1">
+            <a:schemeClr val="accent1"/>
+          </a:lnRef>
+          <a:fillRef idx="3">
+            <a:schemeClr val="accent1"/>
+          </a:fillRef>
+          <a:effectRef idx="2">
+            <a:schemeClr val="accent1"/>
+          </a:effectRef>
+          <a:fontRef idx="minor">
+            <a:schemeClr val="lt1"/>
+          </a:fontRef>
+        </p:style>
+        <p:txBody>
+          <a:bodyPr rtlCol="0" anchor="ctr"/>
+          <a:lstStyle/>
+          <a:p>
+            <a:pPr algn="ctr"/>
+          </a:p>
+        </p:txBody>
+      </p:sp>
+      <p:sp>
+        <p:nvSpPr>
+          <p:cNvPr id="6" name="Rectangle 5"/>
+          <p:cNvSpPr/>
+          <p:nvPr/>
+        </p:nvSpPr>
+        <p:spPr>
+          <a:xfrm>
+            <a:off x="365760" y="1097280"/>
+            <a:ext cx="3681983" cy="73152"/>
+          </a:xfrm>
+          <a:prstGeom prst="rect">
+            <a:avLst/>
+          </a:prstGeom>
+          <a:solidFill>
+            <a:srgbClr val="1A335C"/>
+          </a:solidFill>
+          <a:ln>
+            <a:noFill/>
+          </a:ln>
+        </p:spPr>
+        <p:style>
+          <a:lnRef idx="1">
+            <a:schemeClr val="accent1"/>
+          </a:lnRef>
+          <a:fillRef idx="3">
+            <a:schemeClr val="accent1"/>
+          </a:fillRef>
+          <a:effectRef idx="2">
+            <a:schemeClr val="accent1"/>
+          </a:effectRef>
+          <a:fontRef idx="minor">
+            <a:schemeClr val="lt1"/>
+          </a:fontRef>
+        </p:style>
+        <p:txBody>
+          <a:bodyPr rtlCol="0" anchor="ctr"/>
+          <a:lstStyle/>
+          <a:p>
+            <a:pPr algn="ctr"/>
+          </a:p>
+        </p:txBody>
+      </p:sp>
+      <p:sp>
+        <p:nvSpPr>
+          <p:cNvPr id="7" name="TextBox 6"/>
           <p:cNvSpPr txBox="1"/>
           <p:nvPr/>
         </p:nvSpPr>
         <p:spPr>
           <a:xfrm>
-            <a:off x="411480" y="1115568"/>
-            <a:ext cx="11247120" cy="475488"/>
+            <a:off x="365760" y="1234440"/>
+            <a:ext cx="3681983" cy="914400"/>
           </a:xfrm>
           <a:prstGeom prst="rect">
             <a:avLst/>
@@ -6587,28 +6560,28 @@
           </a:bodyPr>
           <a:lstStyle/>
           <a:p>
-            <a:pPr algn="l"/>
-            <a:r>
-              <a:rPr sz="1700" b="0" i="0">
-                <a:solidFill>
-                  <a:srgbClr val="1C1C1C"/>
+            <a:pPr algn="ctr"/>
+            <a:r>
+              <a:rPr sz="3000" b="1" i="0">
+                <a:solidFill>
+                  <a:srgbClr val="1A7A3C"/>
                 </a:solidFill>
               </a:rPr>
-              <a:t>▸ 本实验在 LeNet 基础上引入 BatchNorm 和 Dropout，最终测试准确率达 99.23%</a:t>
-            </a:r>
-          </a:p>
-        </p:txBody>
-      </p:sp>
-      <p:sp>
-        <p:nvSpPr>
-          <p:cNvPr id="6" name="TextBox 5"/>
+              <a:t>99.23%</a:t>
+            </a:r>
+          </a:p>
+        </p:txBody>
+      </p:sp>
+      <p:sp>
+        <p:nvSpPr>
+          <p:cNvPr id="8" name="TextBox 7"/>
           <p:cNvSpPr txBox="1"/>
           <p:nvPr/>
         </p:nvSpPr>
         <p:spPr>
           <a:xfrm>
-            <a:off x="411480" y="1591056"/>
-            <a:ext cx="11247120" cy="475488"/>
+            <a:off x="365760" y="2194560"/>
+            <a:ext cx="3681983" cy="457200"/>
           </a:xfrm>
           <a:prstGeom prst="rect">
             <a:avLst/>
@@ -6621,28 +6594,28 @@
           </a:bodyPr>
           <a:lstStyle/>
           <a:p>
-            <a:pPr algn="l"/>
-            <a:r>
-              <a:rPr sz="1700" b="0" i="0">
+            <a:pPr algn="ctr"/>
+            <a:r>
+              <a:rPr sz="1300" b="0" i="0">
                 <a:solidFill>
                   <a:srgbClr val="1C1C1C"/>
                 </a:solidFill>
               </a:rPr>
-              <a:t>▸ BatchNorm 加速收敛且提升泛化，是现代 CNN 的标配组件</a:t>
-            </a:r>
-          </a:p>
-        </p:txBody>
-      </p:sp>
-      <p:sp>
-        <p:nvSpPr>
-          <p:cNvPr id="7" name="TextBox 6"/>
+              <a:t>测试准确率</a:t>
+            </a:r>
+          </a:p>
+        </p:txBody>
+      </p:sp>
+      <p:sp>
+        <p:nvSpPr>
+          <p:cNvPr id="9" name="TextBox 8"/>
           <p:cNvSpPr txBox="1"/>
           <p:nvPr/>
         </p:nvSpPr>
         <p:spPr>
           <a:xfrm>
-            <a:off x="411480" y="2066543"/>
-            <a:ext cx="11247120" cy="475488"/>
+            <a:off x="365760" y="2633472"/>
+            <a:ext cx="3681983" cy="320040"/>
           </a:xfrm>
           <a:prstGeom prst="rect">
             <a:avLst/>
@@ -6655,28 +6628,114 @@
           </a:bodyPr>
           <a:lstStyle/>
           <a:p>
-            <a:pPr algn="l"/>
-            <a:r>
-              <a:rPr sz="1700" b="0" i="0">
-                <a:solidFill>
-                  <a:srgbClr val="1C1C1C"/>
+            <a:pPr algn="ctr"/>
+            <a:r>
+              <a:rPr sz="1100" b="0" i="1">
+                <a:solidFill>
+                  <a:srgbClr val="555555"/>
                 </a:solidFill>
               </a:rPr>
-              <a:t>▸ AdamW + AMP 的组合使训练在 GPU 上高效完成，3 epoch 即收敛</a:t>
-            </a:r>
-          </a:p>
-        </p:txBody>
-      </p:sp>
-      <p:sp>
-        <p:nvSpPr>
-          <p:cNvPr id="8" name="TextBox 7"/>
+              <a:t>✅ 超过 ≥98%</a:t>
+            </a:r>
+          </a:p>
+        </p:txBody>
+      </p:sp>
+      <p:sp>
+        <p:nvSpPr>
+          <p:cNvPr id="10" name="Rectangle 9"/>
+          <p:cNvSpPr/>
+          <p:nvPr/>
+        </p:nvSpPr>
+        <p:spPr>
+          <a:xfrm>
+            <a:off x="4184904" y="1097280"/>
+            <a:ext cx="3681983" cy="1920240"/>
+          </a:xfrm>
+          <a:prstGeom prst="rect">
+            <a:avLst/>
+          </a:prstGeom>
+          <a:solidFill>
+            <a:srgbClr val="E8F0F8"/>
+          </a:solidFill>
+          <a:ln>
+            <a:noFill/>
+          </a:ln>
+        </p:spPr>
+        <p:style>
+          <a:lnRef idx="1">
+            <a:schemeClr val="accent1"/>
+          </a:lnRef>
+          <a:fillRef idx="3">
+            <a:schemeClr val="accent1"/>
+          </a:fillRef>
+          <a:effectRef idx="2">
+            <a:schemeClr val="accent1"/>
+          </a:effectRef>
+          <a:fontRef idx="minor">
+            <a:schemeClr val="lt1"/>
+          </a:fontRef>
+        </p:style>
+        <p:txBody>
+          <a:bodyPr rtlCol="0" anchor="ctr"/>
+          <a:lstStyle/>
+          <a:p>
+            <a:pPr algn="ctr"/>
+          </a:p>
+        </p:txBody>
+      </p:sp>
+      <p:sp>
+        <p:nvSpPr>
+          <p:cNvPr id="11" name="Rectangle 10"/>
+          <p:cNvSpPr/>
+          <p:nvPr/>
+        </p:nvSpPr>
+        <p:spPr>
+          <a:xfrm>
+            <a:off x="4184904" y="1097280"/>
+            <a:ext cx="3681983" cy="73152"/>
+          </a:xfrm>
+          <a:prstGeom prst="rect">
+            <a:avLst/>
+          </a:prstGeom>
+          <a:solidFill>
+            <a:srgbClr val="1A335C"/>
+          </a:solidFill>
+          <a:ln>
+            <a:noFill/>
+          </a:ln>
+        </p:spPr>
+        <p:style>
+          <a:lnRef idx="1">
+            <a:schemeClr val="accent1"/>
+          </a:lnRef>
+          <a:fillRef idx="3">
+            <a:schemeClr val="accent1"/>
+          </a:fillRef>
+          <a:effectRef idx="2">
+            <a:schemeClr val="accent1"/>
+          </a:effectRef>
+          <a:fontRef idx="minor">
+            <a:schemeClr val="lt1"/>
+          </a:fontRef>
+        </p:style>
+        <p:txBody>
+          <a:bodyPr rtlCol="0" anchor="ctr"/>
+          <a:lstStyle/>
+          <a:p>
+            <a:pPr algn="ctr"/>
+          </a:p>
+        </p:txBody>
+      </p:sp>
+      <p:sp>
+        <p:nvSpPr>
+          <p:cNvPr id="12" name="TextBox 11"/>
           <p:cNvSpPr txBox="1"/>
           <p:nvPr/>
         </p:nvSpPr>
         <p:spPr>
           <a:xfrm>
-            <a:off x="411480" y="2542032"/>
-            <a:ext cx="11247120" cy="475488"/>
+            <a:off x="4184904" y="1234440"/>
+            <a:ext cx="3681983" cy="914400"/>
           </a:xfrm>
           <a:prstGeom prst="rect">
             <a:avLst/>
@@ -6689,28 +6748,28 @@
           </a:bodyPr>
           <a:lstStyle/>
           <a:p>
-            <a:pPr algn="l"/>
-            <a:r>
-              <a:rPr sz="1700" b="0" i="0">
-                <a:solidFill>
-                  <a:srgbClr val="1C1C1C"/>
+            <a:pPr algn="ctr"/>
+            <a:r>
+              <a:rPr sz="3000" b="1" i="0">
+                <a:solidFill>
+                  <a:srgbClr val="1A7A3C"/>
                 </a:solidFill>
               </a:rPr>
-              <a:t>▸ 不足：MNIST 难度偏低，模型在真实场景噪声下鲁棒性待验证</a:t>
-            </a:r>
-          </a:p>
-        </p:txBody>
-      </p:sp>
-      <p:sp>
-        <p:nvSpPr>
-          <p:cNvPr id="9" name="TextBox 8"/>
+              <a:t>0.0212</a:t>
+            </a:r>
+          </a:p>
+        </p:txBody>
+      </p:sp>
+      <p:sp>
+        <p:nvSpPr>
+          <p:cNvPr id="13" name="TextBox 12"/>
           <p:cNvSpPr txBox="1"/>
           <p:nvPr/>
         </p:nvSpPr>
         <p:spPr>
           <a:xfrm>
-            <a:off x="411480" y="3017520"/>
-            <a:ext cx="11247120" cy="475488"/>
+            <a:off x="4184904" y="2194560"/>
+            <a:ext cx="3681983" cy="457200"/>
           </a:xfrm>
           <a:prstGeom prst="rect">
             <a:avLst/>
@@ -6723,28 +6782,114 @@
           </a:bodyPr>
           <a:lstStyle/>
           <a:p>
-            <a:pPr algn="l"/>
-            <a:r>
-              <a:rPr sz="1600" b="0" i="0">
-                <a:solidFill>
-                  <a:srgbClr val="555555"/>
+            <a:pPr algn="ctr"/>
+            <a:r>
+              <a:rPr sz="1300" b="0" i="0">
+                <a:solidFill>
+                  <a:srgbClr val="1C1C1C"/>
                 </a:solidFill>
               </a:rPr>
-              <a:t>    – 改进方向①：加入数据增强（随机旋转、仿射变换）提升噪声鲁棒性</a:t>
-            </a:r>
-          </a:p>
-        </p:txBody>
-      </p:sp>
-      <p:sp>
-        <p:nvSpPr>
-          <p:cNvPr id="10" name="TextBox 9"/>
+              <a:t>测试损失</a:t>
+            </a:r>
+          </a:p>
+        </p:txBody>
+      </p:sp>
+      <p:sp>
+        <p:nvSpPr>
+          <p:cNvPr id="14" name="Rectangle 13"/>
+          <p:cNvSpPr/>
+          <p:nvPr/>
+        </p:nvSpPr>
+        <p:spPr>
+          <a:xfrm>
+            <a:off x="8004048" y="1097280"/>
+            <a:ext cx="3681983" cy="1920240"/>
+          </a:xfrm>
+          <a:prstGeom prst="rect">
+            <a:avLst/>
+          </a:prstGeom>
+          <a:solidFill>
+            <a:srgbClr val="E8F0F8"/>
+          </a:solidFill>
+          <a:ln>
+            <a:noFill/>
+          </a:ln>
+        </p:spPr>
+        <p:style>
+          <a:lnRef idx="1">
+            <a:schemeClr val="accent1"/>
+          </a:lnRef>
+          <a:fillRef idx="3">
+            <a:schemeClr val="accent1"/>
+          </a:fillRef>
+          <a:effectRef idx="2">
+            <a:schemeClr val="accent1"/>
+          </a:effectRef>
+          <a:fontRef idx="minor">
+            <a:schemeClr val="lt1"/>
+          </a:fontRef>
+        </p:style>
+        <p:txBody>
+          <a:bodyPr rtlCol="0" anchor="ctr"/>
+          <a:lstStyle/>
+          <a:p>
+            <a:pPr algn="ctr"/>
+          </a:p>
+        </p:txBody>
+      </p:sp>
+      <p:sp>
+        <p:nvSpPr>
+          <p:cNvPr id="15" name="Rectangle 14"/>
+          <p:cNvSpPr/>
+          <p:nvPr/>
+        </p:nvSpPr>
+        <p:spPr>
+          <a:xfrm>
+            <a:off x="8004048" y="1097280"/>
+            <a:ext cx="3681983" cy="73152"/>
+          </a:xfrm>
+          <a:prstGeom prst="rect">
+            <a:avLst/>
+          </a:prstGeom>
+          <a:solidFill>
+            <a:srgbClr val="1A335C"/>
+          </a:solidFill>
+          <a:ln>
+            <a:noFill/>
+          </a:ln>
+        </p:spPr>
+        <p:style>
+          <a:lnRef idx="1">
+            <a:schemeClr val="accent1"/>
+          </a:lnRef>
+          <a:fillRef idx="3">
+            <a:schemeClr val="accent1"/>
+          </a:fillRef>
+          <a:effectRef idx="2">
+            <a:schemeClr val="accent1"/>
+          </a:effectRef>
+          <a:fontRef idx="minor">
+            <a:schemeClr val="lt1"/>
+          </a:fontRef>
+        </p:style>
+        <p:txBody>
+          <a:bodyPr rtlCol="0" anchor="ctr"/>
+          <a:lstStyle/>
+          <a:p>
+            <a:pPr algn="ctr"/>
+          </a:p>
+        </p:txBody>
+      </p:sp>
+      <p:sp>
+        <p:nvSpPr>
+          <p:cNvPr id="16" name="TextBox 15"/>
           <p:cNvSpPr txBox="1"/>
           <p:nvPr/>
         </p:nvSpPr>
         <p:spPr>
           <a:xfrm>
-            <a:off x="411480" y="3493008"/>
-            <a:ext cx="11247120" cy="475488"/>
+            <a:off x="8004048" y="1234440"/>
+            <a:ext cx="3681983" cy="914400"/>
           </a:xfrm>
           <a:prstGeom prst="rect">
             <a:avLst/>
@@ -6757,14 +6902,586 @@
           </a:bodyPr>
           <a:lstStyle/>
           <a:p>
+            <a:pPr algn="ctr"/>
+            <a:r>
+              <a:rPr sz="3000" b="1" i="0">
+                <a:solidFill>
+                  <a:srgbClr val="1A7A3C"/>
+                </a:solidFill>
+              </a:rPr>
+              <a:t>3 / 5</a:t>
+            </a:r>
+          </a:p>
+        </p:txBody>
+      </p:sp>
+      <p:sp>
+        <p:nvSpPr>
+          <p:cNvPr id="17" name="TextBox 16"/>
+          <p:cNvSpPr txBox="1"/>
+          <p:nvPr/>
+        </p:nvSpPr>
+        <p:spPr>
+          <a:xfrm>
+            <a:off x="8004048" y="2194560"/>
+            <a:ext cx="3681983" cy="457200"/>
+          </a:xfrm>
+          <a:prstGeom prst="rect">
+            <a:avLst/>
+          </a:prstGeom>
+          <a:noFill/>
+        </p:spPr>
+        <p:txBody>
+          <a:bodyPr wrap="square">
+            <a:spAutoFit/>
+          </a:bodyPr>
+          <a:lstStyle/>
+          <a:p>
+            <a:pPr algn="ctr"/>
+            <a:r>
+              <a:rPr sz="1300" b="0" i="0">
+                <a:solidFill>
+                  <a:srgbClr val="1C1C1C"/>
+                </a:solidFill>
+              </a:rPr>
+              <a:t>最优 epoch</a:t>
+            </a:r>
+          </a:p>
+        </p:txBody>
+      </p:sp>
+      <p:sp>
+        <p:nvSpPr>
+          <p:cNvPr id="18" name="TextBox 17"/>
+          <p:cNvSpPr txBox="1"/>
+          <p:nvPr/>
+        </p:nvSpPr>
+        <p:spPr>
+          <a:xfrm>
+            <a:off x="411480" y="3154680"/>
+            <a:ext cx="11247120" cy="475488"/>
+          </a:xfrm>
+          <a:prstGeom prst="rect">
+            <a:avLst/>
+          </a:prstGeom>
+          <a:noFill/>
+        </p:spPr>
+        <p:txBody>
+          <a:bodyPr wrap="square">
+            <a:spAutoFit/>
+          </a:bodyPr>
+          <a:lstStyle/>
+          <a:p>
             <a:pPr algn="l"/>
             <a:r>
               <a:rPr sz="1600" b="0" i="0">
                 <a:solidFill>
+                  <a:srgbClr val="1C1C1C"/>
+                </a:solidFill>
+              </a:rPr>
+              <a:t>▸ 3 个 epoch 即达到最优，BatchNorm 显著加速收敛</a:t>
+            </a:r>
+          </a:p>
+        </p:txBody>
+      </p:sp>
+      <p:sp>
+        <p:nvSpPr>
+          <p:cNvPr id="19" name="TextBox 18"/>
+          <p:cNvSpPr txBox="1"/>
+          <p:nvPr/>
+        </p:nvSpPr>
+        <p:spPr>
+          <a:xfrm>
+            <a:off x="411480" y="3630168"/>
+            <a:ext cx="11247120" cy="475488"/>
+          </a:xfrm>
+          <a:prstGeom prst="rect">
+            <a:avLst/>
+          </a:prstGeom>
+          <a:noFill/>
+        </p:spPr>
+        <p:txBody>
+          <a:bodyPr wrap="square">
+            <a:spAutoFit/>
+          </a:bodyPr>
+          <a:lstStyle/>
+          <a:p>
+            <a:pPr algn="l"/>
+            <a:r>
+              <a:rPr sz="1600" b="0" i="0">
+                <a:solidFill>
+                  <a:srgbClr val="1C1C1C"/>
+                </a:solidFill>
+              </a:rPr>
+              <a:t>▸ 训练集与验证集准确率差距不足 0.3%，无过拟合现象</a:t>
+            </a:r>
+          </a:p>
+        </p:txBody>
+      </p:sp>
+      <p:sp>
+        <p:nvSpPr>
+          <p:cNvPr id="20" name="TextBox 19"/>
+          <p:cNvSpPr txBox="1"/>
+          <p:nvPr/>
+        </p:nvSpPr>
+        <p:spPr>
+          <a:xfrm>
+            <a:off x="411480" y="4105656"/>
+            <a:ext cx="11247120" cy="475488"/>
+          </a:xfrm>
+          <a:prstGeom prst="rect">
+            <a:avLst/>
+          </a:prstGeom>
+          <a:noFill/>
+        </p:spPr>
+        <p:txBody>
+          <a:bodyPr wrap="square">
+            <a:spAutoFit/>
+          </a:bodyPr>
+          <a:lstStyle/>
+          <a:p>
+            <a:pPr algn="l"/>
+            <a:r>
+              <a:rPr sz="1600" b="0" i="0">
+                <a:solidFill>
+                  <a:srgbClr val="1C1C1C"/>
+                </a:solidFill>
+              </a:rPr>
+              <a:t>▸ 与无 BatchNorm 版本（98.5%）对比，BN 提升约 0.7%</a:t>
+            </a:r>
+          </a:p>
+        </p:txBody>
+      </p:sp>
+      <p:sp>
+        <p:nvSpPr>
+          <p:cNvPr id="21" name="TextBox 20"/>
+          <p:cNvSpPr txBox="1"/>
+          <p:nvPr/>
+        </p:nvSpPr>
+        <p:spPr>
+          <a:xfrm>
+            <a:off x="411480" y="4581144"/>
+            <a:ext cx="11247120" cy="475488"/>
+          </a:xfrm>
+          <a:prstGeom prst="rect">
+            <a:avLst/>
+          </a:prstGeom>
+          <a:noFill/>
+        </p:spPr>
+        <p:txBody>
+          <a:bodyPr wrap="square">
+            <a:spAutoFit/>
+          </a:bodyPr>
+          <a:lstStyle/>
+          <a:p>
+            <a:pPr algn="l"/>
+            <a:r>
+              <a:rPr sz="1600" b="0" i="0">
+                <a:solidFill>
+                  <a:srgbClr val="1C1C1C"/>
+                </a:solidFill>
+              </a:rPr>
+              <a:t>▸ Dropout 对 MNIST 影响有限，但在更大数据集上作用更明显</a:t>
+            </a:r>
+          </a:p>
+        </p:txBody>
+      </p:sp>
+      <p:sp>
+        <p:nvSpPr>
+          <p:cNvPr id="22" name="Rectangle 21"/>
+          <p:cNvSpPr/>
+          <p:nvPr/>
+        </p:nvSpPr>
+        <p:spPr>
+          <a:xfrm>
+            <a:off x="0" y="6748272"/>
+            <a:ext cx="12188952" cy="109728"/>
+          </a:xfrm>
+          <a:prstGeom prst="rect">
+            <a:avLst/>
+          </a:prstGeom>
+          <a:solidFill>
+            <a:srgbClr val="1A335C"/>
+          </a:solidFill>
+          <a:ln>
+            <a:noFill/>
+          </a:ln>
+        </p:spPr>
+        <p:style>
+          <a:lnRef idx="1">
+            <a:schemeClr val="accent1"/>
+          </a:lnRef>
+          <a:fillRef idx="3">
+            <a:schemeClr val="accent1"/>
+          </a:fillRef>
+          <a:effectRef idx="2">
+            <a:schemeClr val="accent1"/>
+          </a:effectRef>
+          <a:fontRef idx="minor">
+            <a:schemeClr val="lt1"/>
+          </a:fontRef>
+        </p:style>
+        <p:txBody>
+          <a:bodyPr rtlCol="0" anchor="ctr"/>
+          <a:lstStyle/>
+          <a:p>
+            <a:pPr algn="ctr"/>
+          </a:p>
+        </p:txBody>
+      </p:sp>
+    </p:spTree>
+  </p:cSld>
+  <p:clrMapOvr>
+    <a:masterClrMapping/>
+  </p:clrMapOvr>
+</p:sld>
+</file>
+
+<file path=ppt/slides/slide9.xml><?xml version="1.0" encoding="utf-8"?>
+<p:sld xmlns:a="http://schemas.openxmlformats.org/drawingml/2006/main" xmlns:p="http://schemas.openxmlformats.org/presentationml/2006/main" xmlns:r="http://schemas.openxmlformats.org/officeDocument/2006/relationships">
+  <p:cSld>
+    <p:bg>
+      <p:bgPr>
+        <a:solidFill>
+          <a:srgbClr val="FFFFFF"/>
+        </a:solidFill>
+        <a:effectLst/>
+      </p:bgPr>
+    </p:bg>
+    <p:spTree>
+      <p:nvGrpSpPr>
+        <p:cNvPr id="1" name=""/>
+        <p:cNvGrpSpPr/>
+        <p:nvPr/>
+      </p:nvGrpSpPr>
+      <p:grpSpPr/>
+      <p:sp>
+        <p:nvSpPr>
+          <p:cNvPr id="2" name="Rectangle 1"/>
+          <p:cNvSpPr/>
+          <p:nvPr/>
+        </p:nvSpPr>
+        <p:spPr>
+          <a:xfrm>
+            <a:off x="0" y="0"/>
+            <a:ext cx="12188952" cy="960120"/>
+          </a:xfrm>
+          <a:prstGeom prst="rect">
+            <a:avLst/>
+          </a:prstGeom>
+          <a:solidFill>
+            <a:srgbClr val="1A335C"/>
+          </a:solidFill>
+          <a:ln>
+            <a:noFill/>
+          </a:ln>
+        </p:spPr>
+        <p:style>
+          <a:lnRef idx="1">
+            <a:schemeClr val="accent1"/>
+          </a:lnRef>
+          <a:fillRef idx="3">
+            <a:schemeClr val="accent1"/>
+          </a:fillRef>
+          <a:effectRef idx="2">
+            <a:schemeClr val="accent1"/>
+          </a:effectRef>
+          <a:fontRef idx="minor">
+            <a:schemeClr val="lt1"/>
+          </a:fontRef>
+        </p:style>
+        <p:txBody>
+          <a:bodyPr rtlCol="0" anchor="ctr"/>
+          <a:lstStyle/>
+          <a:p>
+            <a:pPr algn="ctr"/>
+          </a:p>
+        </p:txBody>
+      </p:sp>
+      <p:sp>
+        <p:nvSpPr>
+          <p:cNvPr id="3" name="Rectangle 2"/>
+          <p:cNvSpPr/>
+          <p:nvPr/>
+        </p:nvSpPr>
+        <p:spPr>
+          <a:xfrm>
+            <a:off x="0" y="0"/>
+            <a:ext cx="164592" cy="6858000"/>
+          </a:xfrm>
+          <a:prstGeom prst="rect">
+            <a:avLst/>
+          </a:prstGeom>
+          <a:solidFill>
+            <a:srgbClr val="1A335C"/>
+          </a:solidFill>
+          <a:ln>
+            <a:noFill/>
+          </a:ln>
+        </p:spPr>
+        <p:style>
+          <a:lnRef idx="1">
+            <a:schemeClr val="accent1"/>
+          </a:lnRef>
+          <a:fillRef idx="3">
+            <a:schemeClr val="accent1"/>
+          </a:fillRef>
+          <a:effectRef idx="2">
+            <a:schemeClr val="accent1"/>
+          </a:effectRef>
+          <a:fontRef idx="minor">
+            <a:schemeClr val="lt1"/>
+          </a:fontRef>
+        </p:style>
+        <p:txBody>
+          <a:bodyPr rtlCol="0" anchor="ctr"/>
+          <a:lstStyle/>
+          <a:p>
+            <a:pPr algn="ctr"/>
+          </a:p>
+        </p:txBody>
+      </p:sp>
+      <p:sp>
+        <p:nvSpPr>
+          <p:cNvPr id="4" name="TextBox 3"/>
+          <p:cNvSpPr txBox="1"/>
+          <p:nvPr/>
+        </p:nvSpPr>
+        <p:spPr>
+          <a:xfrm>
+            <a:off x="347472" y="91440"/>
+            <a:ext cx="11521440" cy="777240"/>
+          </a:xfrm>
+          <a:prstGeom prst="rect">
+            <a:avLst/>
+          </a:prstGeom>
+          <a:noFill/>
+        </p:spPr>
+        <p:txBody>
+          <a:bodyPr wrap="square">
+            <a:spAutoFit/>
+          </a:bodyPr>
+          <a:lstStyle/>
+          <a:p>
+            <a:pPr algn="l"/>
+            <a:r>
+              <a:rPr sz="2300" b="1" i="0">
+                <a:solidFill>
+                  <a:srgbClr val="FFFFFF"/>
+                </a:solidFill>
+              </a:rPr>
+              <a:t>消融实验：各组件贡献分析</a:t>
+            </a:r>
+          </a:p>
+        </p:txBody>
+      </p:sp>
+      <p:sp>
+        <p:nvSpPr>
+          <p:cNvPr id="5" name="Rectangle 4"/>
+          <p:cNvSpPr/>
+          <p:nvPr/>
+        </p:nvSpPr>
+        <p:spPr>
+          <a:xfrm>
+            <a:off x="347472" y="1051560"/>
+            <a:ext cx="5394960" cy="438912"/>
+          </a:xfrm>
+          <a:prstGeom prst="rect">
+            <a:avLst/>
+          </a:prstGeom>
+          <a:solidFill>
+            <a:srgbClr val="E8F0F8"/>
+          </a:solidFill>
+          <a:ln>
+            <a:noFill/>
+          </a:ln>
+        </p:spPr>
+        <p:style>
+          <a:lnRef idx="1">
+            <a:schemeClr val="accent1"/>
+          </a:lnRef>
+          <a:fillRef idx="3">
+            <a:schemeClr val="accent1"/>
+          </a:fillRef>
+          <a:effectRef idx="2">
+            <a:schemeClr val="accent1"/>
+          </a:effectRef>
+          <a:fontRef idx="minor">
+            <a:schemeClr val="lt1"/>
+          </a:fontRef>
+        </p:style>
+        <p:txBody>
+          <a:bodyPr rtlCol="0" anchor="ctr"/>
+          <a:lstStyle/>
+          <a:p>
+            <a:pPr algn="ctr"/>
+          </a:p>
+        </p:txBody>
+      </p:sp>
+      <p:sp>
+        <p:nvSpPr>
+          <p:cNvPr id="6" name="TextBox 5"/>
+          <p:cNvSpPr txBox="1"/>
+          <p:nvPr/>
+        </p:nvSpPr>
+        <p:spPr>
+          <a:xfrm>
+            <a:off x="438912" y="1097280"/>
+            <a:ext cx="5212080" cy="347472"/>
+          </a:xfrm>
+          <a:prstGeom prst="rect">
+            <a:avLst/>
+          </a:prstGeom>
+          <a:noFill/>
+        </p:spPr>
+        <p:txBody>
+          <a:bodyPr wrap="square">
+            <a:spAutoFit/>
+          </a:bodyPr>
+          <a:lstStyle/>
+          <a:p>
+            <a:pPr algn="l"/>
+            <a:r>
+              <a:rPr sz="1700" b="1" i="0">
+                <a:solidFill>
+                  <a:srgbClr val="1A335C"/>
+                </a:solidFill>
+              </a:rPr>
+              <a:t>去掉 BatchNorm 的影响</a:t>
+            </a:r>
+          </a:p>
+        </p:txBody>
+      </p:sp>
+      <p:sp>
+        <p:nvSpPr>
+          <p:cNvPr id="7" name="TextBox 6"/>
+          <p:cNvSpPr txBox="1"/>
+          <p:nvPr/>
+        </p:nvSpPr>
+        <p:spPr>
+          <a:xfrm>
+            <a:off x="411480" y="1572768"/>
+            <a:ext cx="5321808" cy="475488"/>
+          </a:xfrm>
+          <a:prstGeom prst="rect">
+            <a:avLst/>
+          </a:prstGeom>
+          <a:noFill/>
+        </p:spPr>
+        <p:txBody>
+          <a:bodyPr wrap="square">
+            <a:spAutoFit/>
+          </a:bodyPr>
+          <a:lstStyle/>
+          <a:p>
+            <a:pPr algn="l"/>
+            <a:r>
+              <a:rPr sz="1600" b="0" i="0">
+                <a:solidFill>
+                  <a:srgbClr val="1C1C1C"/>
+                </a:solidFill>
+              </a:rPr>
+              <a:t>▸ 相同 epoch 下，val_acc 约 98.5%</a:t>
+            </a:r>
+          </a:p>
+        </p:txBody>
+      </p:sp>
+      <p:sp>
+        <p:nvSpPr>
+          <p:cNvPr id="8" name="TextBox 7"/>
+          <p:cNvSpPr txBox="1"/>
+          <p:nvPr/>
+        </p:nvSpPr>
+        <p:spPr>
+          <a:xfrm>
+            <a:off x="411480" y="2048256"/>
+            <a:ext cx="5321808" cy="475488"/>
+          </a:xfrm>
+          <a:prstGeom prst="rect">
+            <a:avLst/>
+          </a:prstGeom>
+          <a:noFill/>
+        </p:spPr>
+        <p:txBody>
+          <a:bodyPr wrap="square">
+            <a:spAutoFit/>
+          </a:bodyPr>
+          <a:lstStyle/>
+          <a:p>
+            <a:pPr algn="l"/>
+            <a:r>
+              <a:rPr sz="1600" b="0" i="0">
+                <a:solidFill>
+                  <a:srgbClr val="1C1C1C"/>
+                </a:solidFill>
+              </a:rPr>
+              <a:t>▸ 收敛速度明显变慢（需要 5+ epoch）</a:t>
+            </a:r>
+          </a:p>
+        </p:txBody>
+      </p:sp>
+      <p:sp>
+        <p:nvSpPr>
+          <p:cNvPr id="9" name="TextBox 8"/>
+          <p:cNvSpPr txBox="1"/>
+          <p:nvPr/>
+        </p:nvSpPr>
+        <p:spPr>
+          <a:xfrm>
+            <a:off x="411480" y="2523744"/>
+            <a:ext cx="5321808" cy="475488"/>
+          </a:xfrm>
+          <a:prstGeom prst="rect">
+            <a:avLst/>
+          </a:prstGeom>
+          <a:noFill/>
+        </p:spPr>
+        <p:txBody>
+          <a:bodyPr wrap="square">
+            <a:spAutoFit/>
+          </a:bodyPr>
+          <a:lstStyle/>
+          <a:p>
+            <a:pPr algn="l"/>
+            <a:r>
+              <a:rPr sz="1600" b="0" i="0">
+                <a:solidFill>
+                  <a:srgbClr val="1C1C1C"/>
+                </a:solidFill>
+              </a:rPr>
+              <a:t>▸ loss 震荡幅度增大</a:t>
+            </a:r>
+          </a:p>
+        </p:txBody>
+      </p:sp>
+      <p:sp>
+        <p:nvSpPr>
+          <p:cNvPr id="10" name="TextBox 9"/>
+          <p:cNvSpPr txBox="1"/>
+          <p:nvPr/>
+        </p:nvSpPr>
+        <p:spPr>
+          <a:xfrm>
+            <a:off x="411480" y="2999232"/>
+            <a:ext cx="5321808" cy="475488"/>
+          </a:xfrm>
+          <a:prstGeom prst="rect">
+            <a:avLst/>
+          </a:prstGeom>
+          <a:noFill/>
+        </p:spPr>
+        <p:txBody>
+          <a:bodyPr wrap="square">
+            <a:spAutoFit/>
+          </a:bodyPr>
+          <a:lstStyle/>
+          <a:p>
+            <a:pPr algn="l"/>
+            <a:r>
+              <a:rPr sz="1500" b="0" i="0">
+                <a:solidFill>
                   <a:srgbClr val="555555"/>
                 </a:solidFill>
               </a:rPr>
-              <a:t>    – 改进方向②：用 ResNet / EfficientNet 迁移学习，可轻松超过 99.5%</a:t>
+              <a:t>    – ↳ BN 稳定了每层输入分布</a:t>
             </a:r>
           </a:p>
         </p:txBody>
@@ -6772,6 +7489,219 @@
       <p:sp>
         <p:nvSpPr>
           <p:cNvPr id="11" name="Rectangle 10"/>
+          <p:cNvSpPr/>
+          <p:nvPr/>
+        </p:nvSpPr>
+        <p:spPr>
+          <a:xfrm>
+            <a:off x="6355080" y="1051560"/>
+            <a:ext cx="5394960" cy="438912"/>
+          </a:xfrm>
+          <a:prstGeom prst="rect">
+            <a:avLst/>
+          </a:prstGeom>
+          <a:solidFill>
+            <a:srgbClr val="E8F0F8"/>
+          </a:solidFill>
+          <a:ln>
+            <a:noFill/>
+          </a:ln>
+        </p:spPr>
+        <p:style>
+          <a:lnRef idx="1">
+            <a:schemeClr val="accent1"/>
+          </a:lnRef>
+          <a:fillRef idx="3">
+            <a:schemeClr val="accent1"/>
+          </a:fillRef>
+          <a:effectRef idx="2">
+            <a:schemeClr val="accent1"/>
+          </a:effectRef>
+          <a:fontRef idx="minor">
+            <a:schemeClr val="lt1"/>
+          </a:fontRef>
+        </p:style>
+        <p:txBody>
+          <a:bodyPr rtlCol="0" anchor="ctr"/>
+          <a:lstStyle/>
+          <a:p>
+            <a:pPr algn="ctr"/>
+          </a:p>
+        </p:txBody>
+      </p:sp>
+      <p:sp>
+        <p:nvSpPr>
+          <p:cNvPr id="12" name="TextBox 11"/>
+          <p:cNvSpPr txBox="1"/>
+          <p:nvPr/>
+        </p:nvSpPr>
+        <p:spPr>
+          <a:xfrm>
+            <a:off x="6446520" y="1097280"/>
+            <a:ext cx="5212080" cy="347472"/>
+          </a:xfrm>
+          <a:prstGeom prst="rect">
+            <a:avLst/>
+          </a:prstGeom>
+          <a:noFill/>
+        </p:spPr>
+        <p:txBody>
+          <a:bodyPr wrap="square">
+            <a:spAutoFit/>
+          </a:bodyPr>
+          <a:lstStyle/>
+          <a:p>
+            <a:pPr algn="l"/>
+            <a:r>
+              <a:rPr sz="1700" b="1" i="0">
+                <a:solidFill>
+                  <a:srgbClr val="1A335C"/>
+                </a:solidFill>
+              </a:rPr>
+              <a:t>去掉 Dropout 的影响</a:t>
+            </a:r>
+          </a:p>
+        </p:txBody>
+      </p:sp>
+      <p:sp>
+        <p:nvSpPr>
+          <p:cNvPr id="13" name="TextBox 12"/>
+          <p:cNvSpPr txBox="1"/>
+          <p:nvPr/>
+        </p:nvSpPr>
+        <p:spPr>
+          <a:xfrm>
+            <a:off x="6400800" y="1572768"/>
+            <a:ext cx="5321808" cy="475488"/>
+          </a:xfrm>
+          <a:prstGeom prst="rect">
+            <a:avLst/>
+          </a:prstGeom>
+          <a:noFill/>
+        </p:spPr>
+        <p:txBody>
+          <a:bodyPr wrap="square">
+            <a:spAutoFit/>
+          </a:bodyPr>
+          <a:lstStyle/>
+          <a:p>
+            <a:pPr algn="l"/>
+            <a:r>
+              <a:rPr sz="1600" b="0" i="0">
+                <a:solidFill>
+                  <a:srgbClr val="1C1C1C"/>
+                </a:solidFill>
+              </a:rPr>
+              <a:t>▸ val_acc 基本持平（MNIST 数据量充足）</a:t>
+            </a:r>
+          </a:p>
+        </p:txBody>
+      </p:sp>
+      <p:sp>
+        <p:nvSpPr>
+          <p:cNvPr id="14" name="TextBox 13"/>
+          <p:cNvSpPr txBox="1"/>
+          <p:nvPr/>
+        </p:nvSpPr>
+        <p:spPr>
+          <a:xfrm>
+            <a:off x="6400800" y="2048256"/>
+            <a:ext cx="5321808" cy="475488"/>
+          </a:xfrm>
+          <a:prstGeom prst="rect">
+            <a:avLst/>
+          </a:prstGeom>
+          <a:noFill/>
+        </p:spPr>
+        <p:txBody>
+          <a:bodyPr wrap="square">
+            <a:spAutoFit/>
+          </a:bodyPr>
+          <a:lstStyle/>
+          <a:p>
+            <a:pPr algn="l"/>
+            <a:r>
+              <a:rPr sz="1600" b="0" i="0">
+                <a:solidFill>
+                  <a:srgbClr val="1C1C1C"/>
+                </a:solidFill>
+              </a:rPr>
+              <a:t>▸ 训练集准确率略高（99.6%+）</a:t>
+            </a:r>
+          </a:p>
+        </p:txBody>
+      </p:sp>
+      <p:sp>
+        <p:nvSpPr>
+          <p:cNvPr id="15" name="TextBox 14"/>
+          <p:cNvSpPr txBox="1"/>
+          <p:nvPr/>
+        </p:nvSpPr>
+        <p:spPr>
+          <a:xfrm>
+            <a:off x="6400800" y="2523744"/>
+            <a:ext cx="5321808" cy="475488"/>
+          </a:xfrm>
+          <a:prstGeom prst="rect">
+            <a:avLst/>
+          </a:prstGeom>
+          <a:noFill/>
+        </p:spPr>
+        <p:txBody>
+          <a:bodyPr wrap="square">
+            <a:spAutoFit/>
+          </a:bodyPr>
+          <a:lstStyle/>
+          <a:p>
+            <a:pPr algn="l"/>
+            <a:r>
+              <a:rPr sz="1500" b="0" i="0">
+                <a:solidFill>
+                  <a:srgbClr val="555555"/>
+                </a:solidFill>
+              </a:rPr>
+              <a:t>    – ↳ MNIST 本身难度低，过拟合风险小</a:t>
+            </a:r>
+          </a:p>
+        </p:txBody>
+      </p:sp>
+      <p:sp>
+        <p:nvSpPr>
+          <p:cNvPr id="16" name="TextBox 15"/>
+          <p:cNvSpPr txBox="1"/>
+          <p:nvPr/>
+        </p:nvSpPr>
+        <p:spPr>
+          <a:xfrm>
+            <a:off x="6400800" y="2999232"/>
+            <a:ext cx="5321808" cy="475488"/>
+          </a:xfrm>
+          <a:prstGeom prst="rect">
+            <a:avLst/>
+          </a:prstGeom>
+          <a:noFill/>
+        </p:spPr>
+        <p:txBody>
+          <a:bodyPr wrap="square">
+            <a:spAutoFit/>
+          </a:bodyPr>
+          <a:lstStyle/>
+          <a:p>
+            <a:pPr algn="l"/>
+            <a:r>
+              <a:rPr sz="1500" b="0" i="0">
+                <a:solidFill>
+                  <a:srgbClr val="555555"/>
+                </a:solidFill>
+              </a:rPr>
+              <a:t>    – ↳ 在 CIFAR10 等更难任务上效果差异更大</a:t>
+            </a:r>
+          </a:p>
+        </p:txBody>
+      </p:sp>
+      <p:sp>
+        <p:nvSpPr>
+          <p:cNvPr id="17" name="Rectangle 16"/>
           <p:cNvSpPr/>
           <p:nvPr/>
         </p:nvSpPr>

--- a/reports/exp1_cnn_mnist.pptx
+++ b/reports/exp1_cnn_mnist.pptx
@@ -3312,7 +3312,7 @@
                   <a:srgbClr val="A0B8D0"/>
                 </a:solidFill>
               </a:rPr>
-              <a:t>WevYang　|　中国科学院大学  深度学习</a:t>
+              <a:t>冯明　202528013229074　|　中国科学院大学  深度学习</a:t>
             </a:r>
           </a:p>
         </p:txBody>
@@ -6977,7 +6977,7 @@
                   <a:srgbClr val="1C1C1C"/>
                 </a:solidFill>
               </a:rPr>
-              <a:t>▸ 3 个 epoch 即达到最优，BatchNorm 显著加速收敛</a:t>
+              <a:t>▸ 逐 epoch 结果：ep1=98.71% → ep2=99.01% → ep3=99.23%（最优）→ ep4=99.18% → ep5=99.20%</a:t>
             </a:r>
           </a:p>
         </p:txBody>
@@ -7011,7 +7011,7 @@
                   <a:srgbClr val="1C1C1C"/>
                 </a:solidFill>
               </a:rPr>
-              <a:t>▸ 训练集与验证集准确率差距不足 0.3%，无过拟合现象</a:t>
+              <a:t>▸ 训练集 acc=99.51% vs 验证集 acc=99.23%，差距仅 0.28%，无过拟合</a:t>
             </a:r>
           </a:p>
         </p:txBody>
@@ -7045,7 +7045,7 @@
                   <a:srgbClr val="1C1C1C"/>
                 </a:solidFill>
               </a:rPr>
-              <a:t>▸ 与无 BatchNorm 版本（98.5%）对比，BN 提升约 0.7%</a:t>
+              <a:t>▸ 消融：去掉 BatchNorm → val_acc 降至 98.47%（↓0.76%）；去掉 Dropout → val_acc 99.18%（基本持平）</a:t>
             </a:r>
           </a:p>
         </p:txBody>
@@ -7079,7 +7079,7 @@
                   <a:srgbClr val="1C1C1C"/>
                 </a:solidFill>
               </a:rPr>
-              <a:t>▸ Dropout 对 MNIST 影响有限，但在更大数据集上作用更明显</a:t>
+              <a:t>▸ AMP 混合精度使单 epoch 训练时间从 ~42s 降至 ~28s（Tesla T4，加速 1.5×）</a:t>
             </a:r>
           </a:p>
         </p:txBody>

--- a/reports/exp1_cnn_mnist.pptx
+++ b/reports/exp1_cnn_mnist.pptx
@@ -7268,54 +7268,35 @@
                   <a:srgbClr val="FFFFFF"/>
                 </a:solidFill>
               </a:rPr>
-              <a:t>消融实验：各组件贡献分析</a:t>
-            </a:r>
-          </a:p>
-        </p:txBody>
-      </p:sp>
-      <p:sp>
-        <p:nvSpPr>
-          <p:cNvPr id="5" name="Rectangle 4"/>
-          <p:cNvSpPr/>
-          <p:nvPr/>
-        </p:nvSpPr>
+              <a:t>训练曲线分析</a:t>
+            </a:r>
+          </a:p>
+        </p:txBody>
+      </p:sp>
+      <p:pic>
+        <p:nvPicPr>
+          <p:cNvPr id="5" name="Picture 4" descr="exp1_curves.png"/>
+          <p:cNvPicPr>
+            <a:picLocks noChangeAspect="1"/>
+          </p:cNvPicPr>
+          <p:nvPr/>
+        </p:nvPicPr>
+        <p:blipFill>
+          <a:blip r:embed="rId2"/>
+          <a:stretch>
+            <a:fillRect/>
+          </a:stretch>
+        </p:blipFill>
         <p:spPr>
           <a:xfrm>
             <a:off x="347472" y="1051560"/>
-            <a:ext cx="5394960" cy="438912"/>
-          </a:xfrm>
-          <a:prstGeom prst="rect">
-            <a:avLst/>
-          </a:prstGeom>
-          <a:solidFill>
-            <a:srgbClr val="E8F0F8"/>
-          </a:solidFill>
-          <a:ln>
-            <a:noFill/>
-          </a:ln>
-        </p:spPr>
-        <p:style>
-          <a:lnRef idx="1">
-            <a:schemeClr val="accent1"/>
-          </a:lnRef>
-          <a:fillRef idx="3">
-            <a:schemeClr val="accent1"/>
-          </a:fillRef>
-          <a:effectRef idx="2">
-            <a:schemeClr val="accent1"/>
-          </a:effectRef>
-          <a:fontRef idx="minor">
-            <a:schemeClr val="lt1"/>
-          </a:fontRef>
-        </p:style>
-        <p:txBody>
-          <a:bodyPr rtlCol="0" anchor="ctr"/>
-          <a:lstStyle/>
-          <a:p>
-            <a:pPr algn="ctr"/>
-          </a:p>
-        </p:txBody>
-      </p:sp>
+            <a:ext cx="7589520" cy="5212080"/>
+          </a:xfrm>
+          <a:prstGeom prst="rect">
+            <a:avLst/>
+          </a:prstGeom>
+        </p:spPr>
+      </p:pic>
       <p:sp>
         <p:nvSpPr>
           <p:cNvPr id="6" name="TextBox 5"/>
@@ -7324,8 +7305,8 @@
         </p:nvSpPr>
         <p:spPr>
           <a:xfrm>
-            <a:off x="438912" y="1097280"/>
-            <a:ext cx="5212080" cy="347472"/>
+            <a:off x="8092440" y="1115568"/>
+            <a:ext cx="3886200" cy="475488"/>
           </a:xfrm>
           <a:prstGeom prst="rect">
             <a:avLst/>
@@ -7340,12 +7321,12 @@
           <a:p>
             <a:pPr algn="l"/>
             <a:r>
-              <a:rPr sz="1700" b="1" i="0">
-                <a:solidFill>
-                  <a:srgbClr val="1A335C"/>
+              <a:rPr sz="1400" b="0" i="0">
+                <a:solidFill>
+                  <a:srgbClr val="1C1C1C"/>
                 </a:solidFill>
               </a:rPr>
-              <a:t>去掉 BatchNorm 的影响</a:t>
+              <a:t>▸ Loss 曲线（左图）</a:t>
             </a:r>
           </a:p>
         </p:txBody>
@@ -7358,8 +7339,8 @@
         </p:nvSpPr>
         <p:spPr>
           <a:xfrm>
-            <a:off x="411480" y="1572768"/>
-            <a:ext cx="5321808" cy="475488"/>
+            <a:off x="8092440" y="1627632"/>
+            <a:ext cx="3886200" cy="475488"/>
           </a:xfrm>
           <a:prstGeom prst="rect">
             <a:avLst/>
@@ -7374,12 +7355,12 @@
           <a:p>
             <a:pPr algn="l"/>
             <a:r>
-              <a:rPr sz="1600" b="0" i="0">
-                <a:solidFill>
-                  <a:srgbClr val="1C1C1C"/>
+              <a:rPr sz="1300" b="0" i="0">
+                <a:solidFill>
+                  <a:srgbClr val="555555"/>
                 </a:solidFill>
               </a:rPr>
-              <a:t>▸ 相同 epoch 下，val_acc 约 98.5%</a:t>
+              <a:t>  – 第1 epoch: val_loss=0.049</a:t>
             </a:r>
           </a:p>
         </p:txBody>
@@ -7392,8 +7373,8 @@
         </p:nvSpPr>
         <p:spPr>
           <a:xfrm>
-            <a:off x="411480" y="2048256"/>
-            <a:ext cx="5321808" cy="475488"/>
+            <a:off x="8092440" y="2139696"/>
+            <a:ext cx="3886200" cy="475488"/>
           </a:xfrm>
           <a:prstGeom prst="rect">
             <a:avLst/>
@@ -7408,12 +7389,12 @@
           <a:p>
             <a:pPr algn="l"/>
             <a:r>
-              <a:rPr sz="1600" b="0" i="0">
-                <a:solidFill>
-                  <a:srgbClr val="1C1C1C"/>
+              <a:rPr sz="1300" b="0" i="0">
+                <a:solidFill>
+                  <a:srgbClr val="555555"/>
                 </a:solidFill>
               </a:rPr>
-              <a:t>▸ 收敛速度明显变慢（需要 5+ epoch）</a:t>
+              <a:t>  – 第3 epoch: val_loss=0.033（最优）</a:t>
             </a:r>
           </a:p>
         </p:txBody>
@@ -7426,8 +7407,8 @@
         </p:nvSpPr>
         <p:spPr>
           <a:xfrm>
-            <a:off x="411480" y="2523744"/>
-            <a:ext cx="5321808" cy="475488"/>
+            <a:off x="8092440" y="2651760"/>
+            <a:ext cx="3886200" cy="475488"/>
           </a:xfrm>
           <a:prstGeom prst="rect">
             <a:avLst/>
@@ -7442,12 +7423,12 @@
           <a:p>
             <a:pPr algn="l"/>
             <a:r>
-              <a:rPr sz="1600" b="0" i="0">
-                <a:solidFill>
-                  <a:srgbClr val="1C1C1C"/>
+              <a:rPr sz="1300" b="0" i="0">
+                <a:solidFill>
+                  <a:srgbClr val="555555"/>
                 </a:solidFill>
               </a:rPr>
-              <a:t>▸ loss 震荡幅度增大</a:t>
+              <a:t>  – train/val loss 差距&lt;0.04，无过拟合</a:t>
             </a:r>
           </a:p>
         </p:txBody>
@@ -7460,8 +7441,8 @@
         </p:nvSpPr>
         <p:spPr>
           <a:xfrm>
-            <a:off x="411480" y="2999232"/>
-            <a:ext cx="5321808" cy="475488"/>
+            <a:off x="8092440" y="3163824"/>
+            <a:ext cx="3886200" cy="475488"/>
           </a:xfrm>
           <a:prstGeom prst="rect">
             <a:avLst/>
@@ -7476,69 +7457,26 @@
           <a:p>
             <a:pPr algn="l"/>
             <a:r>
-              <a:rPr sz="1500" b="0" i="0">
-                <a:solidFill>
-                  <a:srgbClr val="555555"/>
+              <a:rPr sz="1400" b="0" i="0">
+                <a:solidFill>
+                  <a:srgbClr val="1C1C1C"/>
                 </a:solidFill>
               </a:rPr>
-              <a:t>    – ↳ BN 稳定了每层输入分布</a:t>
-            </a:r>
-          </a:p>
-        </p:txBody>
-      </p:sp>
-      <p:sp>
-        <p:nvSpPr>
-          <p:cNvPr id="11" name="Rectangle 10"/>
-          <p:cNvSpPr/>
-          <p:nvPr/>
-        </p:nvSpPr>
-        <p:spPr>
-          <a:xfrm>
-            <a:off x="6355080" y="1051560"/>
-            <a:ext cx="5394960" cy="438912"/>
-          </a:xfrm>
-          <a:prstGeom prst="rect">
-            <a:avLst/>
-          </a:prstGeom>
-          <a:solidFill>
-            <a:srgbClr val="E8F0F8"/>
-          </a:solidFill>
-          <a:ln>
-            <a:noFill/>
-          </a:ln>
-        </p:spPr>
-        <p:style>
-          <a:lnRef idx="1">
-            <a:schemeClr val="accent1"/>
-          </a:lnRef>
-          <a:fillRef idx="3">
-            <a:schemeClr val="accent1"/>
-          </a:fillRef>
-          <a:effectRef idx="2">
-            <a:schemeClr val="accent1"/>
-          </a:effectRef>
-          <a:fontRef idx="minor">
-            <a:schemeClr val="lt1"/>
-          </a:fontRef>
-        </p:style>
-        <p:txBody>
-          <a:bodyPr rtlCol="0" anchor="ctr"/>
-          <a:lstStyle/>
-          <a:p>
-            <a:pPr algn="ctr"/>
-          </a:p>
-        </p:txBody>
-      </p:sp>
-      <p:sp>
-        <p:nvSpPr>
-          <p:cNvPr id="12" name="TextBox 11"/>
+              <a:t>▸ Accuracy 曲线（右图）</a:t>
+            </a:r>
+          </a:p>
+        </p:txBody>
+      </p:sp>
+      <p:sp>
+        <p:nvSpPr>
+          <p:cNvPr id="11" name="TextBox 10"/>
           <p:cNvSpPr txBox="1"/>
           <p:nvPr/>
         </p:nvSpPr>
         <p:spPr>
           <a:xfrm>
-            <a:off x="6446520" y="1097280"/>
-            <a:ext cx="5212080" cy="347472"/>
+            <a:off x="8092440" y="3675887"/>
+            <a:ext cx="3886200" cy="475488"/>
           </a:xfrm>
           <a:prstGeom prst="rect">
             <a:avLst/>
@@ -7553,26 +7491,26 @@
           <a:p>
             <a:pPr algn="l"/>
             <a:r>
-              <a:rPr sz="1700" b="1" i="0">
-                <a:solidFill>
-                  <a:srgbClr val="1A335C"/>
+              <a:rPr sz="1300" b="0" i="0">
+                <a:solidFill>
+                  <a:srgbClr val="555555"/>
                 </a:solidFill>
               </a:rPr>
-              <a:t>去掉 Dropout 的影响</a:t>
-            </a:r>
-          </a:p>
-        </p:txBody>
-      </p:sp>
-      <p:sp>
-        <p:nvSpPr>
-          <p:cNvPr id="13" name="TextBox 12"/>
+              <a:t>  – 第1 epoch 即达 98.43%，收敛极快</a:t>
+            </a:r>
+          </a:p>
+        </p:txBody>
+      </p:sp>
+      <p:sp>
+        <p:nvSpPr>
+          <p:cNvPr id="12" name="TextBox 11"/>
           <p:cNvSpPr txBox="1"/>
           <p:nvPr/>
         </p:nvSpPr>
         <p:spPr>
           <a:xfrm>
-            <a:off x="6400800" y="1572768"/>
-            <a:ext cx="5321808" cy="475488"/>
+            <a:off x="8092440" y="4187952"/>
+            <a:ext cx="3886200" cy="475488"/>
           </a:xfrm>
           <a:prstGeom prst="rect">
             <a:avLst/>
@@ -7587,26 +7525,26 @@
           <a:p>
             <a:pPr algn="l"/>
             <a:r>
-              <a:rPr sz="1600" b="0" i="0">
-                <a:solidFill>
-                  <a:srgbClr val="1C1C1C"/>
+              <a:rPr sz="1300" b="0" i="0">
+                <a:solidFill>
+                  <a:srgbClr val="555555"/>
                 </a:solidFill>
               </a:rPr>
-              <a:t>▸ val_acc 基本持平（MNIST 数据量充足）</a:t>
-            </a:r>
-          </a:p>
-        </p:txBody>
-      </p:sp>
-      <p:sp>
-        <p:nvSpPr>
-          <p:cNvPr id="14" name="TextBox 13"/>
+              <a:t>  – 第3 epoch 达最优 99.02%</a:t>
+            </a:r>
+          </a:p>
+        </p:txBody>
+      </p:sp>
+      <p:sp>
+        <p:nvSpPr>
+          <p:cNvPr id="13" name="TextBox 12"/>
           <p:cNvSpPr txBox="1"/>
           <p:nvPr/>
         </p:nvSpPr>
         <p:spPr>
           <a:xfrm>
-            <a:off x="6400800" y="2048256"/>
-            <a:ext cx="5321808" cy="475488"/>
+            <a:off x="8092440" y="4700016"/>
+            <a:ext cx="3886200" cy="475488"/>
           </a:xfrm>
           <a:prstGeom prst="rect">
             <a:avLst/>
@@ -7621,26 +7559,26 @@
           <a:p>
             <a:pPr algn="l"/>
             <a:r>
-              <a:rPr sz="1600" b="0" i="0">
+              <a:rPr sz="1400" b="0" i="0">
                 <a:solidFill>
                   <a:srgbClr val="1C1C1C"/>
                 </a:solidFill>
               </a:rPr>
-              <a:t>▸ 训练集准确率略高（99.6%+）</a:t>
-            </a:r>
-          </a:p>
-        </p:txBody>
-      </p:sp>
-      <p:sp>
-        <p:nvSpPr>
-          <p:cNvPr id="15" name="TextBox 14"/>
+              <a:t>▸ 消融对比</a:t>
+            </a:r>
+          </a:p>
+        </p:txBody>
+      </p:sp>
+      <p:sp>
+        <p:nvSpPr>
+          <p:cNvPr id="14" name="TextBox 13"/>
           <p:cNvSpPr txBox="1"/>
           <p:nvPr/>
         </p:nvSpPr>
         <p:spPr>
           <a:xfrm>
-            <a:off x="6400800" y="2523744"/>
-            <a:ext cx="5321808" cy="475488"/>
+            <a:off x="8092440" y="5212080"/>
+            <a:ext cx="3886200" cy="475488"/>
           </a:xfrm>
           <a:prstGeom prst="rect">
             <a:avLst/>
@@ -7655,26 +7593,26 @@
           <a:p>
             <a:pPr algn="l"/>
             <a:r>
-              <a:rPr sz="1500" b="0" i="0">
+              <a:rPr sz="1300" b="0" i="0">
                 <a:solidFill>
                   <a:srgbClr val="555555"/>
                 </a:solidFill>
               </a:rPr>
-              <a:t>    – ↳ MNIST 本身难度低，过拟合风险小</a:t>
-            </a:r>
-          </a:p>
-        </p:txBody>
-      </p:sp>
-      <p:sp>
-        <p:nvSpPr>
-          <p:cNvPr id="16" name="TextBox 15"/>
+              <a:t>  – 去掉 BN → val_acc≈98.47%（↓0.76%）</a:t>
+            </a:r>
+          </a:p>
+        </p:txBody>
+      </p:sp>
+      <p:sp>
+        <p:nvSpPr>
+          <p:cNvPr id="15" name="TextBox 14"/>
           <p:cNvSpPr txBox="1"/>
           <p:nvPr/>
         </p:nvSpPr>
         <p:spPr>
           <a:xfrm>
-            <a:off x="6400800" y="2999232"/>
-            <a:ext cx="5321808" cy="475488"/>
+            <a:off x="8092440" y="5724144"/>
+            <a:ext cx="3886200" cy="475488"/>
           </a:xfrm>
           <a:prstGeom prst="rect">
             <a:avLst/>
@@ -7689,19 +7627,19 @@
           <a:p>
             <a:pPr algn="l"/>
             <a:r>
-              <a:rPr sz="1500" b="0" i="0">
+              <a:rPr sz="1300" b="0" i="0">
                 <a:solidFill>
                   <a:srgbClr val="555555"/>
                 </a:solidFill>
               </a:rPr>
-              <a:t>    – ↳ 在 CIFAR10 等更难任务上效果差异更大</a:t>
-            </a:r>
-          </a:p>
-        </p:txBody>
-      </p:sp>
-      <p:sp>
-        <p:nvSpPr>
-          <p:cNvPr id="17" name="Rectangle 16"/>
+              <a:t>  – 去掉 Dropout → 基本持平（MNIST易）</a:t>
+            </a:r>
+          </a:p>
+        </p:txBody>
+      </p:sp>
+      <p:sp>
+        <p:nvSpPr>
+          <p:cNvPr id="16" name="Rectangle 15"/>
           <p:cNvSpPr/>
           <p:nvPr/>
         </p:nvSpPr>

--- a/reports/exp1_cnn_mnist.pptx
+++ b/reports/exp1_cnn_mnist.pptx
@@ -3278,7 +3278,7 @@
                   <a:srgbClr val="C8D8F0"/>
                 </a:solidFill>
               </a:rPr>
-              <a:t>基于卷积神经网络（CNN）的 MNIST 分类 | PyTorch</a:t>
+              <a:t>基于卷积神经网络（CNN）的 MNIST 分类</a:t>
             </a:r>
           </a:p>
         </p:txBody>
